--- a/folien/16-terraform.pptx
+++ b/folien/16-terraform.pptx
@@ -34,9 +34,12 @@
     <p:sldId id="282" r:id="rId28"/>
     <p:sldId id="283" r:id="rId29"/>
     <p:sldId id="284" r:id="rId30"/>
+    <p:sldId id="285" r:id="rId31"/>
+    <p:sldId id="286" r:id="rId32"/>
+    <p:sldId id="287" r:id="rId33"/>
   </p:sldIdLst>
   <p:notesMasterIdLst>
-    <p:notesMasterId r:id="rId31"/>
+    <p:notesMasterId r:id="rId34"/>
   </p:notesMasterIdLst>
   <p:sldSz cx="9144000" cy="5143500"/>
   <p:notesSz cx="5143500" cy="9144000"/>
@@ -2490,6 +2493,270 @@
             <a:fld id="{F7021451-1387-4CA6-816F-3879F97B5CBC}" type="slidenum">
               <a:rPr lang="en-US"/>
               <a:t>3</a:t>
+            </a:fld>
+            <a:endParaRPr lang="en-US"/>
+          </a:p>
+        </p:txBody>
+      </p:sp>
+    </p:spTree>
+    <p:extLst>
+      <p:ext uri="{BB962C8B-B14F-4D97-AF65-F5344CB8AC3E}">
+        <p14:creationId xmlns:p14="http://schemas.microsoft.com/office/powerpoint/2010/main" val="1024086991"/>
+      </p:ext>
+    </p:extLst>
+  </p:cSld>
+  <p:clrMapOvr>
+    <a:masterClrMapping/>
+  </p:clrMapOvr>
+</p:notes>
+</file>
+
+<file path=ppt/notesSlides/notesSlide30.xml><?xml version="1.0" encoding="utf-8"?>
+<p:notes xmlns:a="http://schemas.openxmlformats.org/drawingml/2006/main" xmlns:r="http://schemas.openxmlformats.org/officeDocument/2006/relationships" xmlns:p="http://schemas.openxmlformats.org/presentationml/2006/main">
+  <p:cSld>
+    <p:spTree>
+      <p:nvGrpSpPr>
+        <p:cNvPr id="1" name=""/>
+        <p:cNvGrpSpPr/>
+        <p:nvPr/>
+      </p:nvGrpSpPr>
+      <p:grpSpPr>
+        <a:xfrm>
+          <a:off x="0" y="0"/>
+          <a:ext cx="0" cy="0"/>
+          <a:chOff x="0" y="0"/>
+          <a:chExt cx="0" cy="0"/>
+        </a:xfrm>
+      </p:grpSpPr>
+      <p:sp>
+        <p:nvSpPr>
+          <p:cNvPr id="2" name="Slide Image Placeholder 1"/>
+          <p:cNvSpPr>
+            <a:spLocks noGrp="1" noRot="1" noChangeAspect="1"/>
+          </p:cNvSpPr>
+          <p:nvPr>
+            <p:ph type="sldImg"/>
+          </p:nvPr>
+        </p:nvSpPr>
+        <p:spPr/>
+      </p:sp>
+      <p:sp>
+        <p:nvSpPr>
+          <p:cNvPr id="3" name="Notes Placeholder 2"/>
+          <p:cNvSpPr>
+            <a:spLocks noGrp="1"/>
+          </p:cNvSpPr>
+          <p:nvPr>
+            <p:ph type="body" idx="1"/>
+          </p:nvPr>
+        </p:nvSpPr>
+        <p:spPr/>
+        <p:txBody>
+          <a:bodyPr/>
+          <a:lstStyle/>
+          <a:p>
+            <a:r>
+              <a:rPr lang="en-US" dirty="0"/>
+              <a:t/>
+            </a:r>
+            <a:endParaRPr lang="en-US" dirty="0"/>
+          </a:p>
+        </p:txBody>
+      </p:sp>
+      <p:sp>
+        <p:nvSpPr>
+          <p:cNvPr id="4" name="Slide Number Placeholder 3"/>
+          <p:cNvSpPr>
+            <a:spLocks noGrp="1"/>
+          </p:cNvSpPr>
+          <p:nvPr>
+            <p:ph type="sldNum" sz="quarter" idx="10"/>
+          </p:nvPr>
+        </p:nvSpPr>
+        <p:spPr/>
+        <p:txBody>
+          <a:bodyPr/>
+          <a:lstStyle/>
+          <a:p>
+            <a:fld id="{F7021451-1387-4CA6-816F-3879F97B5CBC}" type="slidenum">
+              <a:rPr lang="en-US"/>
+              <a:t>30</a:t>
+            </a:fld>
+            <a:endParaRPr lang="en-US"/>
+          </a:p>
+        </p:txBody>
+      </p:sp>
+    </p:spTree>
+    <p:extLst>
+      <p:ext uri="{BB962C8B-B14F-4D97-AF65-F5344CB8AC3E}">
+        <p14:creationId xmlns:p14="http://schemas.microsoft.com/office/powerpoint/2010/main" val="1024086991"/>
+      </p:ext>
+    </p:extLst>
+  </p:cSld>
+  <p:clrMapOvr>
+    <a:masterClrMapping/>
+  </p:clrMapOvr>
+</p:notes>
+</file>
+
+<file path=ppt/notesSlides/notesSlide31.xml><?xml version="1.0" encoding="utf-8"?>
+<p:notes xmlns:a="http://schemas.openxmlformats.org/drawingml/2006/main" xmlns:r="http://schemas.openxmlformats.org/officeDocument/2006/relationships" xmlns:p="http://schemas.openxmlformats.org/presentationml/2006/main">
+  <p:cSld>
+    <p:spTree>
+      <p:nvGrpSpPr>
+        <p:cNvPr id="1" name=""/>
+        <p:cNvGrpSpPr/>
+        <p:nvPr/>
+      </p:nvGrpSpPr>
+      <p:grpSpPr>
+        <a:xfrm>
+          <a:off x="0" y="0"/>
+          <a:ext cx="0" cy="0"/>
+          <a:chOff x="0" y="0"/>
+          <a:chExt cx="0" cy="0"/>
+        </a:xfrm>
+      </p:grpSpPr>
+      <p:sp>
+        <p:nvSpPr>
+          <p:cNvPr id="2" name="Slide Image Placeholder 1"/>
+          <p:cNvSpPr>
+            <a:spLocks noGrp="1" noRot="1" noChangeAspect="1"/>
+          </p:cNvSpPr>
+          <p:nvPr>
+            <p:ph type="sldImg"/>
+          </p:nvPr>
+        </p:nvSpPr>
+        <p:spPr/>
+      </p:sp>
+      <p:sp>
+        <p:nvSpPr>
+          <p:cNvPr id="3" name="Notes Placeholder 2"/>
+          <p:cNvSpPr>
+            <a:spLocks noGrp="1"/>
+          </p:cNvSpPr>
+          <p:nvPr>
+            <p:ph type="body" idx="1"/>
+          </p:nvPr>
+        </p:nvSpPr>
+        <p:spPr/>
+        <p:txBody>
+          <a:bodyPr/>
+          <a:lstStyle/>
+          <a:p>
+            <a:r>
+              <a:rPr lang="en-US" dirty="0"/>
+              <a:t/>
+            </a:r>
+            <a:endParaRPr lang="en-US" dirty="0"/>
+          </a:p>
+        </p:txBody>
+      </p:sp>
+      <p:sp>
+        <p:nvSpPr>
+          <p:cNvPr id="4" name="Slide Number Placeholder 3"/>
+          <p:cNvSpPr>
+            <a:spLocks noGrp="1"/>
+          </p:cNvSpPr>
+          <p:nvPr>
+            <p:ph type="sldNum" sz="quarter" idx="10"/>
+          </p:nvPr>
+        </p:nvSpPr>
+        <p:spPr/>
+        <p:txBody>
+          <a:bodyPr/>
+          <a:lstStyle/>
+          <a:p>
+            <a:fld id="{F7021451-1387-4CA6-816F-3879F97B5CBC}" type="slidenum">
+              <a:rPr lang="en-US"/>
+              <a:t>31</a:t>
+            </a:fld>
+            <a:endParaRPr lang="en-US"/>
+          </a:p>
+        </p:txBody>
+      </p:sp>
+    </p:spTree>
+    <p:extLst>
+      <p:ext uri="{BB962C8B-B14F-4D97-AF65-F5344CB8AC3E}">
+        <p14:creationId xmlns:p14="http://schemas.microsoft.com/office/powerpoint/2010/main" val="1024086991"/>
+      </p:ext>
+    </p:extLst>
+  </p:cSld>
+  <p:clrMapOvr>
+    <a:masterClrMapping/>
+  </p:clrMapOvr>
+</p:notes>
+</file>
+
+<file path=ppt/notesSlides/notesSlide32.xml><?xml version="1.0" encoding="utf-8"?>
+<p:notes xmlns:a="http://schemas.openxmlformats.org/drawingml/2006/main" xmlns:r="http://schemas.openxmlformats.org/officeDocument/2006/relationships" xmlns:p="http://schemas.openxmlformats.org/presentationml/2006/main">
+  <p:cSld>
+    <p:spTree>
+      <p:nvGrpSpPr>
+        <p:cNvPr id="1" name=""/>
+        <p:cNvGrpSpPr/>
+        <p:nvPr/>
+      </p:nvGrpSpPr>
+      <p:grpSpPr>
+        <a:xfrm>
+          <a:off x="0" y="0"/>
+          <a:ext cx="0" cy="0"/>
+          <a:chOff x="0" y="0"/>
+          <a:chExt cx="0" cy="0"/>
+        </a:xfrm>
+      </p:grpSpPr>
+      <p:sp>
+        <p:nvSpPr>
+          <p:cNvPr id="2" name="Slide Image Placeholder 1"/>
+          <p:cNvSpPr>
+            <a:spLocks noGrp="1" noRot="1" noChangeAspect="1"/>
+          </p:cNvSpPr>
+          <p:nvPr>
+            <p:ph type="sldImg"/>
+          </p:nvPr>
+        </p:nvSpPr>
+        <p:spPr/>
+      </p:sp>
+      <p:sp>
+        <p:nvSpPr>
+          <p:cNvPr id="3" name="Notes Placeholder 2"/>
+          <p:cNvSpPr>
+            <a:spLocks noGrp="1"/>
+          </p:cNvSpPr>
+          <p:nvPr>
+            <p:ph type="body" idx="1"/>
+          </p:nvPr>
+        </p:nvSpPr>
+        <p:spPr/>
+        <p:txBody>
+          <a:bodyPr/>
+          <a:lstStyle/>
+          <a:p>
+            <a:r>
+              <a:rPr lang="en-US" dirty="0"/>
+              <a:t/>
+            </a:r>
+            <a:endParaRPr lang="en-US" dirty="0"/>
+          </a:p>
+        </p:txBody>
+      </p:sp>
+      <p:sp>
+        <p:nvSpPr>
+          <p:cNvPr id="4" name="Slide Number Placeholder 3"/>
+          <p:cNvSpPr>
+            <a:spLocks noGrp="1"/>
+          </p:cNvSpPr>
+          <p:nvPr>
+            <p:ph type="sldNum" sz="quarter" idx="10"/>
+          </p:nvPr>
+        </p:nvSpPr>
+        <p:spPr/>
+        <p:txBody>
+          <a:bodyPr/>
+          <a:lstStyle/>
+          <a:p>
+            <a:fld id="{F7021451-1387-4CA6-816F-3879F97B5CBC}" type="slidenum">
+              <a:rPr lang="en-US"/>
+              <a:t>32</a:t>
             </a:fld>
             <a:endParaRPr lang="en-US"/>
           </a:p>
@@ -3898,7 +4165,7 @@
                 <a:ea typeface="Arial" pitchFamily="34" charset="-122"/>
                 <a:cs typeface="Arial" pitchFamily="34" charset="-120"/>
               </a:rPr>
-              <a:t>7/24</a:t>
+              <a:t>7/27</a:t>
             </a:r>
             <a:endParaRPr lang="en-US" sz="1050" dirty="0"/>
           </a:p>
@@ -4153,7 +4420,7 @@
                 <a:ea typeface="Arial" pitchFamily="34" charset="-122"/>
                 <a:cs typeface="Arial" pitchFamily="34" charset="-120"/>
               </a:rPr>
-              <a:t>8/24</a:t>
+              <a:t>8/27</a:t>
             </a:r>
             <a:endParaRPr lang="en-US" sz="1050" dirty="0"/>
           </a:p>
@@ -4244,7 +4511,7 @@
                 <a:ea typeface="Arial" pitchFamily="34" charset="-122"/>
                 <a:cs typeface="Arial" pitchFamily="34" charset="-120"/>
               </a:rPr>
-              <a:t>MAIN.TF IN VIER BLÖCKEN</a:t>
+              <a:t>SO SIEHT MAIN.TF AUS</a:t>
             </a:r>
             <a:endParaRPr lang="en-US" sz="1150" dirty="0"/>
           </a:p>
@@ -4283,7 +4550,7 @@
                 <a:ea typeface="Arial" pitchFamily="34" charset="-122"/>
                 <a:cs typeface="Arial" pitchFamily="34" charset="-120"/>
               </a:rPr>
-              <a:t>Eine Terraform-Datei lesen</a:t>
+              <a:t>Eine ganz einfache Datei</a:t>
             </a:r>
             <a:endParaRPr lang="en-US" sz="2600" dirty="0"/>
           </a:p>
@@ -4291,7 +4558,7 @@
       </p:sp>
       <p:pic>
         <p:nvPicPr>
-          <p:cNvPr id="5" name="Image 0" descr="/Users/jacobmenge/Desktop/kurs-26.2b-orga/folienwerkstatt/assets/diagramme/iac-datei.png">    </p:cNvPr>
+          <p:cNvPr id="5" name="Image 0" descr="/Users/jacobmenge/Desktop/kurs-26.2b-orga/folienwerkstatt/assets/diagramme/iac-einfach.png">    </p:cNvPr>
           <p:cNvPicPr>
             <a:picLocks noChangeAspect="1"/>
           </p:cNvPicPr>
@@ -4305,8 +4572,8 @@
         </p:blipFill>
         <p:spPr>
           <a:xfrm>
-            <a:off x="566928" y="1316736"/>
-            <a:ext cx="8010144" cy="3054096"/>
+            <a:off x="566928" y="1335024"/>
+            <a:ext cx="8010144" cy="3182112"/>
           </a:xfrm>
           <a:prstGeom prst="rect">
             <a:avLst/>
@@ -4408,7 +4675,7 @@
                 <a:ea typeface="Arial" pitchFamily="34" charset="-122"/>
                 <a:cs typeface="Arial" pitchFamily="34" charset="-120"/>
               </a:rPr>
-              <a:t>9/24</a:t>
+              <a:t>9/27</a:t>
             </a:r>
             <a:endParaRPr lang="en-US" sz="1050" dirty="0"/>
           </a:p>
@@ -4499,7 +4766,7 @@
                 <a:ea typeface="Arial" pitchFamily="34" charset="-122"/>
                 <a:cs typeface="Arial" pitchFamily="34" charset="-120"/>
               </a:rPr>
-              <a:t>WER VERWEIST AUF WEN</a:t>
+              <a:t>WO PORT 80 EINGETRAGEN WIRD</a:t>
             </a:r>
             <a:endParaRPr lang="en-US" sz="1150" dirty="0"/>
           </a:p>
@@ -4538,7 +4805,7 @@
                 <a:ea typeface="Arial" pitchFamily="34" charset="-122"/>
                 <a:cs typeface="Arial" pitchFamily="34" charset="-120"/>
               </a:rPr>
-              <a:t>Die Datei aus der Übung</a:t>
+              <a:t>Die Firewall in der Datei</a:t>
             </a:r>
             <a:endParaRPr lang="en-US" sz="2600" dirty="0"/>
           </a:p>
@@ -4546,7 +4813,7 @@
       </p:sp>
       <p:pic>
         <p:nvPicPr>
-          <p:cNvPr id="5" name="Image 0" descr="/Users/jacobmenge/Desktop/kurs-26.2b-orga/folienwerkstatt/assets/diagramme/iac-verweise.png">    </p:cNvPr>
+          <p:cNvPr id="5" name="Image 0" descr="/Users/jacobmenge/Desktop/kurs-26.2b-orga/folienwerkstatt/assets/diagramme/iac-firewall.png">    </p:cNvPr>
           <p:cNvPicPr>
             <a:picLocks noChangeAspect="1"/>
           </p:cNvPicPr>
@@ -4560,8 +4827,8 @@
         </p:blipFill>
         <p:spPr>
           <a:xfrm>
-            <a:off x="566928" y="1316736"/>
-            <a:ext cx="8010144" cy="3054096"/>
+            <a:off x="566928" y="1335024"/>
+            <a:ext cx="8010144" cy="3072384"/>
           </a:xfrm>
           <a:prstGeom prst="rect">
             <a:avLst/>
@@ -4663,7 +4930,7 @@
                 <a:ea typeface="Arial" pitchFamily="34" charset="-122"/>
                 <a:cs typeface="Arial" pitchFamily="34" charset="-120"/>
               </a:rPr>
-              <a:t>10/24</a:t>
+              <a:t>10/27</a:t>
             </a:r>
             <a:endParaRPr lang="en-US" sz="1050" dirty="0"/>
           </a:p>
@@ -4754,7 +5021,7 @@
                 <a:ea typeface="Arial" pitchFamily="34" charset="-122"/>
                 <a:cs typeface="Arial" pitchFamily="34" charset="-120"/>
               </a:rPr>
-              <a:t>NACHSCHLAGEN IN DER REGISTRY</a:t>
+              <a:t>EIN VERWEIS IN DREI SCHRITTEN</a:t>
             </a:r>
             <a:endParaRPr lang="en-US" sz="1150" dirty="0"/>
           </a:p>
@@ -4793,7 +5060,7 @@
                 <a:ea typeface="Arial" pitchFamily="34" charset="-122"/>
                 <a:cs typeface="Arial" pitchFamily="34" charset="-120"/>
               </a:rPr>
-              <a:t>Wo steht, was man eintragen kann?</a:t>
+              <a:t>Wie der Server zu seiner Firewall kommt</a:t>
             </a:r>
             <a:endParaRPr lang="en-US" sz="2600" dirty="0"/>
           </a:p>
@@ -4801,7 +5068,7 @@
       </p:sp>
       <p:pic>
         <p:nvPicPr>
-          <p:cNvPr id="5" name="Image 0" descr="/Users/jacobmenge/Desktop/kurs-26.2b-orga/folienwerkstatt/assets/diagramme/iac-nachschlagen.png">    </p:cNvPr>
+          <p:cNvPr id="5" name="Image 0" descr="/Users/jacobmenge/Desktop/kurs-26.2b-orga/folienwerkstatt/assets/diagramme/iac-zuweisung.png">    </p:cNvPr>
           <p:cNvPicPr>
             <a:picLocks noChangeAspect="1"/>
           </p:cNvPicPr>
@@ -4815,8 +5082,8 @@
         </p:blipFill>
         <p:spPr>
           <a:xfrm>
-            <a:off x="566928" y="1316736"/>
-            <a:ext cx="8010144" cy="2980944"/>
+            <a:off x="566928" y="1335024"/>
+            <a:ext cx="8010144" cy="2779776"/>
           </a:xfrm>
           <a:prstGeom prst="rect">
             <a:avLst/>
@@ -4918,7 +5185,7 @@
                 <a:ea typeface="Arial" pitchFamily="34" charset="-122"/>
                 <a:cs typeface="Arial" pitchFamily="34" charset="-120"/>
               </a:rPr>
-              <a:t>11/24</a:t>
+              <a:t>11/27</a:t>
             </a:r>
             <a:endParaRPr lang="en-US" sz="1050" dirty="0"/>
           </a:p>
@@ -5009,7 +5276,7 @@
                 <a:ea typeface="Arial" pitchFamily="34" charset="-122"/>
                 <a:cs typeface="Arial" pitchFamily="34" charset="-120"/>
               </a:rPr>
-              <a:t>INIT, PLAN, APPLY, DESTROY</a:t>
+              <a:t>WER VERWEIST AUF WEN</a:t>
             </a:r>
             <a:endParaRPr lang="en-US" sz="1150" dirty="0"/>
           </a:p>
@@ -5048,7 +5315,7 @@
                 <a:ea typeface="Arial" pitchFamily="34" charset="-122"/>
                 <a:cs typeface="Arial" pitchFamily="34" charset="-120"/>
               </a:rPr>
-              <a:t>Vier Befehle</a:t>
+              <a:t>Die Datei aus der Übung</a:t>
             </a:r>
             <a:endParaRPr lang="en-US" sz="2600" dirty="0"/>
           </a:p>
@@ -5056,7 +5323,7 @@
       </p:sp>
       <p:pic>
         <p:nvPicPr>
-          <p:cNvPr id="5" name="Image 0" descr="/Users/jacobmenge/Desktop/kurs-26.2b-orga/folienwerkstatt/assets/diagramme/iac-befehle.png">    </p:cNvPr>
+          <p:cNvPr id="5" name="Image 0" descr="/Users/jacobmenge/Desktop/kurs-26.2b-orga/folienwerkstatt/assets/diagramme/iac-verweise.png">    </p:cNvPr>
           <p:cNvPicPr>
             <a:picLocks noChangeAspect="1"/>
           </p:cNvPicPr>
@@ -5071,7 +5338,7 @@
         <p:spPr>
           <a:xfrm>
             <a:off x="566928" y="1335024"/>
-            <a:ext cx="8010144" cy="2615184"/>
+            <a:ext cx="8010144" cy="2926080"/>
           </a:xfrm>
           <a:prstGeom prst="rect">
             <a:avLst/>
@@ -5173,7 +5440,7 @@
                 <a:ea typeface="Arial" pitchFamily="34" charset="-122"/>
                 <a:cs typeface="Arial" pitchFamily="34" charset="-120"/>
               </a:rPr>
-              <a:t>12/24</a:t>
+              <a:t>12/27</a:t>
             </a:r>
             <a:endParaRPr lang="en-US" sz="1050" dirty="0"/>
           </a:p>
@@ -5264,7 +5531,7 @@
                 <a:ea typeface="Arial" pitchFamily="34" charset="-122"/>
                 <a:cs typeface="Arial" pitchFamily="34" charset="-120"/>
               </a:rPr>
-              <a:t>VOR JEDEM YES</a:t>
+              <a:t>NACHSCHLAGEN IN DER REGISTRY</a:t>
             </a:r>
             <a:endParaRPr lang="en-US" sz="1150" dirty="0"/>
           </a:p>
@@ -5303,7 +5570,7 @@
                 <a:ea typeface="Arial" pitchFamily="34" charset="-122"/>
                 <a:cs typeface="Arial" pitchFamily="34" charset="-120"/>
               </a:rPr>
-              <a:t>Den Plan lesen</a:t>
+              <a:t>Wo steht, was man eintragen kann?</a:t>
             </a:r>
             <a:endParaRPr lang="en-US" sz="2600" dirty="0"/>
           </a:p>
@@ -5311,7 +5578,7 @@
       </p:sp>
       <p:pic>
         <p:nvPicPr>
-          <p:cNvPr id="5" name="Image 0" descr="/Users/jacobmenge/Desktop/kurs-26.2b-orga/folienwerkstatt/assets/diagramme/iac-plan.png">    </p:cNvPr>
+          <p:cNvPr id="5" name="Image 0" descr="/Users/jacobmenge/Desktop/kurs-26.2b-orga/folienwerkstatt/assets/diagramme/iac-nachschlagen.png">    </p:cNvPr>
           <p:cNvPicPr>
             <a:picLocks noChangeAspect="1"/>
           </p:cNvPicPr>
@@ -5326,7 +5593,7 @@
         <p:spPr>
           <a:xfrm>
             <a:off x="566928" y="1316736"/>
-            <a:ext cx="8010144" cy="2798064"/>
+            <a:ext cx="8010144" cy="2980944"/>
           </a:xfrm>
           <a:prstGeom prst="rect">
             <a:avLst/>
@@ -5428,7 +5695,7 @@
                 <a:ea typeface="Arial" pitchFamily="34" charset="-122"/>
                 <a:cs typeface="Arial" pitchFamily="34" charset="-120"/>
               </a:rPr>
-              <a:t>13/24</a:t>
+              <a:t>13/27</a:t>
             </a:r>
             <a:endParaRPr lang="en-US" sz="1050" dirty="0"/>
           </a:p>
@@ -5519,7 +5786,7 @@
                 <a:ea typeface="Arial" pitchFamily="34" charset="-122"/>
                 <a:cs typeface="Arial" pitchFamily="34" charset="-120"/>
               </a:rPr>
-              <a:t>DIE STATE-DATEI</a:t>
+              <a:t>INIT, PLAN, APPLY, DESTROY</a:t>
             </a:r>
             <a:endParaRPr lang="en-US" sz="1150" dirty="0"/>
           </a:p>
@@ -5558,7 +5825,7 @@
                 <a:ea typeface="Arial" pitchFamily="34" charset="-122"/>
                 <a:cs typeface="Arial" pitchFamily="34" charset="-120"/>
               </a:rPr>
-              <a:t>Das Gedächtnis von Terraform</a:t>
+              <a:t>Vier Befehle</a:t>
             </a:r>
             <a:endParaRPr lang="en-US" sz="2600" dirty="0"/>
           </a:p>
@@ -5566,7 +5833,7 @@
       </p:sp>
       <p:pic>
         <p:nvPicPr>
-          <p:cNvPr id="5" name="Image 0" descr="/Users/jacobmenge/Desktop/kurs-26.2b-orga/folienwerkstatt/assets/diagramme/iac-state.png">    </p:cNvPr>
+          <p:cNvPr id="5" name="Image 0" descr="/Users/jacobmenge/Desktop/kurs-26.2b-orga/folienwerkstatt/assets/diagramme/iac-befehle.png">    </p:cNvPr>
           <p:cNvPicPr>
             <a:picLocks noChangeAspect="1"/>
           </p:cNvPicPr>
@@ -5581,7 +5848,7 @@
         <p:spPr>
           <a:xfrm>
             <a:off x="566928" y="1335024"/>
-            <a:ext cx="8010144" cy="2834640"/>
+            <a:ext cx="8010144" cy="2615184"/>
           </a:xfrm>
           <a:prstGeom prst="rect">
             <a:avLst/>
@@ -5683,7 +5950,7 @@
                 <a:ea typeface="Arial" pitchFamily="34" charset="-122"/>
                 <a:cs typeface="Arial" pitchFamily="34" charset="-120"/>
               </a:rPr>
-              <a:t>14/24</a:t>
+              <a:t>14/27</a:t>
             </a:r>
             <a:endParaRPr lang="en-US" sz="1050" dirty="0"/>
           </a:p>
@@ -5774,7 +6041,7 @@
                 <a:ea typeface="Arial" pitchFamily="34" charset="-122"/>
                 <a:cs typeface="Arial" pitchFamily="34" charset="-120"/>
               </a:rPr>
-              <a:t>LIVE IN DER SANDBOX</a:t>
+              <a:t>VOR JEDEM YES</a:t>
             </a:r>
             <a:endParaRPr lang="en-US" sz="1150" dirty="0"/>
           </a:p>
@@ -5813,7 +6080,7 @@
                 <a:ea typeface="Arial" pitchFamily="34" charset="-122"/>
                 <a:cs typeface="Arial" pitchFamily="34" charset="-120"/>
               </a:rPr>
-              <a:t>Einmal vorgeführt</a:t>
+              <a:t>Den Plan lesen</a:t>
             </a:r>
             <a:endParaRPr lang="en-US" sz="2600" dirty="0"/>
           </a:p>
@@ -5821,7 +6088,7 @@
       </p:sp>
       <p:pic>
         <p:nvPicPr>
-          <p:cNvPr id="5" name="Image 0" descr="/Users/jacobmenge/Desktop/kurs-26.2b-orga/folienwerkstatt/assets/diagramme/iac-demo.png">    </p:cNvPr>
+          <p:cNvPr id="5" name="Image 0" descr="/Users/jacobmenge/Desktop/kurs-26.2b-orga/folienwerkstatt/assets/diagramme/iac-plan.png">    </p:cNvPr>
           <p:cNvPicPr>
             <a:picLocks noChangeAspect="1"/>
           </p:cNvPicPr>
@@ -5836,7 +6103,7 @@
         <p:spPr>
           <a:xfrm>
             <a:off x="566928" y="1316736"/>
-            <a:ext cx="8010144" cy="2944368"/>
+            <a:ext cx="8010144" cy="2798064"/>
           </a:xfrm>
           <a:prstGeom prst="rect">
             <a:avLst/>
@@ -5938,7 +6205,7 @@
                 <a:ea typeface="Arial" pitchFamily="34" charset="-122"/>
                 <a:cs typeface="Arial" pitchFamily="34" charset="-120"/>
               </a:rPr>
-              <a:t>15/24</a:t>
+              <a:t>15/27</a:t>
             </a:r>
             <a:endParaRPr lang="en-US" sz="1050" dirty="0"/>
           </a:p>
@@ -5984,28 +6251,8 @@
         </p:nvSpPr>
         <p:spPr>
           <a:xfrm>
-            <a:off x="6355080" y="0"/>
-            <a:ext cx="2788920" cy="5143500"/>
-          </a:xfrm>
-          <a:prstGeom prst="rect">
-            <a:avLst/>
-          </a:prstGeom>
-          <a:solidFill>
-            <a:srgbClr val="FBF2E3"/>
-          </a:solidFill>
-          <a:ln/>
-        </p:spPr>
-      </p:sp>
-      <p:sp>
-        <p:nvSpPr>
-          <p:cNvPr id="3" name="Shape 1"/>
-          <p:cNvSpPr/>
-          <p:nvPr/>
-        </p:nvSpPr>
-        <p:spPr>
-          <a:xfrm>
-            <a:off x="6355080" y="0"/>
-            <a:ext cx="45720" cy="5143500"/>
+            <a:off x="566928" y="201168"/>
+            <a:ext cx="475488" cy="50292"/>
           </a:xfrm>
           <a:prstGeom prst="rect">
             <a:avLst/>
@@ -6018,14 +6265,139 @@
       </p:sp>
       <p:sp>
         <p:nvSpPr>
+          <p:cNvPr id="3" name="Text 1"/>
+          <p:cNvSpPr/>
+          <p:nvPr/>
+        </p:nvSpPr>
+        <p:spPr>
+          <a:xfrm>
+            <a:off x="566928" y="384048"/>
+            <a:ext cx="8010144" cy="237744"/>
+          </a:xfrm>
+          <a:prstGeom prst="rect">
+            <a:avLst/>
+          </a:prstGeom>
+          <a:noFill/>
+          <a:ln/>
+        </p:spPr>
+        <p:txBody>
+          <a:bodyPr wrap="square" lIns="0" tIns="0" rIns="0" bIns="0" rtlCol="0" anchor="ctr"/>
+          <a:lstStyle/>
+          <a:p>
+            <a:pPr indent="0" marL="0">
+              <a:buNone/>
+            </a:pPr>
+            <a:r>
+              <a:rPr lang="en-US" sz="1150" b="1" spc="180" kern="0" dirty="0">
+                <a:solidFill>
+                  <a:srgbClr val="9A6310"/>
+                </a:solidFill>
+                <a:latin typeface="Arial" pitchFamily="34" charset="0"/>
+                <a:ea typeface="Arial" pitchFamily="34" charset="-122"/>
+                <a:cs typeface="Arial" pitchFamily="34" charset="-120"/>
+              </a:rPr>
+              <a:t>DIE STATE-DATEI</a:t>
+            </a:r>
+            <a:endParaRPr lang="en-US" sz="1150" dirty="0"/>
+          </a:p>
+        </p:txBody>
+      </p:sp>
+      <p:sp>
+        <p:nvSpPr>
           <p:cNvPr id="4" name="Text 2"/>
           <p:cNvSpPr/>
           <p:nvPr/>
         </p:nvSpPr>
         <p:spPr>
           <a:xfrm>
-            <a:off x="6629400" y="1463040"/>
-            <a:ext cx="2194560" cy="1737360"/>
+            <a:off x="566928" y="731520"/>
+            <a:ext cx="8010144" cy="603504"/>
+          </a:xfrm>
+          <a:prstGeom prst="rect">
+            <a:avLst/>
+          </a:prstGeom>
+          <a:noFill/>
+          <a:ln/>
+        </p:spPr>
+        <p:txBody>
+          <a:bodyPr wrap="square" lIns="0" tIns="0" rIns="0" bIns="0" rtlCol="0" anchor="t"/>
+          <a:lstStyle/>
+          <a:p>
+            <a:pPr indent="0" marL="0">
+              <a:buNone/>
+            </a:pPr>
+            <a:r>
+              <a:rPr lang="en-US" sz="2600" b="1" dirty="0">
+                <a:solidFill>
+                  <a:srgbClr val="272E52"/>
+                </a:solidFill>
+                <a:latin typeface="Arial" pitchFamily="34" charset="0"/>
+                <a:ea typeface="Arial" pitchFamily="34" charset="-122"/>
+                <a:cs typeface="Arial" pitchFamily="34" charset="-120"/>
+              </a:rPr>
+              <a:t>Das Gedächtnis von Terraform</a:t>
+            </a:r>
+            <a:endParaRPr lang="en-US" sz="2600" dirty="0"/>
+          </a:p>
+        </p:txBody>
+      </p:sp>
+      <p:pic>
+        <p:nvPicPr>
+          <p:cNvPr id="5" name="Image 0" descr="/Users/jacobmenge/Desktop/kurs-26.2b-orga/folienwerkstatt/assets/diagramme/iac-state.png">    </p:cNvPr>
+          <p:cNvPicPr>
+            <a:picLocks noChangeAspect="1"/>
+          </p:cNvPicPr>
+          <p:nvPr/>
+        </p:nvPicPr>
+        <p:blipFill>
+          <a:blip r:embed="rId1"/>
+          <a:stretch>
+            <a:fillRect/>
+          </a:stretch>
+        </p:blipFill>
+        <p:spPr>
+          <a:xfrm>
+            <a:off x="566928" y="1335024"/>
+            <a:ext cx="8010144" cy="2834640"/>
+          </a:xfrm>
+          <a:prstGeom prst="rect">
+            <a:avLst/>
+          </a:prstGeom>
+        </p:spPr>
+      </p:pic>
+      <p:sp>
+        <p:nvSpPr>
+          <p:cNvPr id="6" name="Shape 3"/>
+          <p:cNvSpPr/>
+          <p:nvPr/>
+        </p:nvSpPr>
+        <p:spPr>
+          <a:xfrm>
+            <a:off x="566928" y="4631436"/>
+            <a:ext cx="8010144" cy="0"/>
+          </a:xfrm>
+          <a:prstGeom prst="line">
+            <a:avLst/>
+          </a:prstGeom>
+          <a:noFill/>
+          <a:ln w="9525">
+            <a:solidFill>
+              <a:srgbClr val="DFE3F0"/>
+            </a:solidFill>
+            <a:prstDash val="solid"/>
+          </a:ln>
+        </p:spPr>
+      </p:sp>
+      <p:sp>
+        <p:nvSpPr>
+          <p:cNvPr id="7" name="Text 4"/>
+          <p:cNvSpPr/>
+          <p:nvPr/>
+        </p:nvSpPr>
+        <p:spPr>
+          <a:xfrm>
+            <a:off x="566928" y="4722876"/>
+            <a:ext cx="5029200" cy="237744"/>
           </a:xfrm>
           <a:prstGeom prst="rect">
             <a:avLst/>
@@ -6037,109 +6409,11 @@
           <a:bodyPr wrap="square" lIns="0" tIns="0" rIns="0" bIns="0" rtlCol="0" anchor="ctr"/>
           <a:lstStyle/>
           <a:p>
-            <a:pPr algn="ctr" indent="0" marL="0">
-              <a:buNone/>
-            </a:pPr>
-            <a:r>
-              <a:rPr lang="en-US" sz="8400" b="1" dirty="0">
-                <a:solidFill>
-                  <a:srgbClr val="9A6310"/>
-                </a:solidFill>
-                <a:latin typeface="Arial" pitchFamily="34" charset="0"/>
-                <a:ea typeface="Arial" pitchFamily="34" charset="-122"/>
-                <a:cs typeface="Arial" pitchFamily="34" charset="-120"/>
-              </a:rPr>
-              <a:t>03</a:t>
-            </a:r>
-            <a:endParaRPr lang="en-US" sz="8400" dirty="0"/>
-          </a:p>
-        </p:txBody>
-      </p:sp>
-      <p:sp>
-        <p:nvSpPr>
-          <p:cNvPr id="5" name="Shape 3"/>
-          <p:cNvSpPr/>
-          <p:nvPr/>
-        </p:nvSpPr>
-        <p:spPr>
-          <a:xfrm>
-            <a:off x="566928" y="1883664"/>
-            <a:ext cx="475488" cy="50292"/>
-          </a:xfrm>
-          <a:prstGeom prst="rect">
-            <a:avLst/>
-          </a:prstGeom>
-          <a:solidFill>
-            <a:srgbClr val="9A6310"/>
-          </a:solidFill>
-          <a:ln/>
-        </p:spPr>
-      </p:sp>
-      <p:sp>
-        <p:nvSpPr>
-          <p:cNvPr id="6" name="Text 4"/>
-          <p:cNvSpPr/>
-          <p:nvPr/>
-        </p:nvSpPr>
-        <p:spPr>
-          <a:xfrm>
-            <a:off x="566928" y="2084832"/>
-            <a:ext cx="5394960" cy="868680"/>
-          </a:xfrm>
-          <a:prstGeom prst="rect">
-            <a:avLst/>
-          </a:prstGeom>
-          <a:noFill/>
-          <a:ln/>
-        </p:spPr>
-        <p:txBody>
-          <a:bodyPr wrap="square" lIns="0" tIns="0" rIns="0" bIns="0" rtlCol="0" anchor="t"/>
-          <a:lstStyle/>
-          <a:p>
             <a:pPr indent="0" marL="0">
               <a:buNone/>
             </a:pPr>
             <a:r>
-              <a:rPr lang="en-US" sz="3000" b="1" dirty="0">
-                <a:solidFill>
-                  <a:srgbClr val="272E52"/>
-                </a:solidFill>
-                <a:latin typeface="Arial" pitchFamily="34" charset="0"/>
-                <a:ea typeface="Arial" pitchFamily="34" charset="-122"/>
-                <a:cs typeface="Arial" pitchFamily="34" charset="-120"/>
-              </a:rPr>
-              <a:t>Praxiszeit</a:t>
-            </a:r>
-            <a:endParaRPr lang="en-US" sz="3000" dirty="0"/>
-          </a:p>
-        </p:txBody>
-      </p:sp>
-      <p:sp>
-        <p:nvSpPr>
-          <p:cNvPr id="7" name="Text 5"/>
-          <p:cNvSpPr/>
-          <p:nvPr/>
-        </p:nvSpPr>
-        <p:spPr>
-          <a:xfrm>
-            <a:off x="566928" y="3017520"/>
-            <a:ext cx="5394960" cy="548640"/>
-          </a:xfrm>
-          <a:prstGeom prst="rect">
-            <a:avLst/>
-          </a:prstGeom>
-          <a:noFill/>
-          <a:ln/>
-        </p:spPr>
-        <p:txBody>
-          <a:bodyPr wrap="square" lIns="0" tIns="0" rIns="0" bIns="0" rtlCol="0" anchor="t"/>
-          <a:lstStyle/>
-          <a:p>
-            <a:pPr indent="0" marL="0">
-              <a:buNone/>
-            </a:pPr>
-            <a:r>
-              <a:rPr lang="en-US" sz="1350" dirty="0">
+              <a:rPr lang="en-US" sz="1050" spc="30" kern="0" dirty="0">
                 <a:solidFill>
                   <a:srgbClr val="5C6377"/>
                 </a:solidFill>
@@ -6147,9 +6421,48 @@
                 <a:ea typeface="Arial" pitchFamily="34" charset="-122"/>
                 <a:cs typeface="Arial" pitchFamily="34" charset="-120"/>
               </a:rPr>
-              <a:t>Der Konfigurator als Code, in eurer eigenen Sandbox.</a:t>
-            </a:r>
-            <a:endParaRPr lang="en-US" sz="1350" dirty="0"/>
+              <a:t>Terraform</a:t>
+            </a:r>
+            <a:endParaRPr lang="en-US" sz="1050" dirty="0"/>
+          </a:p>
+        </p:txBody>
+      </p:sp>
+      <p:sp>
+        <p:nvSpPr>
+          <p:cNvPr id="8" name="Text 5"/>
+          <p:cNvSpPr/>
+          <p:nvPr/>
+        </p:nvSpPr>
+        <p:spPr>
+          <a:xfrm>
+            <a:off x="8028432" y="4722876"/>
+            <a:ext cx="548640" cy="237744"/>
+          </a:xfrm>
+          <a:prstGeom prst="rect">
+            <a:avLst/>
+          </a:prstGeom>
+          <a:noFill/>
+          <a:ln/>
+        </p:spPr>
+        <p:txBody>
+          <a:bodyPr wrap="square" lIns="0" tIns="0" rIns="0" bIns="0" rtlCol="0" anchor="ctr"/>
+          <a:lstStyle/>
+          <a:p>
+            <a:pPr algn="r" indent="0" marL="0">
+              <a:buNone/>
+            </a:pPr>
+            <a:r>
+              <a:rPr lang="en-US" sz="1050" dirty="0">
+                <a:solidFill>
+                  <a:srgbClr val="5C6377"/>
+                </a:solidFill>
+                <a:latin typeface="Arial" pitchFamily="34" charset="0"/>
+                <a:ea typeface="Arial" pitchFamily="34" charset="-122"/>
+                <a:cs typeface="Arial" pitchFamily="34" charset="-120"/>
+              </a:rPr>
+              <a:t>16/27</a:t>
+            </a:r>
+            <a:endParaRPr lang="en-US" sz="1050" dirty="0"/>
           </a:p>
         </p:txBody>
       </p:sp>
@@ -6629,7 +6942,7 @@
                 <a:ea typeface="Arial" pitchFamily="34" charset="-122"/>
                 <a:cs typeface="Arial" pitchFamily="34" charset="-120"/>
               </a:rPr>
-              <a:t>Einmal vorgeführt, live in der Sandbox</a:t>
+              <a:t>So sieht es in CloudShell aus: echte Ausgaben, Schritt für Schritt</a:t>
             </a:r>
             <a:endParaRPr lang="en-US" sz="1050" dirty="0"/>
           </a:p>
@@ -7141,7 +7454,7 @@
                 <a:ea typeface="Arial" pitchFamily="34" charset="-122"/>
                 <a:cs typeface="Arial" pitchFamily="34" charset="-120"/>
               </a:rPr>
-              <a:t>1/24</a:t>
+              <a:t>1/27</a:t>
             </a:r>
             <a:endParaRPr lang="en-US" sz="1050" dirty="0"/>
           </a:p>
@@ -7232,7 +7545,7 @@
                 <a:ea typeface="Arial" pitchFamily="34" charset="-122"/>
                 <a:cs typeface="Arial" pitchFamily="34" charset="-120"/>
               </a:rPr>
-              <a:t>ZIELBILD</a:t>
+              <a:t>TEIL 1: EINRICHTEN, DATEI, INIT</a:t>
             </a:r>
             <a:endParaRPr lang="en-US" sz="1150" dirty="0"/>
           </a:p>
@@ -7271,7 +7584,7 @@
                 <a:ea typeface="Arial" pitchFamily="34" charset="-122"/>
                 <a:cs typeface="Arial" pitchFamily="34" charset="-120"/>
               </a:rPr>
-              <a:t>Das baut ihr gleich</a:t>
+              <a:t>So sieht es in CloudShell aus</a:t>
             </a:r>
             <a:endParaRPr lang="en-US" sz="2600" dirty="0"/>
           </a:p>
@@ -7279,7 +7592,7 @@
       </p:sp>
       <p:pic>
         <p:nvPicPr>
-          <p:cNvPr id="5" name="Image 0" descr="/Users/jacobmenge/Desktop/kurs-26.2b-orga/folienwerkstatt/assets/diagramme/iac-zielbild.png">    </p:cNvPr>
+          <p:cNvPr id="5" name="Image 0" descr="/Users/jacobmenge/Desktop/kurs-26.2b-orga/folienwerkstatt/assets/diagramme/iac-sandbox-1.png">    </p:cNvPr>
           <p:cNvPicPr>
             <a:picLocks noChangeAspect="1"/>
           </p:cNvPicPr>
@@ -7293,8 +7606,8 @@
         </p:blipFill>
         <p:spPr>
           <a:xfrm>
-            <a:off x="566928" y="1316736"/>
-            <a:ext cx="8010144" cy="2798064"/>
+            <a:off x="566928" y="1335024"/>
+            <a:ext cx="8010144" cy="2980944"/>
           </a:xfrm>
           <a:prstGeom prst="rect">
             <a:avLst/>
@@ -7357,7 +7670,7 @@
                 <a:ea typeface="Arial" pitchFamily="34" charset="-122"/>
                 <a:cs typeface="Arial" pitchFamily="34" charset="-120"/>
               </a:rPr>
-              <a:t>Praxiszeit</a:t>
+              <a:t>Terraform</a:t>
             </a:r>
             <a:endParaRPr lang="en-US" sz="1050" dirty="0"/>
           </a:p>
@@ -7396,7 +7709,7 @@
                 <a:ea typeface="Arial" pitchFamily="34" charset="-122"/>
                 <a:cs typeface="Arial" pitchFamily="34" charset="-120"/>
               </a:rPr>
-              <a:t>16/24</a:t>
+              <a:t>17/27</a:t>
             </a:r>
             <a:endParaRPr lang="en-US" sz="1050" dirty="0"/>
           </a:p>
@@ -7487,7 +7800,7 @@
                 <a:ea typeface="Arial" pitchFamily="34" charset="-122"/>
                 <a:cs typeface="Arial" pitchFamily="34" charset="-120"/>
               </a:rPr>
-              <a:t>PRAXISZEIT · 19:15 BIS 20:25</a:t>
+              <a:t>TEIL 2: PLAN, APPLY, DIE SEITE</a:t>
             </a:r>
             <a:endParaRPr lang="en-US" sz="1150" dirty="0"/>
           </a:p>
@@ -7526,713 +7839,39 @@
                 <a:ea typeface="Arial" pitchFamily="34" charset="-122"/>
                 <a:cs typeface="Arial" pitchFamily="34" charset="-120"/>
               </a:rPr>
-              <a:t>So läuft die Praxiszeit</a:t>
+              <a:t>So sieht es in CloudShell aus</a:t>
             </a:r>
             <a:endParaRPr lang="en-US" sz="2600" dirty="0"/>
           </a:p>
         </p:txBody>
       </p:sp>
-      <p:sp>
-        <p:nvSpPr>
-          <p:cNvPr id="5" name="Shape 3"/>
-          <p:cNvSpPr/>
-          <p:nvPr/>
-        </p:nvSpPr>
-        <p:spPr>
-          <a:xfrm>
-            <a:off x="438912" y="1536192"/>
-            <a:ext cx="8266176" cy="256032"/>
-          </a:xfrm>
-          <a:prstGeom prst="rect">
-            <a:avLst/>
-          </a:prstGeom>
-          <a:solidFill>
-            <a:srgbClr val="F5F6FC"/>
-          </a:solidFill>
-          <a:ln/>
-        </p:spPr>
-      </p:sp>
-      <p:sp>
-        <p:nvSpPr>
-          <p:cNvPr id="6" name="Text 4"/>
-          <p:cNvSpPr/>
-          <p:nvPr/>
-        </p:nvSpPr>
-        <p:spPr>
-          <a:xfrm>
-            <a:off x="566928" y="1536192"/>
-            <a:ext cx="1097280" cy="256032"/>
-          </a:xfrm>
-          <a:prstGeom prst="rect">
-            <a:avLst/>
-          </a:prstGeom>
-          <a:noFill/>
-          <a:ln/>
-        </p:spPr>
-        <p:txBody>
-          <a:bodyPr wrap="square" lIns="0" tIns="0" rIns="0" bIns="0" rtlCol="0" anchor="ctr"/>
-          <a:lstStyle/>
-          <a:p>
-            <a:pPr indent="0" marL="0">
-              <a:buNone/>
-            </a:pPr>
-            <a:r>
-              <a:rPr lang="en-US" sz="1050" b="1" dirty="0">
-                <a:solidFill>
-                  <a:srgbClr val="9A6310"/>
-                </a:solidFill>
-                <a:latin typeface="Courier New" pitchFamily="34" charset="0"/>
-                <a:ea typeface="Courier New" pitchFamily="34" charset="-122"/>
-                <a:cs typeface="Courier New" pitchFamily="34" charset="-120"/>
-              </a:rPr>
-              <a:t>Station 1</a:t>
-            </a:r>
-            <a:endParaRPr lang="en-US" sz="1050" dirty="0"/>
-          </a:p>
-        </p:txBody>
-      </p:sp>
-      <p:sp>
-        <p:nvSpPr>
-          <p:cNvPr id="7" name="Text 5"/>
-          <p:cNvSpPr/>
-          <p:nvPr/>
-        </p:nvSpPr>
-        <p:spPr>
-          <a:xfrm>
-            <a:off x="1664208" y="1536192"/>
-            <a:ext cx="6912864" cy="256032"/>
-          </a:xfrm>
-          <a:prstGeom prst="rect">
-            <a:avLst/>
-          </a:prstGeom>
-          <a:noFill/>
-          <a:ln/>
-        </p:spPr>
-        <p:txBody>
-          <a:bodyPr wrap="square" lIns="0" tIns="0" rIns="0" bIns="0" rtlCol="0" anchor="ctr"/>
-          <a:lstStyle/>
-          <a:p>
-            <a:pPr indent="0" marL="0">
-              <a:buNone/>
-            </a:pPr>
-            <a:r>
-              <a:rPr lang="en-US" sz="1050" dirty="0">
-                <a:solidFill>
-                  <a:srgbClr val="434A63"/>
-                </a:solidFill>
-                <a:latin typeface="Arial" pitchFamily="34" charset="0"/>
-                <a:ea typeface="Arial" pitchFamily="34" charset="-122"/>
-                <a:cs typeface="Arial" pitchFamily="34" charset="-120"/>
-              </a:rPr>
-              <a:t>Sandbox starten, CloudShell öffnen, Terraform einrichten · 10 Min.</a:t>
-            </a:r>
-            <a:endParaRPr lang="en-US" sz="1050" dirty="0"/>
-          </a:p>
-        </p:txBody>
-      </p:sp>
-      <p:sp>
-        <p:nvSpPr>
-          <p:cNvPr id="8" name="Text 6"/>
-          <p:cNvSpPr/>
-          <p:nvPr/>
-        </p:nvSpPr>
-        <p:spPr>
-          <a:xfrm>
-            <a:off x="566928" y="1792224"/>
-            <a:ext cx="1097280" cy="256032"/>
-          </a:xfrm>
-          <a:prstGeom prst="rect">
-            <a:avLst/>
-          </a:prstGeom>
-          <a:noFill/>
-          <a:ln/>
-        </p:spPr>
-        <p:txBody>
-          <a:bodyPr wrap="square" lIns="0" tIns="0" rIns="0" bIns="0" rtlCol="0" anchor="ctr"/>
-          <a:lstStyle/>
-          <a:p>
-            <a:pPr indent="0" marL="0">
-              <a:buNone/>
-            </a:pPr>
-            <a:r>
-              <a:rPr lang="en-US" sz="1050" b="1" dirty="0">
-                <a:solidFill>
-                  <a:srgbClr val="9A6310"/>
-                </a:solidFill>
-                <a:latin typeface="Courier New" pitchFamily="34" charset="0"/>
-                <a:ea typeface="Courier New" pitchFamily="34" charset="-122"/>
-                <a:cs typeface="Courier New" pitchFamily="34" charset="-120"/>
-              </a:rPr>
-              <a:t>Station 2</a:t>
-            </a:r>
-            <a:endParaRPr lang="en-US" sz="1050" dirty="0"/>
-          </a:p>
-        </p:txBody>
-      </p:sp>
-      <p:sp>
-        <p:nvSpPr>
-          <p:cNvPr id="9" name="Text 7"/>
-          <p:cNvSpPr/>
-          <p:nvPr/>
-        </p:nvSpPr>
-        <p:spPr>
-          <a:xfrm>
-            <a:off x="1664208" y="1792224"/>
-            <a:ext cx="6912864" cy="256032"/>
-          </a:xfrm>
-          <a:prstGeom prst="rect">
-            <a:avLst/>
-          </a:prstGeom>
-          <a:noFill/>
-          <a:ln/>
-        </p:spPr>
-        <p:txBody>
-          <a:bodyPr wrap="square" lIns="0" tIns="0" rIns="0" bIns="0" rtlCol="0" anchor="ctr"/>
-          <a:lstStyle/>
-          <a:p>
-            <a:pPr indent="0" marL="0">
-              <a:buNone/>
-            </a:pPr>
-            <a:r>
-              <a:rPr lang="en-US" sz="1050" dirty="0">
-                <a:solidFill>
-                  <a:srgbClr val="434A63"/>
-                </a:solidFill>
-                <a:latin typeface="Arial" pitchFamily="34" charset="0"/>
-                <a:ea typeface="Arial" pitchFamily="34" charset="-122"/>
-                <a:cs typeface="Arial" pitchFamily="34" charset="-120"/>
-              </a:rPr>
-              <a:t>Der erste Server aus einer Datei · 15 Min.</a:t>
-            </a:r>
-            <a:endParaRPr lang="en-US" sz="1050" dirty="0"/>
-          </a:p>
-        </p:txBody>
-      </p:sp>
-      <p:sp>
-        <p:nvSpPr>
-          <p:cNvPr id="10" name="Shape 8"/>
-          <p:cNvSpPr/>
-          <p:nvPr/>
-        </p:nvSpPr>
-        <p:spPr>
-          <a:xfrm>
-            <a:off x="438912" y="2048256"/>
-            <a:ext cx="8266176" cy="256032"/>
-          </a:xfrm>
-          <a:prstGeom prst="rect">
-            <a:avLst/>
-          </a:prstGeom>
-          <a:solidFill>
-            <a:srgbClr val="F5F6FC"/>
-          </a:solidFill>
-          <a:ln/>
-        </p:spPr>
-      </p:sp>
-      <p:sp>
-        <p:nvSpPr>
-          <p:cNvPr id="11" name="Text 9"/>
-          <p:cNvSpPr/>
-          <p:nvPr/>
-        </p:nvSpPr>
-        <p:spPr>
-          <a:xfrm>
-            <a:off x="566928" y="2048256"/>
-            <a:ext cx="1097280" cy="256032"/>
-          </a:xfrm>
-          <a:prstGeom prst="rect">
-            <a:avLst/>
-          </a:prstGeom>
-          <a:noFill/>
-          <a:ln/>
-        </p:spPr>
-        <p:txBody>
-          <a:bodyPr wrap="square" lIns="0" tIns="0" rIns="0" bIns="0" rtlCol="0" anchor="ctr"/>
-          <a:lstStyle/>
-          <a:p>
-            <a:pPr indent="0" marL="0">
-              <a:buNone/>
-            </a:pPr>
-            <a:r>
-              <a:rPr lang="en-US" sz="1050" b="1" dirty="0">
-                <a:solidFill>
-                  <a:srgbClr val="9A6310"/>
-                </a:solidFill>
-                <a:latin typeface="Courier New" pitchFamily="34" charset="0"/>
-                <a:ea typeface="Courier New" pitchFamily="34" charset="-122"/>
-                <a:cs typeface="Courier New" pitchFamily="34" charset="-120"/>
-              </a:rPr>
-              <a:t>Station 3</a:t>
-            </a:r>
-            <a:endParaRPr lang="en-US" sz="1050" dirty="0"/>
-          </a:p>
-        </p:txBody>
-      </p:sp>
-      <p:sp>
-        <p:nvSpPr>
-          <p:cNvPr id="12" name="Text 10"/>
-          <p:cNvSpPr/>
-          <p:nvPr/>
-        </p:nvSpPr>
-        <p:spPr>
-          <a:xfrm>
-            <a:off x="1664208" y="2048256"/>
-            <a:ext cx="6912864" cy="256032"/>
-          </a:xfrm>
-          <a:prstGeom prst="rect">
-            <a:avLst/>
-          </a:prstGeom>
-          <a:noFill/>
-          <a:ln/>
-        </p:spPr>
-        <p:txBody>
-          <a:bodyPr wrap="square" lIns="0" tIns="0" rIns="0" bIns="0" rtlCol="0" anchor="ctr"/>
-          <a:lstStyle/>
-          <a:p>
-            <a:pPr indent="0" marL="0">
-              <a:buNone/>
-            </a:pPr>
-            <a:r>
-              <a:rPr lang="en-US" sz="1050" dirty="0">
-                <a:solidFill>
-                  <a:srgbClr val="434A63"/>
-                </a:solidFill>
-                <a:latin typeface="Arial" pitchFamily="34" charset="0"/>
-                <a:ea typeface="Arial" pitchFamily="34" charset="-122"/>
-                <a:cs typeface="Arial" pitchFamily="34" charset="-120"/>
-              </a:rPr>
-              <a:t>Ändern oder ersetzen? Erst vorhersagen, dann apply · 15 Min.</a:t>
-            </a:r>
-            <a:endParaRPr lang="en-US" sz="1050" dirty="0"/>
-          </a:p>
-        </p:txBody>
-      </p:sp>
-      <p:sp>
-        <p:nvSpPr>
-          <p:cNvPr id="13" name="Text 11"/>
-          <p:cNvSpPr/>
-          <p:nvPr/>
-        </p:nvSpPr>
-        <p:spPr>
-          <a:xfrm>
-            <a:off x="566928" y="2304288"/>
-            <a:ext cx="1097280" cy="256032"/>
-          </a:xfrm>
-          <a:prstGeom prst="rect">
-            <a:avLst/>
-          </a:prstGeom>
-          <a:noFill/>
-          <a:ln/>
-        </p:spPr>
-        <p:txBody>
-          <a:bodyPr wrap="square" lIns="0" tIns="0" rIns="0" bIns="0" rtlCol="0" anchor="ctr"/>
-          <a:lstStyle/>
-          <a:p>
-            <a:pPr indent="0" marL="0">
-              <a:buNone/>
-            </a:pPr>
-            <a:r>
-              <a:rPr lang="en-US" sz="1050" b="1" dirty="0">
-                <a:solidFill>
-                  <a:srgbClr val="9A6310"/>
-                </a:solidFill>
-                <a:latin typeface="Courier New" pitchFamily="34" charset="0"/>
-                <a:ea typeface="Courier New" pitchFamily="34" charset="-122"/>
-                <a:cs typeface="Courier New" pitchFamily="34" charset="-120"/>
-              </a:rPr>
-              <a:t>Station 4</a:t>
-            </a:r>
-            <a:endParaRPr lang="en-US" sz="1050" dirty="0"/>
-          </a:p>
-        </p:txBody>
-      </p:sp>
-      <p:sp>
-        <p:nvSpPr>
-          <p:cNvPr id="14" name="Text 12"/>
-          <p:cNvSpPr/>
-          <p:nvPr/>
-        </p:nvSpPr>
-        <p:spPr>
-          <a:xfrm>
-            <a:off x="1664208" y="2304288"/>
-            <a:ext cx="6912864" cy="256032"/>
-          </a:xfrm>
-          <a:prstGeom prst="rect">
-            <a:avLst/>
-          </a:prstGeom>
-          <a:noFill/>
-          <a:ln/>
-        </p:spPr>
-        <p:txBody>
-          <a:bodyPr wrap="square" lIns="0" tIns="0" rIns="0" bIns="0" rtlCol="0" anchor="ctr"/>
-          <a:lstStyle/>
-          <a:p>
-            <a:pPr indent="0" marL="0">
-              <a:buNone/>
-            </a:pPr>
-            <a:r>
-              <a:rPr lang="en-US" sz="1050" dirty="0">
-                <a:solidFill>
-                  <a:srgbClr val="434A63"/>
-                </a:solidFill>
-                <a:latin typeface="Arial" pitchFamily="34" charset="0"/>
-                <a:ea typeface="Arial" pitchFamily="34" charset="-122"/>
-                <a:cs typeface="Arial" pitchFamily="34" charset="-120"/>
-              </a:rPr>
-              <a:t>Jemand hat geklickt: die Änderung in der Konsole aufdecken · 8 Min.</a:t>
-            </a:r>
-            <a:endParaRPr lang="en-US" sz="1050" dirty="0"/>
-          </a:p>
-        </p:txBody>
-      </p:sp>
-      <p:sp>
-        <p:nvSpPr>
-          <p:cNvPr id="15" name="Shape 13"/>
-          <p:cNvSpPr/>
-          <p:nvPr/>
-        </p:nvSpPr>
-        <p:spPr>
-          <a:xfrm>
-            <a:off x="438912" y="2560320"/>
-            <a:ext cx="8266176" cy="256032"/>
-          </a:xfrm>
-          <a:prstGeom prst="rect">
-            <a:avLst/>
-          </a:prstGeom>
-          <a:solidFill>
-            <a:srgbClr val="F5F6FC"/>
-          </a:solidFill>
-          <a:ln/>
-        </p:spPr>
-      </p:sp>
-      <p:sp>
-        <p:nvSpPr>
-          <p:cNvPr id="16" name="Text 14"/>
-          <p:cNvSpPr/>
-          <p:nvPr/>
-        </p:nvSpPr>
-        <p:spPr>
-          <a:xfrm>
-            <a:off x="566928" y="2560320"/>
-            <a:ext cx="1097280" cy="256032"/>
-          </a:xfrm>
-          <a:prstGeom prst="rect">
-            <a:avLst/>
-          </a:prstGeom>
-          <a:noFill/>
-          <a:ln/>
-        </p:spPr>
-        <p:txBody>
-          <a:bodyPr wrap="square" lIns="0" tIns="0" rIns="0" bIns="0" rtlCol="0" anchor="ctr"/>
-          <a:lstStyle/>
-          <a:p>
-            <a:pPr indent="0" marL="0">
-              <a:buNone/>
-            </a:pPr>
-            <a:r>
-              <a:rPr lang="en-US" sz="1050" b="1" dirty="0">
-                <a:solidFill>
-                  <a:srgbClr val="9A6310"/>
-                </a:solidFill>
-                <a:latin typeface="Courier New" pitchFamily="34" charset="0"/>
-                <a:ea typeface="Courier New" pitchFamily="34" charset="-122"/>
-                <a:cs typeface="Courier New" pitchFamily="34" charset="-120"/>
-              </a:rPr>
-              <a:t>Station 5</a:t>
-            </a:r>
-            <a:endParaRPr lang="en-US" sz="1050" dirty="0"/>
-          </a:p>
-        </p:txBody>
-      </p:sp>
-      <p:sp>
-        <p:nvSpPr>
-          <p:cNvPr id="17" name="Text 15"/>
-          <p:cNvSpPr/>
-          <p:nvPr/>
-        </p:nvSpPr>
-        <p:spPr>
-          <a:xfrm>
-            <a:off x="1664208" y="2560320"/>
-            <a:ext cx="6912864" cy="256032"/>
-          </a:xfrm>
-          <a:prstGeom prst="rect">
-            <a:avLst/>
-          </a:prstGeom>
-          <a:noFill/>
-          <a:ln/>
-        </p:spPr>
-        <p:txBody>
-          <a:bodyPr wrap="square" lIns="0" tIns="0" rIns="0" bIns="0" rtlCol="0" anchor="ctr"/>
-          <a:lstStyle/>
-          <a:p>
-            <a:pPr indent="0" marL="0">
-              <a:buNone/>
-            </a:pPr>
-            <a:r>
-              <a:rPr lang="en-US" sz="1050" dirty="0">
-                <a:solidFill>
-                  <a:srgbClr val="434A63"/>
-                </a:solidFill>
-                <a:latin typeface="Arial" pitchFamily="34" charset="0"/>
-                <a:ea typeface="Arial" pitchFamily="34" charset="-122"/>
-                <a:cs typeface="Arial" pitchFamily="34" charset="-120"/>
-              </a:rPr>
-              <a:t>Aus einem Server werden zwei: eine Zahl ändern · 10 Min.</a:t>
-            </a:r>
-            <a:endParaRPr lang="en-US" sz="1050" dirty="0"/>
-          </a:p>
-        </p:txBody>
-      </p:sp>
-      <p:sp>
-        <p:nvSpPr>
-          <p:cNvPr id="18" name="Text 16"/>
-          <p:cNvSpPr/>
-          <p:nvPr/>
-        </p:nvSpPr>
-        <p:spPr>
-          <a:xfrm>
-            <a:off x="566928" y="2816352"/>
-            <a:ext cx="1097280" cy="256032"/>
-          </a:xfrm>
-          <a:prstGeom prst="rect">
-            <a:avLst/>
-          </a:prstGeom>
-          <a:noFill/>
-          <a:ln/>
-        </p:spPr>
-        <p:txBody>
-          <a:bodyPr wrap="square" lIns="0" tIns="0" rIns="0" bIns="0" rtlCol="0" anchor="ctr"/>
-          <a:lstStyle/>
-          <a:p>
-            <a:pPr indent="0" marL="0">
-              <a:buNone/>
-            </a:pPr>
-            <a:r>
-              <a:rPr lang="en-US" sz="1050" b="1" dirty="0">
-                <a:solidFill>
-                  <a:srgbClr val="9A6310"/>
-                </a:solidFill>
-                <a:latin typeface="Courier New" pitchFamily="34" charset="0"/>
-                <a:ea typeface="Courier New" pitchFamily="34" charset="-122"/>
-                <a:cs typeface="Courier New" pitchFamily="34" charset="-120"/>
-              </a:rPr>
-              <a:t>Station 6</a:t>
-            </a:r>
-            <a:endParaRPr lang="en-US" sz="1050" dirty="0"/>
-          </a:p>
-        </p:txBody>
-      </p:sp>
-      <p:sp>
-        <p:nvSpPr>
-          <p:cNvPr id="19" name="Text 17"/>
-          <p:cNvSpPr/>
-          <p:nvPr/>
-        </p:nvSpPr>
-        <p:spPr>
-          <a:xfrm>
-            <a:off x="1664208" y="2816352"/>
-            <a:ext cx="6912864" cy="256032"/>
-          </a:xfrm>
-          <a:prstGeom prst="rect">
-            <a:avLst/>
-          </a:prstGeom>
-          <a:noFill/>
-          <a:ln/>
-        </p:spPr>
-        <p:txBody>
-          <a:bodyPr wrap="square" lIns="0" tIns="0" rIns="0" bIns="0" rtlCol="0" anchor="ctr"/>
-          <a:lstStyle/>
-          <a:p>
-            <a:pPr indent="0" marL="0">
-              <a:buNone/>
-            </a:pPr>
-            <a:r>
-              <a:rPr lang="en-US" sz="1050" dirty="0">
-                <a:solidFill>
-                  <a:srgbClr val="434A63"/>
-                </a:solidFill>
-                <a:latin typeface="Arial" pitchFamily="34" charset="0"/>
-                <a:ea typeface="Arial" pitchFamily="34" charset="-122"/>
-                <a:cs typeface="Arial" pitchFamily="34" charset="-120"/>
-              </a:rPr>
-              <a:t>Mit destroy aufräumen, spätestens um 20:20 Uhr · 5 Min.</a:t>
-            </a:r>
-            <a:endParaRPr lang="en-US" sz="1050" dirty="0"/>
-          </a:p>
-        </p:txBody>
-      </p:sp>
-      <p:sp>
-        <p:nvSpPr>
-          <p:cNvPr id="20" name="Shape 18"/>
-          <p:cNvSpPr/>
-          <p:nvPr/>
-        </p:nvSpPr>
-        <p:spPr>
-          <a:xfrm>
-            <a:off x="566928" y="3200400"/>
-            <a:ext cx="8010144" cy="1243584"/>
-          </a:xfrm>
-          <a:prstGeom prst="rect">
-            <a:avLst/>
-          </a:prstGeom>
-          <a:solidFill>
-            <a:srgbClr val="EEF0FB"/>
-          </a:solidFill>
-          <a:ln/>
-        </p:spPr>
-      </p:sp>
-      <p:sp>
-        <p:nvSpPr>
-          <p:cNvPr id="21" name="Shape 19"/>
-          <p:cNvSpPr/>
-          <p:nvPr/>
-        </p:nvSpPr>
-        <p:spPr>
-          <a:xfrm>
-            <a:off x="566928" y="3200400"/>
-            <a:ext cx="41148" cy="1243584"/>
-          </a:xfrm>
-          <a:prstGeom prst="rect">
-            <a:avLst/>
-          </a:prstGeom>
-          <a:solidFill>
-            <a:srgbClr val="9A6310"/>
-          </a:solidFill>
-          <a:ln/>
-        </p:spPr>
-      </p:sp>
-      <p:sp>
-        <p:nvSpPr>
-          <p:cNvPr id="22" name="Text 20"/>
-          <p:cNvSpPr/>
-          <p:nvPr/>
-        </p:nvSpPr>
-        <p:spPr>
-          <a:xfrm>
-            <a:off x="804672" y="3346704"/>
-            <a:ext cx="7607808" cy="242062"/>
-          </a:xfrm>
-          <a:prstGeom prst="rect">
-            <a:avLst/>
-          </a:prstGeom>
-          <a:noFill/>
-          <a:ln/>
-        </p:spPr>
-        <p:txBody>
-          <a:bodyPr wrap="square" lIns="0" tIns="0" rIns="0" bIns="0" rtlCol="0" anchor="t"/>
-          <a:lstStyle/>
-          <a:p>
-            <a:pPr indent="0" marL="0">
-              <a:buNone/>
-            </a:pPr>
-            <a:r>
-              <a:rPr lang="en-US" sz="1300" b="1" dirty="0">
-                <a:solidFill>
-                  <a:srgbClr val="272E52"/>
-                </a:solidFill>
-                <a:latin typeface="Arial" pitchFamily="34" charset="0"/>
-                <a:ea typeface="Arial" pitchFamily="34" charset="-122"/>
-                <a:cs typeface="Arial" pitchFamily="34" charset="-120"/>
-              </a:rPr>
-              <a:t>Jetzt öffnen, alles steht auf der Kursseite</a:t>
-            </a:r>
-            <a:endParaRPr lang="en-US" sz="1300" dirty="0"/>
-          </a:p>
-        </p:txBody>
-      </p:sp>
-      <p:sp>
-        <p:nvSpPr>
-          <p:cNvPr id="23" name="Text 21"/>
-          <p:cNvSpPr/>
-          <p:nvPr/>
-        </p:nvSpPr>
-        <p:spPr>
-          <a:xfrm>
-            <a:off x="804672" y="3634486"/>
-            <a:ext cx="7607808" cy="690626"/>
-          </a:xfrm>
-          <a:prstGeom prst="rect">
-            <a:avLst/>
-          </a:prstGeom>
-          <a:noFill/>
-          <a:ln/>
-        </p:spPr>
-        <p:txBody>
-          <a:bodyPr wrap="square" lIns="0" tIns="0" rIns="0" bIns="0" rtlCol="0" anchor="t"/>
-          <a:lstStyle/>
-          <a:p>
-            <a:pPr indent="0" marL="0">
-              <a:lnSpc>
-                <a:spcPct val="92000"/>
-              </a:lnSpc>
-              <a:spcAft>
-                <a:spcPts val="500"/>
-              </a:spcAft>
-              <a:buNone/>
-            </a:pPr>
-            <a:r>
-              <a:rPr lang="en-US" sz="1000" dirty="0">
-                <a:solidFill>
-                  <a:srgbClr val="434A63"/>
-                </a:solidFill>
-                <a:latin typeface="Arial" pitchFamily="34" charset="0"/>
-                <a:ea typeface="Arial" pitchFamily="34" charset="-122"/>
-                <a:cs typeface="Arial" pitchFamily="34" charset="-120"/>
-              </a:rPr>
-              <a:t>Übung:  jacobmenge.github.io/kurs-unterlagen/infrastruktur-planung/praxis-terraform/</a:t>
-            </a:r>
-            <a:endParaRPr lang="en-US" sz="1000" dirty="0"/>
-          </a:p>
-          <a:p>
-            <a:pPr indent="0" marL="0">
-              <a:lnSpc>
-                <a:spcPct val="92000"/>
-              </a:lnSpc>
-              <a:spcAft>
-                <a:spcPts val="500"/>
-              </a:spcAft>
-              <a:buNone/>
-            </a:pPr>
-            <a:r>
-              <a:rPr lang="en-US" sz="1000" dirty="0">
-                <a:solidFill>
-                  <a:srgbClr val="434A63"/>
-                </a:solidFill>
-                <a:latin typeface="Arial" pitchFamily="34" charset="0"/>
-                <a:ea typeface="Arial" pitchFamily="34" charset="-122"/>
-                <a:cs typeface="Arial" pitchFamily="34" charset="-120"/>
-              </a:rPr>
-              <a:t>Theorie:  jacobmenge.github.io/kurs-unterlagen/infrastruktur-planung/infrastruktur-als-code/</a:t>
-            </a:r>
-            <a:endParaRPr lang="en-US" sz="1000" dirty="0"/>
-          </a:p>
-          <a:p>
-            <a:pPr indent="0" marL="0">
-              <a:lnSpc>
-                <a:spcPct val="92000"/>
-              </a:lnSpc>
-              <a:spcAft>
-                <a:spcPts val="500"/>
-              </a:spcAft>
-              <a:buNone/>
-            </a:pPr>
-            <a:r>
-              <a:rPr lang="en-US" sz="1000" dirty="0">
-                <a:solidFill>
-                  <a:srgbClr val="434A63"/>
-                </a:solidFill>
-                <a:latin typeface="Arial" pitchFamily="34" charset="0"/>
-                <a:ea typeface="Arial" pitchFamily="34" charset="-122"/>
-                <a:cs typeface="Arial" pitchFamily="34" charset="-120"/>
-              </a:rPr>
-              <a:t>Bonus vor Station 6. Um 20:25 Uhr sind alle zurück.</a:t>
-            </a:r>
-            <a:endParaRPr lang="en-US" sz="1000" dirty="0"/>
-          </a:p>
-        </p:txBody>
-      </p:sp>
-      <p:sp>
-        <p:nvSpPr>
-          <p:cNvPr id="24" name="Shape 22"/>
+      <p:pic>
+        <p:nvPicPr>
+          <p:cNvPr id="5" name="Image 0" descr="/Users/jacobmenge/Desktop/kurs-26.2b-orga/folienwerkstatt/assets/diagramme/iac-sandbox-2.png">    </p:cNvPr>
+          <p:cNvPicPr>
+            <a:picLocks noChangeAspect="1"/>
+          </p:cNvPicPr>
+          <p:nvPr/>
+        </p:nvPicPr>
+        <p:blipFill>
+          <a:blip r:embed="rId1"/>
+          <a:stretch>
+            <a:fillRect/>
+          </a:stretch>
+        </p:blipFill>
+        <p:spPr>
+          <a:xfrm>
+            <a:off x="566928" y="1335024"/>
+            <a:ext cx="8010144" cy="2980944"/>
+          </a:xfrm>
+          <a:prstGeom prst="rect">
+            <a:avLst/>
+          </a:prstGeom>
+        </p:spPr>
+      </p:pic>
+      <p:sp>
+        <p:nvSpPr>
+          <p:cNvPr id="6" name="Shape 3"/>
           <p:cNvSpPr/>
           <p:nvPr/>
         </p:nvSpPr>
@@ -8255,7 +7894,7 @@
       </p:sp>
       <p:sp>
         <p:nvSpPr>
-          <p:cNvPr id="25" name="Text 23"/>
+          <p:cNvPr id="7" name="Text 4"/>
           <p:cNvSpPr/>
           <p:nvPr/>
         </p:nvSpPr>
@@ -8286,7 +7925,7 @@
                 <a:ea typeface="Arial" pitchFamily="34" charset="-122"/>
                 <a:cs typeface="Arial" pitchFamily="34" charset="-120"/>
               </a:rPr>
-              <a:t>Praxiszeit</a:t>
+              <a:t>Terraform</a:t>
             </a:r>
             <a:endParaRPr lang="en-US" sz="1050" dirty="0"/>
           </a:p>
@@ -8294,7 +7933,7 @@
       </p:sp>
       <p:sp>
         <p:nvSpPr>
-          <p:cNvPr id="26" name="Text 24"/>
+          <p:cNvPr id="8" name="Text 5"/>
           <p:cNvSpPr/>
           <p:nvPr/>
         </p:nvSpPr>
@@ -8325,7 +7964,7 @@
                 <a:ea typeface="Arial" pitchFamily="34" charset="-122"/>
                 <a:cs typeface="Arial" pitchFamily="34" charset="-120"/>
               </a:rPr>
-              <a:t>17/24</a:t>
+              <a:t>18/27</a:t>
             </a:r>
             <a:endParaRPr lang="en-US" sz="1050" dirty="0"/>
           </a:p>
@@ -8371,8 +8010,28 @@
         </p:nvSpPr>
         <p:spPr>
           <a:xfrm>
-            <a:off x="566928" y="201168"/>
-            <a:ext cx="475488" cy="50292"/>
+            <a:off x="6355080" y="0"/>
+            <a:ext cx="2788920" cy="5143500"/>
+          </a:xfrm>
+          <a:prstGeom prst="rect">
+            <a:avLst/>
+          </a:prstGeom>
+          <a:solidFill>
+            <a:srgbClr val="FBF2E3"/>
+          </a:solidFill>
+          <a:ln/>
+        </p:spPr>
+      </p:sp>
+      <p:sp>
+        <p:nvSpPr>
+          <p:cNvPr id="3" name="Shape 1"/>
+          <p:cNvSpPr/>
+          <p:nvPr/>
+        </p:nvSpPr>
+        <p:spPr>
+          <a:xfrm>
+            <a:off x="6355080" y="0"/>
+            <a:ext cx="45720" cy="5143500"/>
           </a:xfrm>
           <a:prstGeom prst="rect">
             <a:avLst/>
@@ -8385,14 +8044,14 @@
       </p:sp>
       <p:sp>
         <p:nvSpPr>
-          <p:cNvPr id="3" name="Text 1"/>
-          <p:cNvSpPr/>
-          <p:nvPr/>
-        </p:nvSpPr>
-        <p:spPr>
-          <a:xfrm>
-            <a:off x="566928" y="384048"/>
-            <a:ext cx="8010144" cy="237744"/>
+          <p:cNvPr id="4" name="Text 2"/>
+          <p:cNvSpPr/>
+          <p:nvPr/>
+        </p:nvSpPr>
+        <p:spPr>
+          <a:xfrm>
+            <a:off x="6629400" y="1463040"/>
+            <a:ext cx="2194560" cy="1737360"/>
           </a:xfrm>
           <a:prstGeom prst="rect">
             <a:avLst/>
@@ -8404,34 +8063,93 @@
           <a:bodyPr wrap="square" lIns="0" tIns="0" rIns="0" bIns="0" rtlCol="0" anchor="ctr"/>
           <a:lstStyle/>
           <a:p>
+            <a:pPr algn="ctr" indent="0" marL="0">
+              <a:buNone/>
+            </a:pPr>
+            <a:r>
+              <a:rPr lang="en-US" sz="8400" b="1" dirty="0">
+                <a:solidFill>
+                  <a:srgbClr val="9A6310"/>
+                </a:solidFill>
+                <a:latin typeface="Arial" pitchFamily="34" charset="0"/>
+                <a:ea typeface="Arial" pitchFamily="34" charset="-122"/>
+                <a:cs typeface="Arial" pitchFamily="34" charset="-120"/>
+              </a:rPr>
+              <a:t>03</a:t>
+            </a:r>
+            <a:endParaRPr lang="en-US" sz="8400" dirty="0"/>
+          </a:p>
+        </p:txBody>
+      </p:sp>
+      <p:sp>
+        <p:nvSpPr>
+          <p:cNvPr id="5" name="Shape 3"/>
+          <p:cNvSpPr/>
+          <p:nvPr/>
+        </p:nvSpPr>
+        <p:spPr>
+          <a:xfrm>
+            <a:off x="566928" y="1883664"/>
+            <a:ext cx="475488" cy="50292"/>
+          </a:xfrm>
+          <a:prstGeom prst="rect">
+            <a:avLst/>
+          </a:prstGeom>
+          <a:solidFill>
+            <a:srgbClr val="9A6310"/>
+          </a:solidFill>
+          <a:ln/>
+        </p:spPr>
+      </p:sp>
+      <p:sp>
+        <p:nvSpPr>
+          <p:cNvPr id="6" name="Text 4"/>
+          <p:cNvSpPr/>
+          <p:nvPr/>
+        </p:nvSpPr>
+        <p:spPr>
+          <a:xfrm>
+            <a:off x="566928" y="2084832"/>
+            <a:ext cx="5394960" cy="868680"/>
+          </a:xfrm>
+          <a:prstGeom prst="rect">
+            <a:avLst/>
+          </a:prstGeom>
+          <a:noFill/>
+          <a:ln/>
+        </p:spPr>
+        <p:txBody>
+          <a:bodyPr wrap="square" lIns="0" tIns="0" rIns="0" bIns="0" rtlCol="0" anchor="t"/>
+          <a:lstStyle/>
+          <a:p>
             <a:pPr indent="0" marL="0">
               <a:buNone/>
             </a:pPr>
             <a:r>
-              <a:rPr lang="en-US" sz="1150" b="1" spc="180" kern="0" dirty="0">
-                <a:solidFill>
-                  <a:srgbClr val="9A6310"/>
-                </a:solidFill>
-                <a:latin typeface="Arial" pitchFamily="34" charset="0"/>
-                <a:ea typeface="Arial" pitchFamily="34" charset="-122"/>
-                <a:cs typeface="Arial" pitchFamily="34" charset="-120"/>
-              </a:rPr>
-              <a:t>SO ARBEITET IHR HEUTE</a:t>
-            </a:r>
-            <a:endParaRPr lang="en-US" sz="1150" dirty="0"/>
-          </a:p>
-        </p:txBody>
-      </p:sp>
-      <p:sp>
-        <p:nvSpPr>
-          <p:cNvPr id="4" name="Text 2"/>
-          <p:cNvSpPr/>
-          <p:nvPr/>
-        </p:nvSpPr>
-        <p:spPr>
-          <a:xfrm>
-            <a:off x="566928" y="731520"/>
-            <a:ext cx="8010144" cy="603504"/>
+              <a:rPr lang="en-US" sz="3000" b="1" dirty="0">
+                <a:solidFill>
+                  <a:srgbClr val="272E52"/>
+                </a:solidFill>
+                <a:latin typeface="Arial" pitchFamily="34" charset="0"/>
+                <a:ea typeface="Arial" pitchFamily="34" charset="-122"/>
+                <a:cs typeface="Arial" pitchFamily="34" charset="-120"/>
+              </a:rPr>
+              <a:t>Praxiszeit</a:t>
+            </a:r>
+            <a:endParaRPr lang="en-US" sz="3000" dirty="0"/>
+          </a:p>
+        </p:txBody>
+      </p:sp>
+      <p:sp>
+        <p:nvSpPr>
+          <p:cNvPr id="7" name="Text 5"/>
+          <p:cNvSpPr/>
+          <p:nvPr/>
+        </p:nvSpPr>
+        <p:spPr>
+          <a:xfrm>
+            <a:off x="566928" y="3017520"/>
+            <a:ext cx="5394960" cy="548640"/>
           </a:xfrm>
           <a:prstGeom prst="rect">
             <a:avLst/>
@@ -8447,280 +8165,7 @@
               <a:buNone/>
             </a:pPr>
             <a:r>
-              <a:rPr lang="en-US" sz="2600" b="1" dirty="0">
-                <a:solidFill>
-                  <a:srgbClr val="272E52"/>
-                </a:solidFill>
-                <a:latin typeface="Arial" pitchFamily="34" charset="0"/>
-                <a:ea typeface="Arial" pitchFamily="34" charset="-122"/>
-                <a:cs typeface="Arial" pitchFamily="34" charset="-120"/>
-              </a:rPr>
-              <a:t>Spielregeln</a:t>
-            </a:r>
-            <a:endParaRPr lang="en-US" sz="2600" dirty="0"/>
-          </a:p>
-        </p:txBody>
-      </p:sp>
-      <p:sp>
-        <p:nvSpPr>
-          <p:cNvPr id="5" name="Text 3"/>
-          <p:cNvSpPr/>
-          <p:nvPr/>
-        </p:nvSpPr>
-        <p:spPr>
-          <a:xfrm>
-            <a:off x="566928" y="1572768"/>
-            <a:ext cx="8010144" cy="3017520"/>
-          </a:xfrm>
-          <a:prstGeom prst="rect">
-            <a:avLst/>
-          </a:prstGeom>
-          <a:noFill/>
-          <a:ln/>
-        </p:spPr>
-        <p:txBody>
-          <a:bodyPr wrap="square" lIns="0" tIns="0" rIns="0" bIns="0" rtlCol="0" anchor="t"/>
-          <a:lstStyle/>
-          <a:p>
-            <a:pPr marL="254000" indent="-254000">
-              <a:lnSpc>
-                <a:spcPct val="100000"/>
-              </a:lnSpc>
-              <a:spcAft>
-                <a:spcPts val="900"/>
-              </a:spcAft>
-              <a:buClr>
-                <a:srgbClr val="9A6310"/>
-              </a:buClr>
-              <a:buSzPct val="100000"/>
-              <a:buChar char="▸"/>
-            </a:pPr>
-            <a:r>
-              <a:rPr lang="en-US" sz="1150" dirty="0">
-                <a:solidFill>
-                  <a:srgbClr val="434A63"/>
-                </a:solidFill>
-                <a:latin typeface="Arial" pitchFamily="34" charset="0"/>
-                <a:ea typeface="Arial" pitchFamily="34" charset="-122"/>
-                <a:cs typeface="Arial" pitchFamily="34" charset="-120"/>
-              </a:rPr>
-              <a:t>Ihr arbeitet heute jede und jeder für sich, jeweils in der eigenen Sandbox.</a:t>
-            </a:r>
-            <a:endParaRPr lang="en-US" sz="1150" dirty="0"/>
-          </a:p>
-          <a:p>
-            <a:pPr marL="254000" indent="-254000">
-              <a:lnSpc>
-                <a:spcPct val="100000"/>
-              </a:lnSpc>
-              <a:spcAft>
-                <a:spcPts val="900"/>
-              </a:spcAft>
-              <a:buClr>
-                <a:srgbClr val="9A6310"/>
-              </a:buClr>
-              <a:buSzPct val="100000"/>
-              <a:buChar char="▸"/>
-            </a:pPr>
-            <a:r>
-              <a:rPr lang="en-US" sz="1150" dirty="0">
-                <a:solidFill>
-                  <a:srgbClr val="434A63"/>
-                </a:solidFill>
-                <a:latin typeface="Arial" pitchFamily="34" charset="0"/>
-                <a:ea typeface="Arial" pitchFamily="34" charset="-122"/>
-                <a:cs typeface="Arial" pitchFamily="34" charset="-120"/>
-              </a:rPr>
-              <a:t>Alle Befehle laufen in CloudShell. Windows oder macOS spielt heute keine Rolle.</a:t>
-            </a:r>
-            <a:endParaRPr lang="en-US" sz="1150" dirty="0"/>
-          </a:p>
-          <a:p>
-            <a:pPr marL="254000" indent="-254000">
-              <a:lnSpc>
-                <a:spcPct val="100000"/>
-              </a:lnSpc>
-              <a:spcAft>
-                <a:spcPts val="900"/>
-              </a:spcAft>
-              <a:buClr>
-                <a:srgbClr val="9A6310"/>
-              </a:buClr>
-              <a:buSzPct val="100000"/>
-              <a:buChar char="▸"/>
-            </a:pPr>
-            <a:r>
-              <a:rPr lang="en-US" sz="1150" dirty="0">
-                <a:solidFill>
-                  <a:srgbClr val="434A63"/>
-                </a:solidFill>
-                <a:latin typeface="Arial" pitchFamily="34" charset="0"/>
-                <a:ea typeface="Arial" pitchFamily="34" charset="-122"/>
-                <a:cs typeface="Arial" pitchFamily="34" charset="-120"/>
-              </a:rPr>
-              <a:t>Datei und Befehle kopiert ihr von der Kursseite. Abtippen kostet nur Zeit und bringt Tippfehler.</a:t>
-            </a:r>
-            <a:endParaRPr lang="en-US" sz="1150" dirty="0"/>
-          </a:p>
-          <a:p>
-            <a:pPr marL="254000" indent="-254000">
-              <a:lnSpc>
-                <a:spcPct val="100000"/>
-              </a:lnSpc>
-              <a:spcAft>
-                <a:spcPts val="900"/>
-              </a:spcAft>
-              <a:buClr>
-                <a:srgbClr val="9A6310"/>
-              </a:buClr>
-              <a:buSzPct val="100000"/>
-              <a:buChar char="▸"/>
-            </a:pPr>
-            <a:r>
-              <a:rPr lang="en-US" sz="1150" dirty="0">
-                <a:solidFill>
-                  <a:srgbClr val="434A63"/>
-                </a:solidFill>
-                <a:latin typeface="Arial" pitchFamily="34" charset="0"/>
-                <a:ea typeface="Arial" pitchFamily="34" charset="-122"/>
-                <a:cs typeface="Arial" pitchFamily="34" charset="-120"/>
-              </a:rPr>
-              <a:t>Ändern mit nano: Speichern mit Strg+O und Enter, schließen mit Strg+X. Nie Strg+W, das schließt den Browser-Reiter.</a:t>
-            </a:r>
-            <a:endParaRPr lang="en-US" sz="1150" dirty="0"/>
-          </a:p>
-          <a:p>
-            <a:pPr marL="254000" indent="-254000">
-              <a:lnSpc>
-                <a:spcPct val="100000"/>
-              </a:lnSpc>
-              <a:spcAft>
-                <a:spcPts val="900"/>
-              </a:spcAft>
-              <a:buClr>
-                <a:srgbClr val="9A6310"/>
-              </a:buClr>
-              <a:buSzPct val="100000"/>
-              <a:buChar char="▸"/>
-            </a:pPr>
-            <a:r>
-              <a:rPr lang="en-US" sz="1150" dirty="0">
-                <a:solidFill>
-                  <a:srgbClr val="434A63"/>
-                </a:solidFill>
-                <a:latin typeface="Arial" pitchFamily="34" charset="0"/>
-                <a:ea typeface="Arial" pitchFamily="34" charset="-122"/>
-                <a:cs typeface="Arial" pitchFamily="34" charset="-120"/>
-              </a:rPr>
-              <a:t>Vor jedem apply: erst die Vorhersage aufschreiben, dann den Plan lesen, dann yes.</a:t>
-            </a:r>
-            <a:endParaRPr lang="en-US" sz="1150" dirty="0"/>
-          </a:p>
-          <a:p>
-            <a:pPr marL="254000" indent="-254000">
-              <a:lnSpc>
-                <a:spcPct val="100000"/>
-              </a:lnSpc>
-              <a:spcAft>
-                <a:spcPts val="900"/>
-              </a:spcAft>
-              <a:buClr>
-                <a:srgbClr val="9A6310"/>
-              </a:buClr>
-              <a:buSzPct val="100000"/>
-              <a:buChar char="▸"/>
-            </a:pPr>
-            <a:r>
-              <a:rPr lang="en-US" sz="1150" dirty="0">
-                <a:solidFill>
-                  <a:srgbClr val="434A63"/>
-                </a:solidFill>
-                <a:latin typeface="Arial" pitchFamily="34" charset="0"/>
-                <a:ea typeface="Arial" pitchFamily="34" charset="-122"/>
-                <a:cs typeface="Arial" pitchFamily="34" charset="-120"/>
-              </a:rPr>
-              <a:t>Bei einer Fehlermeldung: erst die Tabelle „Wenn es klemmt“ auf der Kursseite, dann im Chat fragen.</a:t>
-            </a:r>
-            <a:endParaRPr lang="en-US" sz="1150" dirty="0"/>
-          </a:p>
-          <a:p>
-            <a:pPr marL="254000" indent="-254000">
-              <a:lnSpc>
-                <a:spcPct val="100000"/>
-              </a:lnSpc>
-              <a:spcAft>
-                <a:spcPts val="900"/>
-              </a:spcAft>
-              <a:buClr>
-                <a:srgbClr val="9A6310"/>
-              </a:buClr>
-              <a:buSzPct val="100000"/>
-              <a:buChar char="▸"/>
-            </a:pPr>
-            <a:r>
-              <a:rPr lang="en-US" sz="1150" dirty="0">
-                <a:solidFill>
-                  <a:srgbClr val="434A63"/>
-                </a:solidFill>
-                <a:latin typeface="Arial" pitchFamily="34" charset="0"/>
-                <a:ea typeface="Arial" pitchFamily="34" charset="-122"/>
-                <a:cs typeface="Arial" pitchFamily="34" charset="-120"/>
-              </a:rPr>
-              <a:t>Wer fertig ist, macht die Bonus-Aufgaben vor Station 6. Aufgeräumt wird spätestens um 20:20 Uhr.</a:t>
-            </a:r>
-            <a:endParaRPr lang="en-US" sz="1150" dirty="0"/>
-          </a:p>
-        </p:txBody>
-      </p:sp>
-      <p:sp>
-        <p:nvSpPr>
-          <p:cNvPr id="6" name="Shape 4"/>
-          <p:cNvSpPr/>
-          <p:nvPr/>
-        </p:nvSpPr>
-        <p:spPr>
-          <a:xfrm>
-            <a:off x="566928" y="4631436"/>
-            <a:ext cx="8010144" cy="0"/>
-          </a:xfrm>
-          <a:prstGeom prst="line">
-            <a:avLst/>
-          </a:prstGeom>
-          <a:noFill/>
-          <a:ln w="9525">
-            <a:solidFill>
-              <a:srgbClr val="DFE3F0"/>
-            </a:solidFill>
-            <a:prstDash val="solid"/>
-          </a:ln>
-        </p:spPr>
-      </p:sp>
-      <p:sp>
-        <p:nvSpPr>
-          <p:cNvPr id="7" name="Text 5"/>
-          <p:cNvSpPr/>
-          <p:nvPr/>
-        </p:nvSpPr>
-        <p:spPr>
-          <a:xfrm>
-            <a:off x="566928" y="4722876"/>
-            <a:ext cx="5029200" cy="237744"/>
-          </a:xfrm>
-          <a:prstGeom prst="rect">
-            <a:avLst/>
-          </a:prstGeom>
-          <a:noFill/>
-          <a:ln/>
-        </p:spPr>
-        <p:txBody>
-          <a:bodyPr wrap="square" lIns="0" tIns="0" rIns="0" bIns="0" rtlCol="0" anchor="ctr"/>
-          <a:lstStyle/>
-          <a:p>
-            <a:pPr indent="0" marL="0">
-              <a:buNone/>
-            </a:pPr>
-            <a:r>
-              <a:rPr lang="en-US" sz="1050" spc="30" kern="0" dirty="0">
+              <a:rPr lang="en-US" sz="1350" dirty="0">
                 <a:solidFill>
                   <a:srgbClr val="5C6377"/>
                 </a:solidFill>
@@ -8728,48 +8173,9 @@
                 <a:ea typeface="Arial" pitchFamily="34" charset="-122"/>
                 <a:cs typeface="Arial" pitchFamily="34" charset="-120"/>
               </a:rPr>
-              <a:t>Praxiszeit</a:t>
-            </a:r>
-            <a:endParaRPr lang="en-US" sz="1050" dirty="0"/>
-          </a:p>
-        </p:txBody>
-      </p:sp>
-      <p:sp>
-        <p:nvSpPr>
-          <p:cNvPr id="8" name="Text 6"/>
-          <p:cNvSpPr/>
-          <p:nvPr/>
-        </p:nvSpPr>
-        <p:spPr>
-          <a:xfrm>
-            <a:off x="8028432" y="4722876"/>
-            <a:ext cx="548640" cy="237744"/>
-          </a:xfrm>
-          <a:prstGeom prst="rect">
-            <a:avLst/>
-          </a:prstGeom>
-          <a:noFill/>
-          <a:ln/>
-        </p:spPr>
-        <p:txBody>
-          <a:bodyPr wrap="square" lIns="0" tIns="0" rIns="0" bIns="0" rtlCol="0" anchor="ctr"/>
-          <a:lstStyle/>
-          <a:p>
-            <a:pPr algn="r" indent="0" marL="0">
-              <a:buNone/>
-            </a:pPr>
-            <a:r>
-              <a:rPr lang="en-US" sz="1050" dirty="0">
-                <a:solidFill>
-                  <a:srgbClr val="5C6377"/>
-                </a:solidFill>
-                <a:latin typeface="Arial" pitchFamily="34" charset="0"/>
-                <a:ea typeface="Arial" pitchFamily="34" charset="-122"/>
-                <a:cs typeface="Arial" pitchFamily="34" charset="-120"/>
-              </a:rPr>
-              <a:t>18/24</a:t>
-            </a:r>
-            <a:endParaRPr lang="en-US" sz="1050" dirty="0"/>
+              <a:t>Der Konfigurator als Code, in eurer eigenen Sandbox.</a:t>
+            </a:r>
+            <a:endParaRPr lang="en-US" sz="1350" dirty="0"/>
           </a:p>
         </p:txBody>
       </p:sp>
@@ -8858,7 +8264,7 @@
                 <a:ea typeface="Arial" pitchFamily="34" charset="-122"/>
                 <a:cs typeface="Arial" pitchFamily="34" charset="-120"/>
               </a:rPr>
-              <a:t>AUSWERTUNG</a:t>
+              <a:t>ZIELBILD</a:t>
             </a:r>
             <a:endParaRPr lang="en-US" sz="1150" dirty="0"/>
           </a:p>
@@ -8897,524 +8303,39 @@
                 <a:ea typeface="Arial" pitchFamily="34" charset="-122"/>
                 <a:cs typeface="Arial" pitchFamily="34" charset="-120"/>
               </a:rPr>
-              <a:t>Was ihr gesehen habt</a:t>
+              <a:t>Das baut ihr gleich</a:t>
             </a:r>
             <a:endParaRPr lang="en-US" sz="2600" dirty="0"/>
           </a:p>
         </p:txBody>
       </p:sp>
-      <p:sp>
-        <p:nvSpPr>
-          <p:cNvPr id="5" name="Shape 3"/>
-          <p:cNvSpPr/>
-          <p:nvPr/>
-        </p:nvSpPr>
-        <p:spPr>
-          <a:xfrm>
-            <a:off x="438912" y="1737360"/>
-            <a:ext cx="8266176" cy="384048"/>
-          </a:xfrm>
-          <a:prstGeom prst="rect">
-            <a:avLst/>
-          </a:prstGeom>
-          <a:solidFill>
-            <a:srgbClr val="F5F6FC"/>
-          </a:solidFill>
-          <a:ln/>
-        </p:spPr>
-      </p:sp>
-      <p:sp>
-        <p:nvSpPr>
-          <p:cNvPr id="6" name="Text 4"/>
-          <p:cNvSpPr/>
-          <p:nvPr/>
-        </p:nvSpPr>
-        <p:spPr>
-          <a:xfrm>
-            <a:off x="566928" y="1737360"/>
-            <a:ext cx="548640" cy="384048"/>
-          </a:xfrm>
-          <a:prstGeom prst="rect">
-            <a:avLst/>
-          </a:prstGeom>
-          <a:noFill/>
-          <a:ln/>
-        </p:spPr>
-        <p:txBody>
-          <a:bodyPr wrap="square" lIns="0" tIns="0" rIns="0" bIns="0" rtlCol="0" anchor="ctr"/>
-          <a:lstStyle/>
-          <a:p>
-            <a:pPr indent="0" marL="0">
-              <a:buNone/>
-            </a:pPr>
-            <a:r>
-              <a:rPr lang="en-US" sz="1150" b="1" dirty="0">
-                <a:solidFill>
-                  <a:srgbClr val="9A6310"/>
-                </a:solidFill>
-                <a:latin typeface="Courier New" pitchFamily="34" charset="0"/>
-                <a:ea typeface="Courier New" pitchFamily="34" charset="-122"/>
-                <a:cs typeface="Courier New" pitchFamily="34" charset="-120"/>
-              </a:rPr>
-              <a:t>1</a:t>
-            </a:r>
-            <a:endParaRPr lang="en-US" sz="1150" dirty="0"/>
-          </a:p>
-        </p:txBody>
-      </p:sp>
-      <p:sp>
-        <p:nvSpPr>
-          <p:cNvPr id="7" name="Text 5"/>
-          <p:cNvSpPr/>
-          <p:nvPr/>
-        </p:nvSpPr>
-        <p:spPr>
-          <a:xfrm>
-            <a:off x="1115568" y="1737360"/>
-            <a:ext cx="7461504" cy="384048"/>
-          </a:xfrm>
-          <a:prstGeom prst="rect">
-            <a:avLst/>
-          </a:prstGeom>
-          <a:noFill/>
-          <a:ln/>
-        </p:spPr>
-        <p:txBody>
-          <a:bodyPr wrap="square" lIns="0" tIns="0" rIns="0" bIns="0" rtlCol="0" anchor="ctr"/>
-          <a:lstStyle/>
-          <a:p>
-            <a:pPr indent="0" marL="0">
-              <a:buNone/>
-            </a:pPr>
-            <a:r>
-              <a:rPr lang="en-US" sz="1150" dirty="0">
-                <a:solidFill>
-                  <a:srgbClr val="434A63"/>
-                </a:solidFill>
-                <a:latin typeface="Arial" pitchFamily="34" charset="0"/>
-                <a:ea typeface="Arial" pitchFamily="34" charset="-122"/>
-                <a:cs typeface="Arial" pitchFamily="34" charset="-120"/>
-              </a:rPr>
-              <a:t>Was zeigte der erste Plan? Welche Datei lag danach neu im Ordner?</a:t>
-            </a:r>
-            <a:endParaRPr lang="en-US" sz="1150" dirty="0"/>
-          </a:p>
-        </p:txBody>
-      </p:sp>
-      <p:sp>
-        <p:nvSpPr>
-          <p:cNvPr id="8" name="Text 6"/>
-          <p:cNvSpPr/>
-          <p:nvPr/>
-        </p:nvSpPr>
-        <p:spPr>
-          <a:xfrm>
-            <a:off x="566928" y="2121408"/>
-            <a:ext cx="548640" cy="384048"/>
-          </a:xfrm>
-          <a:prstGeom prst="rect">
-            <a:avLst/>
-          </a:prstGeom>
-          <a:noFill/>
-          <a:ln/>
-        </p:spPr>
-        <p:txBody>
-          <a:bodyPr wrap="square" lIns="0" tIns="0" rIns="0" bIns="0" rtlCol="0" anchor="ctr"/>
-          <a:lstStyle/>
-          <a:p>
-            <a:pPr indent="0" marL="0">
-              <a:buNone/>
-            </a:pPr>
-            <a:r>
-              <a:rPr lang="en-US" sz="1150" b="1" dirty="0">
-                <a:solidFill>
-                  <a:srgbClr val="9A6310"/>
-                </a:solidFill>
-                <a:latin typeface="Courier New" pitchFamily="34" charset="0"/>
-                <a:ea typeface="Courier New" pitchFamily="34" charset="-122"/>
-                <a:cs typeface="Courier New" pitchFamily="34" charset="-120"/>
-              </a:rPr>
-              <a:t>2</a:t>
-            </a:r>
-            <a:endParaRPr lang="en-US" sz="1150" dirty="0"/>
-          </a:p>
-        </p:txBody>
-      </p:sp>
-      <p:sp>
-        <p:nvSpPr>
-          <p:cNvPr id="9" name="Text 7"/>
-          <p:cNvSpPr/>
-          <p:nvPr/>
-        </p:nvSpPr>
-        <p:spPr>
-          <a:xfrm>
-            <a:off x="1115568" y="2121408"/>
-            <a:ext cx="7461504" cy="384048"/>
-          </a:xfrm>
-          <a:prstGeom prst="rect">
-            <a:avLst/>
-          </a:prstGeom>
-          <a:noFill/>
-          <a:ln/>
-        </p:spPr>
-        <p:txBody>
-          <a:bodyPr wrap="square" lIns="0" tIns="0" rIns="0" bIns="0" rtlCol="0" anchor="ctr"/>
-          <a:lstStyle/>
-          <a:p>
-            <a:pPr indent="0" marL="0">
-              <a:buNone/>
-            </a:pPr>
-            <a:r>
-              <a:rPr lang="en-US" sz="1150" dirty="0">
-                <a:solidFill>
-                  <a:srgbClr val="434A63"/>
-                </a:solidFill>
-                <a:latin typeface="Arial" pitchFamily="34" charset="0"/>
-                <a:ea typeface="Arial" pitchFamily="34" charset="-122"/>
-                <a:cs typeface="Arial" pitchFamily="34" charset="-120"/>
-              </a:rPr>
-              <a:t>Eure drei Vorhersagen aus Station 3: Wo lagt ihr richtig?</a:t>
-            </a:r>
-            <a:endParaRPr lang="en-US" sz="1150" dirty="0"/>
-          </a:p>
-        </p:txBody>
-      </p:sp>
-      <p:sp>
-        <p:nvSpPr>
-          <p:cNvPr id="10" name="Shape 8"/>
-          <p:cNvSpPr/>
-          <p:nvPr/>
-        </p:nvSpPr>
-        <p:spPr>
-          <a:xfrm>
-            <a:off x="438912" y="2505456"/>
-            <a:ext cx="8266176" cy="384048"/>
-          </a:xfrm>
-          <a:prstGeom prst="rect">
-            <a:avLst/>
-          </a:prstGeom>
-          <a:solidFill>
-            <a:srgbClr val="F5F6FC"/>
-          </a:solidFill>
-          <a:ln/>
-        </p:spPr>
-      </p:sp>
-      <p:sp>
-        <p:nvSpPr>
-          <p:cNvPr id="11" name="Text 9"/>
-          <p:cNvSpPr/>
-          <p:nvPr/>
-        </p:nvSpPr>
-        <p:spPr>
-          <a:xfrm>
-            <a:off x="566928" y="2505456"/>
-            <a:ext cx="548640" cy="384048"/>
-          </a:xfrm>
-          <a:prstGeom prst="rect">
-            <a:avLst/>
-          </a:prstGeom>
-          <a:noFill/>
-          <a:ln/>
-        </p:spPr>
-        <p:txBody>
-          <a:bodyPr wrap="square" lIns="0" tIns="0" rIns="0" bIns="0" rtlCol="0" anchor="ctr"/>
-          <a:lstStyle/>
-          <a:p>
-            <a:pPr indent="0" marL="0">
-              <a:buNone/>
-            </a:pPr>
-            <a:r>
-              <a:rPr lang="en-US" sz="1150" b="1" dirty="0">
-                <a:solidFill>
-                  <a:srgbClr val="9A6310"/>
-                </a:solidFill>
-                <a:latin typeface="Courier New" pitchFamily="34" charset="0"/>
-                <a:ea typeface="Courier New" pitchFamily="34" charset="-122"/>
-                <a:cs typeface="Courier New" pitchFamily="34" charset="-120"/>
-              </a:rPr>
-              <a:t>3</a:t>
-            </a:r>
-            <a:endParaRPr lang="en-US" sz="1150" dirty="0"/>
-          </a:p>
-        </p:txBody>
-      </p:sp>
-      <p:sp>
-        <p:nvSpPr>
-          <p:cNvPr id="12" name="Text 10"/>
-          <p:cNvSpPr/>
-          <p:nvPr/>
-        </p:nvSpPr>
-        <p:spPr>
-          <a:xfrm>
-            <a:off x="1115568" y="2505456"/>
-            <a:ext cx="7461504" cy="384048"/>
-          </a:xfrm>
-          <a:prstGeom prst="rect">
-            <a:avLst/>
-          </a:prstGeom>
-          <a:noFill/>
-          <a:ln/>
-        </p:spPr>
-        <p:txBody>
-          <a:bodyPr wrap="square" lIns="0" tIns="0" rIns="0" bIns="0" rtlCol="0" anchor="ctr"/>
-          <a:lstStyle/>
-          <a:p>
-            <a:pPr indent="0" marL="0">
-              <a:buNone/>
-            </a:pPr>
-            <a:r>
-              <a:rPr lang="en-US" sz="1150" dirty="0">
-                <a:solidFill>
-                  <a:srgbClr val="434A63"/>
-                </a:solidFill>
-                <a:latin typeface="Arial" pitchFamily="34" charset="0"/>
-                <a:ea typeface="Arial" pitchFamily="34" charset="-122"/>
-                <a:cs typeface="Arial" pitchFamily="34" charset="-120"/>
-              </a:rPr>
-              <a:t>Was wollte Terraform nach der Änderung in der Konsole?</a:t>
-            </a:r>
-            <a:endParaRPr lang="en-US" sz="1150" dirty="0"/>
-          </a:p>
-        </p:txBody>
-      </p:sp>
-      <p:sp>
-        <p:nvSpPr>
-          <p:cNvPr id="13" name="Text 11"/>
-          <p:cNvSpPr/>
-          <p:nvPr/>
-        </p:nvSpPr>
-        <p:spPr>
-          <a:xfrm>
-            <a:off x="566928" y="2889504"/>
-            <a:ext cx="548640" cy="384048"/>
-          </a:xfrm>
-          <a:prstGeom prst="rect">
-            <a:avLst/>
-          </a:prstGeom>
-          <a:noFill/>
-          <a:ln/>
-        </p:spPr>
-        <p:txBody>
-          <a:bodyPr wrap="square" lIns="0" tIns="0" rIns="0" bIns="0" rtlCol="0" anchor="ctr"/>
-          <a:lstStyle/>
-          <a:p>
-            <a:pPr indent="0" marL="0">
-              <a:buNone/>
-            </a:pPr>
-            <a:r>
-              <a:rPr lang="en-US" sz="1150" b="1" dirty="0">
-                <a:solidFill>
-                  <a:srgbClr val="9A6310"/>
-                </a:solidFill>
-                <a:latin typeface="Courier New" pitchFamily="34" charset="0"/>
-                <a:ea typeface="Courier New" pitchFamily="34" charset="-122"/>
-                <a:cs typeface="Courier New" pitchFamily="34" charset="-120"/>
-              </a:rPr>
-              <a:t>4</a:t>
-            </a:r>
-            <a:endParaRPr lang="en-US" sz="1150" dirty="0"/>
-          </a:p>
-        </p:txBody>
-      </p:sp>
-      <p:sp>
-        <p:nvSpPr>
-          <p:cNvPr id="14" name="Text 12"/>
-          <p:cNvSpPr/>
-          <p:nvPr/>
-        </p:nvSpPr>
-        <p:spPr>
-          <a:xfrm>
-            <a:off x="1115568" y="2889504"/>
-            <a:ext cx="7461504" cy="384048"/>
-          </a:xfrm>
-          <a:prstGeom prst="rect">
-            <a:avLst/>
-          </a:prstGeom>
-          <a:noFill/>
-          <a:ln/>
-        </p:spPr>
-        <p:txBody>
-          <a:bodyPr wrap="square" lIns="0" tIns="0" rIns="0" bIns="0" rtlCol="0" anchor="ctr"/>
-          <a:lstStyle/>
-          <a:p>
-            <a:pPr indent="0" marL="0">
-              <a:buNone/>
-            </a:pPr>
-            <a:r>
-              <a:rPr lang="en-US" sz="1150" dirty="0">
-                <a:solidFill>
-                  <a:srgbClr val="434A63"/>
-                </a:solidFill>
-                <a:latin typeface="Arial" pitchFamily="34" charset="0"/>
-                <a:ea typeface="Arial" pitchFamily="34" charset="-122"/>
-                <a:cs typeface="Arial" pitchFamily="34" charset="-120"/>
-              </a:rPr>
-              <a:t>Warum baute Terraform in Station 5 nur einen neuen Server?</a:t>
-            </a:r>
-            <a:endParaRPr lang="en-US" sz="1150" dirty="0"/>
-          </a:p>
-        </p:txBody>
-      </p:sp>
-      <p:sp>
-        <p:nvSpPr>
-          <p:cNvPr id="15" name="Shape 13"/>
-          <p:cNvSpPr/>
-          <p:nvPr/>
-        </p:nvSpPr>
-        <p:spPr>
-          <a:xfrm>
-            <a:off x="438912" y="3273552"/>
-            <a:ext cx="8266176" cy="384048"/>
-          </a:xfrm>
-          <a:prstGeom prst="rect">
-            <a:avLst/>
-          </a:prstGeom>
-          <a:solidFill>
-            <a:srgbClr val="F5F6FC"/>
-          </a:solidFill>
-          <a:ln/>
-        </p:spPr>
-      </p:sp>
-      <p:sp>
-        <p:nvSpPr>
-          <p:cNvPr id="16" name="Text 14"/>
-          <p:cNvSpPr/>
-          <p:nvPr/>
-        </p:nvSpPr>
-        <p:spPr>
-          <a:xfrm>
-            <a:off x="566928" y="3273552"/>
-            <a:ext cx="548640" cy="384048"/>
-          </a:xfrm>
-          <a:prstGeom prst="rect">
-            <a:avLst/>
-          </a:prstGeom>
-          <a:noFill/>
-          <a:ln/>
-        </p:spPr>
-        <p:txBody>
-          <a:bodyPr wrap="square" lIns="0" tIns="0" rIns="0" bIns="0" rtlCol="0" anchor="ctr"/>
-          <a:lstStyle/>
-          <a:p>
-            <a:pPr indent="0" marL="0">
-              <a:buNone/>
-            </a:pPr>
-            <a:r>
-              <a:rPr lang="en-US" sz="1150" b="1" dirty="0">
-                <a:solidFill>
-                  <a:srgbClr val="9A6310"/>
-                </a:solidFill>
-                <a:latin typeface="Courier New" pitchFamily="34" charset="0"/>
-                <a:ea typeface="Courier New" pitchFamily="34" charset="-122"/>
-                <a:cs typeface="Courier New" pitchFamily="34" charset="-120"/>
-              </a:rPr>
-              <a:t>5</a:t>
-            </a:r>
-            <a:endParaRPr lang="en-US" sz="1150" dirty="0"/>
-          </a:p>
-        </p:txBody>
-      </p:sp>
-      <p:sp>
-        <p:nvSpPr>
-          <p:cNvPr id="17" name="Text 15"/>
-          <p:cNvSpPr/>
-          <p:nvPr/>
-        </p:nvSpPr>
-        <p:spPr>
-          <a:xfrm>
-            <a:off x="1115568" y="3273552"/>
-            <a:ext cx="7461504" cy="384048"/>
-          </a:xfrm>
-          <a:prstGeom prst="rect">
-            <a:avLst/>
-          </a:prstGeom>
-          <a:noFill/>
-          <a:ln/>
-        </p:spPr>
-        <p:txBody>
-          <a:bodyPr wrap="square" lIns="0" tIns="0" rIns="0" bIns="0" rtlCol="0" anchor="ctr"/>
-          <a:lstStyle/>
-          <a:p>
-            <a:pPr indent="0" marL="0">
-              <a:buNone/>
-            </a:pPr>
-            <a:r>
-              <a:rPr lang="en-US" sz="1150" dirty="0">
-                <a:solidFill>
-                  <a:srgbClr val="434A63"/>
-                </a:solidFill>
-                <a:latin typeface="Arial" pitchFamily="34" charset="0"/>
-                <a:ea typeface="Arial" pitchFamily="34" charset="-122"/>
-                <a:cs typeface="Arial" pitchFamily="34" charset="-120"/>
-              </a:rPr>
-              <a:t>Klicken oder Datei: Was würdet ihr im Betrieb nehmen? Warum?</a:t>
-            </a:r>
-            <a:endParaRPr lang="en-US" sz="1150" dirty="0"/>
-          </a:p>
-        </p:txBody>
-      </p:sp>
-      <p:sp>
-        <p:nvSpPr>
-          <p:cNvPr id="18" name="Shape 16"/>
-          <p:cNvSpPr/>
-          <p:nvPr/>
-        </p:nvSpPr>
-        <p:spPr>
-          <a:xfrm>
-            <a:off x="566928" y="4069080"/>
-            <a:ext cx="32004" cy="256032"/>
-          </a:xfrm>
-          <a:prstGeom prst="rect">
-            <a:avLst/>
-          </a:prstGeom>
-          <a:solidFill>
-            <a:srgbClr val="9A6310"/>
-          </a:solidFill>
-          <a:ln/>
-        </p:spPr>
-      </p:sp>
-      <p:sp>
-        <p:nvSpPr>
-          <p:cNvPr id="19" name="Text 17"/>
-          <p:cNvSpPr/>
-          <p:nvPr/>
-        </p:nvSpPr>
-        <p:spPr>
-          <a:xfrm>
-            <a:off x="749808" y="4023360"/>
-            <a:ext cx="7827264" cy="402336"/>
-          </a:xfrm>
-          <a:prstGeom prst="rect">
-            <a:avLst/>
-          </a:prstGeom>
-          <a:noFill/>
-          <a:ln/>
-        </p:spPr>
-        <p:txBody>
-          <a:bodyPr wrap="square" lIns="0" tIns="0" rIns="0" bIns="0" rtlCol="0" anchor="ctr"/>
-          <a:lstStyle/>
-          <a:p>
-            <a:pPr indent="0" marL="0">
-              <a:buNone/>
-            </a:pPr>
-            <a:r>
-              <a:rPr lang="en-US" sz="1200" b="1" dirty="0">
-                <a:solidFill>
-                  <a:srgbClr val="434A63"/>
-                </a:solidFill>
-                <a:latin typeface="Arial" pitchFamily="34" charset="0"/>
-                <a:ea typeface="Arial" pitchFamily="34" charset="-122"/>
-                <a:cs typeface="Arial" pitchFamily="34" charset="-120"/>
-              </a:rPr>
-              <a:t>Wir sammeln eure Antworten gemeinsam. Wer mag, zeigt dazu seinen Plan.</a:t>
-            </a:r>
-            <a:endParaRPr lang="en-US" sz="1200" dirty="0"/>
-          </a:p>
-        </p:txBody>
-      </p:sp>
-      <p:sp>
-        <p:nvSpPr>
-          <p:cNvPr id="20" name="Shape 18"/>
+      <p:pic>
+        <p:nvPicPr>
+          <p:cNvPr id="5" name="Image 0" descr="/Users/jacobmenge/Desktop/kurs-26.2b-orga/folienwerkstatt/assets/diagramme/iac-zielbild.png">    </p:cNvPr>
+          <p:cNvPicPr>
+            <a:picLocks noChangeAspect="1"/>
+          </p:cNvPicPr>
+          <p:nvPr/>
+        </p:nvPicPr>
+        <p:blipFill>
+          <a:blip r:embed="rId1"/>
+          <a:stretch>
+            <a:fillRect/>
+          </a:stretch>
+        </p:blipFill>
+        <p:spPr>
+          <a:xfrm>
+            <a:off x="566928" y="1316736"/>
+            <a:ext cx="8010144" cy="2798064"/>
+          </a:xfrm>
+          <a:prstGeom prst="rect">
+            <a:avLst/>
+          </a:prstGeom>
+        </p:spPr>
+      </p:pic>
+      <p:sp>
+        <p:nvSpPr>
+          <p:cNvPr id="6" name="Shape 3"/>
           <p:cNvSpPr/>
           <p:nvPr/>
         </p:nvSpPr>
@@ -9437,7 +8358,7 @@
       </p:sp>
       <p:sp>
         <p:nvSpPr>
-          <p:cNvPr id="21" name="Text 19"/>
+          <p:cNvPr id="7" name="Text 4"/>
           <p:cNvSpPr/>
           <p:nvPr/>
         </p:nvSpPr>
@@ -9468,7 +8389,7 @@
                 <a:ea typeface="Arial" pitchFamily="34" charset="-122"/>
                 <a:cs typeface="Arial" pitchFamily="34" charset="-120"/>
               </a:rPr>
-              <a:t>Auswertung</a:t>
+              <a:t>Praxiszeit</a:t>
             </a:r>
             <a:endParaRPr lang="en-US" sz="1050" dirty="0"/>
           </a:p>
@@ -9476,7 +8397,7 @@
       </p:sp>
       <p:sp>
         <p:nvSpPr>
-          <p:cNvPr id="22" name="Text 20"/>
+          <p:cNvPr id="8" name="Text 5"/>
           <p:cNvSpPr/>
           <p:nvPr/>
         </p:nvSpPr>
@@ -9507,7 +8428,7 @@
                 <a:ea typeface="Arial" pitchFamily="34" charset="-122"/>
                 <a:cs typeface="Arial" pitchFamily="34" charset="-120"/>
               </a:rPr>
-              <a:t>19/24</a:t>
+              <a:t>19/27</a:t>
             </a:r>
             <a:endParaRPr lang="en-US" sz="1050" dirty="0"/>
           </a:p>
@@ -9598,7 +8519,7 @@
                 <a:ea typeface="Arial" pitchFamily="34" charset="-122"/>
                 <a:cs typeface="Arial" pitchFamily="34" charset="-120"/>
               </a:rPr>
-              <a:t>DER ERSTE SERVER AUS EINER DATEI</a:t>
+              <a:t>PRAXISZEIT · 19:15 BIS 20:25</a:t>
             </a:r>
             <a:endParaRPr lang="en-US" sz="1150" dirty="0"/>
           </a:p>
@@ -9637,39 +8558,713 @@
                 <a:ea typeface="Arial" pitchFamily="34" charset="-122"/>
                 <a:cs typeface="Arial" pitchFamily="34" charset="-120"/>
               </a:rPr>
-              <a:t>Station 2 · Lösung</a:t>
+              <a:t>So läuft die Praxiszeit</a:t>
             </a:r>
             <a:endParaRPr lang="en-US" sz="2600" dirty="0"/>
           </a:p>
         </p:txBody>
       </p:sp>
-      <p:pic>
-        <p:nvPicPr>
-          <p:cNvPr id="5" name="Image 0" descr="/Users/jacobmenge/Desktop/kurs-26.2b-orga/folienwerkstatt/assets/diagramme/iac-loesung-erster.png">    </p:cNvPr>
-          <p:cNvPicPr>
-            <a:picLocks noChangeAspect="1"/>
-          </p:cNvPicPr>
-          <p:nvPr/>
-        </p:nvPicPr>
-        <p:blipFill>
-          <a:blip r:embed="rId1"/>
-          <a:stretch>
-            <a:fillRect/>
-          </a:stretch>
-        </p:blipFill>
-        <p:spPr>
-          <a:xfrm>
-            <a:off x="566928" y="1335024"/>
-            <a:ext cx="8010144" cy="2651760"/>
-          </a:xfrm>
-          <a:prstGeom prst="rect">
-            <a:avLst/>
-          </a:prstGeom>
-        </p:spPr>
-      </p:pic>
-      <p:sp>
-        <p:nvSpPr>
-          <p:cNvPr id="6" name="Shape 3"/>
+      <p:sp>
+        <p:nvSpPr>
+          <p:cNvPr id="5" name="Shape 3"/>
+          <p:cNvSpPr/>
+          <p:nvPr/>
+        </p:nvSpPr>
+        <p:spPr>
+          <a:xfrm>
+            <a:off x="438912" y="1536192"/>
+            <a:ext cx="8266176" cy="256032"/>
+          </a:xfrm>
+          <a:prstGeom prst="rect">
+            <a:avLst/>
+          </a:prstGeom>
+          <a:solidFill>
+            <a:srgbClr val="F5F6FC"/>
+          </a:solidFill>
+          <a:ln/>
+        </p:spPr>
+      </p:sp>
+      <p:sp>
+        <p:nvSpPr>
+          <p:cNvPr id="6" name="Text 4"/>
+          <p:cNvSpPr/>
+          <p:nvPr/>
+        </p:nvSpPr>
+        <p:spPr>
+          <a:xfrm>
+            <a:off x="566928" y="1536192"/>
+            <a:ext cx="1097280" cy="256032"/>
+          </a:xfrm>
+          <a:prstGeom prst="rect">
+            <a:avLst/>
+          </a:prstGeom>
+          <a:noFill/>
+          <a:ln/>
+        </p:spPr>
+        <p:txBody>
+          <a:bodyPr wrap="square" lIns="0" tIns="0" rIns="0" bIns="0" rtlCol="0" anchor="ctr"/>
+          <a:lstStyle/>
+          <a:p>
+            <a:pPr indent="0" marL="0">
+              <a:buNone/>
+            </a:pPr>
+            <a:r>
+              <a:rPr lang="en-US" sz="1050" b="1" dirty="0">
+                <a:solidFill>
+                  <a:srgbClr val="9A6310"/>
+                </a:solidFill>
+                <a:latin typeface="Courier New" pitchFamily="34" charset="0"/>
+                <a:ea typeface="Courier New" pitchFamily="34" charset="-122"/>
+                <a:cs typeface="Courier New" pitchFamily="34" charset="-120"/>
+              </a:rPr>
+              <a:t>Station 1</a:t>
+            </a:r>
+            <a:endParaRPr lang="en-US" sz="1050" dirty="0"/>
+          </a:p>
+        </p:txBody>
+      </p:sp>
+      <p:sp>
+        <p:nvSpPr>
+          <p:cNvPr id="7" name="Text 5"/>
+          <p:cNvSpPr/>
+          <p:nvPr/>
+        </p:nvSpPr>
+        <p:spPr>
+          <a:xfrm>
+            <a:off x="1664208" y="1536192"/>
+            <a:ext cx="6912864" cy="256032"/>
+          </a:xfrm>
+          <a:prstGeom prst="rect">
+            <a:avLst/>
+          </a:prstGeom>
+          <a:noFill/>
+          <a:ln/>
+        </p:spPr>
+        <p:txBody>
+          <a:bodyPr wrap="square" lIns="0" tIns="0" rIns="0" bIns="0" rtlCol="0" anchor="ctr"/>
+          <a:lstStyle/>
+          <a:p>
+            <a:pPr indent="0" marL="0">
+              <a:buNone/>
+            </a:pPr>
+            <a:r>
+              <a:rPr lang="en-US" sz="1050" dirty="0">
+                <a:solidFill>
+                  <a:srgbClr val="434A63"/>
+                </a:solidFill>
+                <a:latin typeface="Arial" pitchFamily="34" charset="0"/>
+                <a:ea typeface="Arial" pitchFamily="34" charset="-122"/>
+                <a:cs typeface="Arial" pitchFamily="34" charset="-120"/>
+              </a:rPr>
+              <a:t>Sandbox starten, CloudShell öffnen, Terraform einrichten · 10 Min.</a:t>
+            </a:r>
+            <a:endParaRPr lang="en-US" sz="1050" dirty="0"/>
+          </a:p>
+        </p:txBody>
+      </p:sp>
+      <p:sp>
+        <p:nvSpPr>
+          <p:cNvPr id="8" name="Text 6"/>
+          <p:cNvSpPr/>
+          <p:nvPr/>
+        </p:nvSpPr>
+        <p:spPr>
+          <a:xfrm>
+            <a:off x="566928" y="1792224"/>
+            <a:ext cx="1097280" cy="256032"/>
+          </a:xfrm>
+          <a:prstGeom prst="rect">
+            <a:avLst/>
+          </a:prstGeom>
+          <a:noFill/>
+          <a:ln/>
+        </p:spPr>
+        <p:txBody>
+          <a:bodyPr wrap="square" lIns="0" tIns="0" rIns="0" bIns="0" rtlCol="0" anchor="ctr"/>
+          <a:lstStyle/>
+          <a:p>
+            <a:pPr indent="0" marL="0">
+              <a:buNone/>
+            </a:pPr>
+            <a:r>
+              <a:rPr lang="en-US" sz="1050" b="1" dirty="0">
+                <a:solidFill>
+                  <a:srgbClr val="9A6310"/>
+                </a:solidFill>
+                <a:latin typeface="Courier New" pitchFamily="34" charset="0"/>
+                <a:ea typeface="Courier New" pitchFamily="34" charset="-122"/>
+                <a:cs typeface="Courier New" pitchFamily="34" charset="-120"/>
+              </a:rPr>
+              <a:t>Station 2</a:t>
+            </a:r>
+            <a:endParaRPr lang="en-US" sz="1050" dirty="0"/>
+          </a:p>
+        </p:txBody>
+      </p:sp>
+      <p:sp>
+        <p:nvSpPr>
+          <p:cNvPr id="9" name="Text 7"/>
+          <p:cNvSpPr/>
+          <p:nvPr/>
+        </p:nvSpPr>
+        <p:spPr>
+          <a:xfrm>
+            <a:off x="1664208" y="1792224"/>
+            <a:ext cx="6912864" cy="256032"/>
+          </a:xfrm>
+          <a:prstGeom prst="rect">
+            <a:avLst/>
+          </a:prstGeom>
+          <a:noFill/>
+          <a:ln/>
+        </p:spPr>
+        <p:txBody>
+          <a:bodyPr wrap="square" lIns="0" tIns="0" rIns="0" bIns="0" rtlCol="0" anchor="ctr"/>
+          <a:lstStyle/>
+          <a:p>
+            <a:pPr indent="0" marL="0">
+              <a:buNone/>
+            </a:pPr>
+            <a:r>
+              <a:rPr lang="en-US" sz="1050" dirty="0">
+                <a:solidFill>
+                  <a:srgbClr val="434A63"/>
+                </a:solidFill>
+                <a:latin typeface="Arial" pitchFamily="34" charset="0"/>
+                <a:ea typeface="Arial" pitchFamily="34" charset="-122"/>
+                <a:cs typeface="Arial" pitchFamily="34" charset="-120"/>
+              </a:rPr>
+              <a:t>Der erste Server aus einer Datei · 15 Min.</a:t>
+            </a:r>
+            <a:endParaRPr lang="en-US" sz="1050" dirty="0"/>
+          </a:p>
+        </p:txBody>
+      </p:sp>
+      <p:sp>
+        <p:nvSpPr>
+          <p:cNvPr id="10" name="Shape 8"/>
+          <p:cNvSpPr/>
+          <p:nvPr/>
+        </p:nvSpPr>
+        <p:spPr>
+          <a:xfrm>
+            <a:off x="438912" y="2048256"/>
+            <a:ext cx="8266176" cy="256032"/>
+          </a:xfrm>
+          <a:prstGeom prst="rect">
+            <a:avLst/>
+          </a:prstGeom>
+          <a:solidFill>
+            <a:srgbClr val="F5F6FC"/>
+          </a:solidFill>
+          <a:ln/>
+        </p:spPr>
+      </p:sp>
+      <p:sp>
+        <p:nvSpPr>
+          <p:cNvPr id="11" name="Text 9"/>
+          <p:cNvSpPr/>
+          <p:nvPr/>
+        </p:nvSpPr>
+        <p:spPr>
+          <a:xfrm>
+            <a:off x="566928" y="2048256"/>
+            <a:ext cx="1097280" cy="256032"/>
+          </a:xfrm>
+          <a:prstGeom prst="rect">
+            <a:avLst/>
+          </a:prstGeom>
+          <a:noFill/>
+          <a:ln/>
+        </p:spPr>
+        <p:txBody>
+          <a:bodyPr wrap="square" lIns="0" tIns="0" rIns="0" bIns="0" rtlCol="0" anchor="ctr"/>
+          <a:lstStyle/>
+          <a:p>
+            <a:pPr indent="0" marL="0">
+              <a:buNone/>
+            </a:pPr>
+            <a:r>
+              <a:rPr lang="en-US" sz="1050" b="1" dirty="0">
+                <a:solidFill>
+                  <a:srgbClr val="9A6310"/>
+                </a:solidFill>
+                <a:latin typeface="Courier New" pitchFamily="34" charset="0"/>
+                <a:ea typeface="Courier New" pitchFamily="34" charset="-122"/>
+                <a:cs typeface="Courier New" pitchFamily="34" charset="-120"/>
+              </a:rPr>
+              <a:t>Station 3</a:t>
+            </a:r>
+            <a:endParaRPr lang="en-US" sz="1050" dirty="0"/>
+          </a:p>
+        </p:txBody>
+      </p:sp>
+      <p:sp>
+        <p:nvSpPr>
+          <p:cNvPr id="12" name="Text 10"/>
+          <p:cNvSpPr/>
+          <p:nvPr/>
+        </p:nvSpPr>
+        <p:spPr>
+          <a:xfrm>
+            <a:off x="1664208" y="2048256"/>
+            <a:ext cx="6912864" cy="256032"/>
+          </a:xfrm>
+          <a:prstGeom prst="rect">
+            <a:avLst/>
+          </a:prstGeom>
+          <a:noFill/>
+          <a:ln/>
+        </p:spPr>
+        <p:txBody>
+          <a:bodyPr wrap="square" lIns="0" tIns="0" rIns="0" bIns="0" rtlCol="0" anchor="ctr"/>
+          <a:lstStyle/>
+          <a:p>
+            <a:pPr indent="0" marL="0">
+              <a:buNone/>
+            </a:pPr>
+            <a:r>
+              <a:rPr lang="en-US" sz="1050" dirty="0">
+                <a:solidFill>
+                  <a:srgbClr val="434A63"/>
+                </a:solidFill>
+                <a:latin typeface="Arial" pitchFamily="34" charset="0"/>
+                <a:ea typeface="Arial" pitchFamily="34" charset="-122"/>
+                <a:cs typeface="Arial" pitchFamily="34" charset="-120"/>
+              </a:rPr>
+              <a:t>Ändern oder ersetzen? Erst vorhersagen, dann apply · 15 Min.</a:t>
+            </a:r>
+            <a:endParaRPr lang="en-US" sz="1050" dirty="0"/>
+          </a:p>
+        </p:txBody>
+      </p:sp>
+      <p:sp>
+        <p:nvSpPr>
+          <p:cNvPr id="13" name="Text 11"/>
+          <p:cNvSpPr/>
+          <p:nvPr/>
+        </p:nvSpPr>
+        <p:spPr>
+          <a:xfrm>
+            <a:off x="566928" y="2304288"/>
+            <a:ext cx="1097280" cy="256032"/>
+          </a:xfrm>
+          <a:prstGeom prst="rect">
+            <a:avLst/>
+          </a:prstGeom>
+          <a:noFill/>
+          <a:ln/>
+        </p:spPr>
+        <p:txBody>
+          <a:bodyPr wrap="square" lIns="0" tIns="0" rIns="0" bIns="0" rtlCol="0" anchor="ctr"/>
+          <a:lstStyle/>
+          <a:p>
+            <a:pPr indent="0" marL="0">
+              <a:buNone/>
+            </a:pPr>
+            <a:r>
+              <a:rPr lang="en-US" sz="1050" b="1" dirty="0">
+                <a:solidFill>
+                  <a:srgbClr val="9A6310"/>
+                </a:solidFill>
+                <a:latin typeface="Courier New" pitchFamily="34" charset="0"/>
+                <a:ea typeface="Courier New" pitchFamily="34" charset="-122"/>
+                <a:cs typeface="Courier New" pitchFamily="34" charset="-120"/>
+              </a:rPr>
+              <a:t>Station 4</a:t>
+            </a:r>
+            <a:endParaRPr lang="en-US" sz="1050" dirty="0"/>
+          </a:p>
+        </p:txBody>
+      </p:sp>
+      <p:sp>
+        <p:nvSpPr>
+          <p:cNvPr id="14" name="Text 12"/>
+          <p:cNvSpPr/>
+          <p:nvPr/>
+        </p:nvSpPr>
+        <p:spPr>
+          <a:xfrm>
+            <a:off x="1664208" y="2304288"/>
+            <a:ext cx="6912864" cy="256032"/>
+          </a:xfrm>
+          <a:prstGeom prst="rect">
+            <a:avLst/>
+          </a:prstGeom>
+          <a:noFill/>
+          <a:ln/>
+        </p:spPr>
+        <p:txBody>
+          <a:bodyPr wrap="square" lIns="0" tIns="0" rIns="0" bIns="0" rtlCol="0" anchor="ctr"/>
+          <a:lstStyle/>
+          <a:p>
+            <a:pPr indent="0" marL="0">
+              <a:buNone/>
+            </a:pPr>
+            <a:r>
+              <a:rPr lang="en-US" sz="1050" dirty="0">
+                <a:solidFill>
+                  <a:srgbClr val="434A63"/>
+                </a:solidFill>
+                <a:latin typeface="Arial" pitchFamily="34" charset="0"/>
+                <a:ea typeface="Arial" pitchFamily="34" charset="-122"/>
+                <a:cs typeface="Arial" pitchFamily="34" charset="-120"/>
+              </a:rPr>
+              <a:t>Jemand hat geklickt: die Änderung in der Konsole aufdecken · 8 Min.</a:t>
+            </a:r>
+            <a:endParaRPr lang="en-US" sz="1050" dirty="0"/>
+          </a:p>
+        </p:txBody>
+      </p:sp>
+      <p:sp>
+        <p:nvSpPr>
+          <p:cNvPr id="15" name="Shape 13"/>
+          <p:cNvSpPr/>
+          <p:nvPr/>
+        </p:nvSpPr>
+        <p:spPr>
+          <a:xfrm>
+            <a:off x="438912" y="2560320"/>
+            <a:ext cx="8266176" cy="256032"/>
+          </a:xfrm>
+          <a:prstGeom prst="rect">
+            <a:avLst/>
+          </a:prstGeom>
+          <a:solidFill>
+            <a:srgbClr val="F5F6FC"/>
+          </a:solidFill>
+          <a:ln/>
+        </p:spPr>
+      </p:sp>
+      <p:sp>
+        <p:nvSpPr>
+          <p:cNvPr id="16" name="Text 14"/>
+          <p:cNvSpPr/>
+          <p:nvPr/>
+        </p:nvSpPr>
+        <p:spPr>
+          <a:xfrm>
+            <a:off x="566928" y="2560320"/>
+            <a:ext cx="1097280" cy="256032"/>
+          </a:xfrm>
+          <a:prstGeom prst="rect">
+            <a:avLst/>
+          </a:prstGeom>
+          <a:noFill/>
+          <a:ln/>
+        </p:spPr>
+        <p:txBody>
+          <a:bodyPr wrap="square" lIns="0" tIns="0" rIns="0" bIns="0" rtlCol="0" anchor="ctr"/>
+          <a:lstStyle/>
+          <a:p>
+            <a:pPr indent="0" marL="0">
+              <a:buNone/>
+            </a:pPr>
+            <a:r>
+              <a:rPr lang="en-US" sz="1050" b="1" dirty="0">
+                <a:solidFill>
+                  <a:srgbClr val="9A6310"/>
+                </a:solidFill>
+                <a:latin typeface="Courier New" pitchFamily="34" charset="0"/>
+                <a:ea typeface="Courier New" pitchFamily="34" charset="-122"/>
+                <a:cs typeface="Courier New" pitchFamily="34" charset="-120"/>
+              </a:rPr>
+              <a:t>Station 5</a:t>
+            </a:r>
+            <a:endParaRPr lang="en-US" sz="1050" dirty="0"/>
+          </a:p>
+        </p:txBody>
+      </p:sp>
+      <p:sp>
+        <p:nvSpPr>
+          <p:cNvPr id="17" name="Text 15"/>
+          <p:cNvSpPr/>
+          <p:nvPr/>
+        </p:nvSpPr>
+        <p:spPr>
+          <a:xfrm>
+            <a:off x="1664208" y="2560320"/>
+            <a:ext cx="6912864" cy="256032"/>
+          </a:xfrm>
+          <a:prstGeom prst="rect">
+            <a:avLst/>
+          </a:prstGeom>
+          <a:noFill/>
+          <a:ln/>
+        </p:spPr>
+        <p:txBody>
+          <a:bodyPr wrap="square" lIns="0" tIns="0" rIns="0" bIns="0" rtlCol="0" anchor="ctr"/>
+          <a:lstStyle/>
+          <a:p>
+            <a:pPr indent="0" marL="0">
+              <a:buNone/>
+            </a:pPr>
+            <a:r>
+              <a:rPr lang="en-US" sz="1050" dirty="0">
+                <a:solidFill>
+                  <a:srgbClr val="434A63"/>
+                </a:solidFill>
+                <a:latin typeface="Arial" pitchFamily="34" charset="0"/>
+                <a:ea typeface="Arial" pitchFamily="34" charset="-122"/>
+                <a:cs typeface="Arial" pitchFamily="34" charset="-120"/>
+              </a:rPr>
+              <a:t>Aus einem Server werden zwei: eine Zahl ändern · 10 Min.</a:t>
+            </a:r>
+            <a:endParaRPr lang="en-US" sz="1050" dirty="0"/>
+          </a:p>
+        </p:txBody>
+      </p:sp>
+      <p:sp>
+        <p:nvSpPr>
+          <p:cNvPr id="18" name="Text 16"/>
+          <p:cNvSpPr/>
+          <p:nvPr/>
+        </p:nvSpPr>
+        <p:spPr>
+          <a:xfrm>
+            <a:off x="566928" y="2816352"/>
+            <a:ext cx="1097280" cy="256032"/>
+          </a:xfrm>
+          <a:prstGeom prst="rect">
+            <a:avLst/>
+          </a:prstGeom>
+          <a:noFill/>
+          <a:ln/>
+        </p:spPr>
+        <p:txBody>
+          <a:bodyPr wrap="square" lIns="0" tIns="0" rIns="0" bIns="0" rtlCol="0" anchor="ctr"/>
+          <a:lstStyle/>
+          <a:p>
+            <a:pPr indent="0" marL="0">
+              <a:buNone/>
+            </a:pPr>
+            <a:r>
+              <a:rPr lang="en-US" sz="1050" b="1" dirty="0">
+                <a:solidFill>
+                  <a:srgbClr val="9A6310"/>
+                </a:solidFill>
+                <a:latin typeface="Courier New" pitchFamily="34" charset="0"/>
+                <a:ea typeface="Courier New" pitchFamily="34" charset="-122"/>
+                <a:cs typeface="Courier New" pitchFamily="34" charset="-120"/>
+              </a:rPr>
+              <a:t>Station 6</a:t>
+            </a:r>
+            <a:endParaRPr lang="en-US" sz="1050" dirty="0"/>
+          </a:p>
+        </p:txBody>
+      </p:sp>
+      <p:sp>
+        <p:nvSpPr>
+          <p:cNvPr id="19" name="Text 17"/>
+          <p:cNvSpPr/>
+          <p:nvPr/>
+        </p:nvSpPr>
+        <p:spPr>
+          <a:xfrm>
+            <a:off x="1664208" y="2816352"/>
+            <a:ext cx="6912864" cy="256032"/>
+          </a:xfrm>
+          <a:prstGeom prst="rect">
+            <a:avLst/>
+          </a:prstGeom>
+          <a:noFill/>
+          <a:ln/>
+        </p:spPr>
+        <p:txBody>
+          <a:bodyPr wrap="square" lIns="0" tIns="0" rIns="0" bIns="0" rtlCol="0" anchor="ctr"/>
+          <a:lstStyle/>
+          <a:p>
+            <a:pPr indent="0" marL="0">
+              <a:buNone/>
+            </a:pPr>
+            <a:r>
+              <a:rPr lang="en-US" sz="1050" dirty="0">
+                <a:solidFill>
+                  <a:srgbClr val="434A63"/>
+                </a:solidFill>
+                <a:latin typeface="Arial" pitchFamily="34" charset="0"/>
+                <a:ea typeface="Arial" pitchFamily="34" charset="-122"/>
+                <a:cs typeface="Arial" pitchFamily="34" charset="-120"/>
+              </a:rPr>
+              <a:t>Mit destroy aufräumen, spätestens um 20:20 Uhr · 5 Min.</a:t>
+            </a:r>
+            <a:endParaRPr lang="en-US" sz="1050" dirty="0"/>
+          </a:p>
+        </p:txBody>
+      </p:sp>
+      <p:sp>
+        <p:nvSpPr>
+          <p:cNvPr id="20" name="Shape 18"/>
+          <p:cNvSpPr/>
+          <p:nvPr/>
+        </p:nvSpPr>
+        <p:spPr>
+          <a:xfrm>
+            <a:off x="566928" y="3200400"/>
+            <a:ext cx="8010144" cy="1243584"/>
+          </a:xfrm>
+          <a:prstGeom prst="rect">
+            <a:avLst/>
+          </a:prstGeom>
+          <a:solidFill>
+            <a:srgbClr val="EEF0FB"/>
+          </a:solidFill>
+          <a:ln/>
+        </p:spPr>
+      </p:sp>
+      <p:sp>
+        <p:nvSpPr>
+          <p:cNvPr id="21" name="Shape 19"/>
+          <p:cNvSpPr/>
+          <p:nvPr/>
+        </p:nvSpPr>
+        <p:spPr>
+          <a:xfrm>
+            <a:off x="566928" y="3200400"/>
+            <a:ext cx="41148" cy="1243584"/>
+          </a:xfrm>
+          <a:prstGeom prst="rect">
+            <a:avLst/>
+          </a:prstGeom>
+          <a:solidFill>
+            <a:srgbClr val="9A6310"/>
+          </a:solidFill>
+          <a:ln/>
+        </p:spPr>
+      </p:sp>
+      <p:sp>
+        <p:nvSpPr>
+          <p:cNvPr id="22" name="Text 20"/>
+          <p:cNvSpPr/>
+          <p:nvPr/>
+        </p:nvSpPr>
+        <p:spPr>
+          <a:xfrm>
+            <a:off x="804672" y="3346704"/>
+            <a:ext cx="7607808" cy="242062"/>
+          </a:xfrm>
+          <a:prstGeom prst="rect">
+            <a:avLst/>
+          </a:prstGeom>
+          <a:noFill/>
+          <a:ln/>
+        </p:spPr>
+        <p:txBody>
+          <a:bodyPr wrap="square" lIns="0" tIns="0" rIns="0" bIns="0" rtlCol="0" anchor="t"/>
+          <a:lstStyle/>
+          <a:p>
+            <a:pPr indent="0" marL="0">
+              <a:buNone/>
+            </a:pPr>
+            <a:r>
+              <a:rPr lang="en-US" sz="1300" b="1" dirty="0">
+                <a:solidFill>
+                  <a:srgbClr val="272E52"/>
+                </a:solidFill>
+                <a:latin typeface="Arial" pitchFamily="34" charset="0"/>
+                <a:ea typeface="Arial" pitchFamily="34" charset="-122"/>
+                <a:cs typeface="Arial" pitchFamily="34" charset="-120"/>
+              </a:rPr>
+              <a:t>Jetzt öffnen, alles steht auf der Kursseite</a:t>
+            </a:r>
+            <a:endParaRPr lang="en-US" sz="1300" dirty="0"/>
+          </a:p>
+        </p:txBody>
+      </p:sp>
+      <p:sp>
+        <p:nvSpPr>
+          <p:cNvPr id="23" name="Text 21"/>
+          <p:cNvSpPr/>
+          <p:nvPr/>
+        </p:nvSpPr>
+        <p:spPr>
+          <a:xfrm>
+            <a:off x="804672" y="3634486"/>
+            <a:ext cx="7607808" cy="690626"/>
+          </a:xfrm>
+          <a:prstGeom prst="rect">
+            <a:avLst/>
+          </a:prstGeom>
+          <a:noFill/>
+          <a:ln/>
+        </p:spPr>
+        <p:txBody>
+          <a:bodyPr wrap="square" lIns="0" tIns="0" rIns="0" bIns="0" rtlCol="0" anchor="t"/>
+          <a:lstStyle/>
+          <a:p>
+            <a:pPr indent="0" marL="0">
+              <a:lnSpc>
+                <a:spcPct val="92000"/>
+              </a:lnSpc>
+              <a:spcAft>
+                <a:spcPts val="500"/>
+              </a:spcAft>
+              <a:buNone/>
+            </a:pPr>
+            <a:r>
+              <a:rPr lang="en-US" sz="1000" dirty="0">
+                <a:solidFill>
+                  <a:srgbClr val="434A63"/>
+                </a:solidFill>
+                <a:latin typeface="Arial" pitchFamily="34" charset="0"/>
+                <a:ea typeface="Arial" pitchFamily="34" charset="-122"/>
+                <a:cs typeface="Arial" pitchFamily="34" charset="-120"/>
+              </a:rPr>
+              <a:t>Übung:  jacobmenge.github.io/kurs-unterlagen/infrastruktur-planung/praxis-terraform/</a:t>
+            </a:r>
+            <a:endParaRPr lang="en-US" sz="1000" dirty="0"/>
+          </a:p>
+          <a:p>
+            <a:pPr indent="0" marL="0">
+              <a:lnSpc>
+                <a:spcPct val="92000"/>
+              </a:lnSpc>
+              <a:spcAft>
+                <a:spcPts val="500"/>
+              </a:spcAft>
+              <a:buNone/>
+            </a:pPr>
+            <a:r>
+              <a:rPr lang="en-US" sz="1000" dirty="0">
+                <a:solidFill>
+                  <a:srgbClr val="434A63"/>
+                </a:solidFill>
+                <a:latin typeface="Arial" pitchFamily="34" charset="0"/>
+                <a:ea typeface="Arial" pitchFamily="34" charset="-122"/>
+                <a:cs typeface="Arial" pitchFamily="34" charset="-120"/>
+              </a:rPr>
+              <a:t>Theorie:  jacobmenge.github.io/kurs-unterlagen/infrastruktur-planung/infrastruktur-als-code/</a:t>
+            </a:r>
+            <a:endParaRPr lang="en-US" sz="1000" dirty="0"/>
+          </a:p>
+          <a:p>
+            <a:pPr indent="0" marL="0">
+              <a:lnSpc>
+                <a:spcPct val="92000"/>
+              </a:lnSpc>
+              <a:spcAft>
+                <a:spcPts val="500"/>
+              </a:spcAft>
+              <a:buNone/>
+            </a:pPr>
+            <a:r>
+              <a:rPr lang="en-US" sz="1000" dirty="0">
+                <a:solidFill>
+                  <a:srgbClr val="434A63"/>
+                </a:solidFill>
+                <a:latin typeface="Arial" pitchFamily="34" charset="0"/>
+                <a:ea typeface="Arial" pitchFamily="34" charset="-122"/>
+                <a:cs typeface="Arial" pitchFamily="34" charset="-120"/>
+              </a:rPr>
+              <a:t>Bonus vor Station 6. Um 20:25 Uhr sind alle zurück.</a:t>
+            </a:r>
+            <a:endParaRPr lang="en-US" sz="1000" dirty="0"/>
+          </a:p>
+        </p:txBody>
+      </p:sp>
+      <p:sp>
+        <p:nvSpPr>
+          <p:cNvPr id="24" name="Shape 22"/>
           <p:cNvSpPr/>
           <p:nvPr/>
         </p:nvSpPr>
@@ -9692,7 +9287,7 @@
       </p:sp>
       <p:sp>
         <p:nvSpPr>
-          <p:cNvPr id="7" name="Text 4"/>
+          <p:cNvPr id="25" name="Text 23"/>
           <p:cNvSpPr/>
           <p:nvPr/>
         </p:nvSpPr>
@@ -9723,7 +9318,7 @@
                 <a:ea typeface="Arial" pitchFamily="34" charset="-122"/>
                 <a:cs typeface="Arial" pitchFamily="34" charset="-120"/>
               </a:rPr>
-              <a:t>Auswertung</a:t>
+              <a:t>Praxiszeit</a:t>
             </a:r>
             <a:endParaRPr lang="en-US" sz="1050" dirty="0"/>
           </a:p>
@@ -9731,7 +9326,7 @@
       </p:sp>
       <p:sp>
         <p:nvSpPr>
-          <p:cNvPr id="8" name="Text 5"/>
+          <p:cNvPr id="26" name="Text 24"/>
           <p:cNvSpPr/>
           <p:nvPr/>
         </p:nvSpPr>
@@ -9762,7 +9357,7 @@
                 <a:ea typeface="Arial" pitchFamily="34" charset="-122"/>
                 <a:cs typeface="Arial" pitchFamily="34" charset="-120"/>
               </a:rPr>
-              <a:t>20/24</a:t>
+              <a:t>20/27</a:t>
             </a:r>
             <a:endParaRPr lang="en-US" sz="1050" dirty="0"/>
           </a:p>
@@ -9853,7 +9448,7 @@
                 <a:ea typeface="Arial" pitchFamily="34" charset="-122"/>
                 <a:cs typeface="Arial" pitchFamily="34" charset="-120"/>
               </a:rPr>
-              <a:t>ÄNDERN ODER ERSETZEN?</a:t>
+              <a:t>SO ARBEITET IHR HEUTE</a:t>
             </a:r>
             <a:endParaRPr lang="en-US" sz="1150" dirty="0"/>
           </a:p>
@@ -9892,39 +9487,226 @@
                 <a:ea typeface="Arial" pitchFamily="34" charset="-122"/>
                 <a:cs typeface="Arial" pitchFamily="34" charset="-120"/>
               </a:rPr>
-              <a:t>Station 3 · Lösung</a:t>
+              <a:t>Spielregeln</a:t>
             </a:r>
             <a:endParaRPr lang="en-US" sz="2600" dirty="0"/>
           </a:p>
         </p:txBody>
       </p:sp>
-      <p:pic>
-        <p:nvPicPr>
-          <p:cNvPr id="5" name="Image 0" descr="/Users/jacobmenge/Desktop/kurs-26.2b-orga/folienwerkstatt/assets/diagramme/iac-loesung-aendern.png">    </p:cNvPr>
-          <p:cNvPicPr>
-            <a:picLocks noChangeAspect="1"/>
-          </p:cNvPicPr>
-          <p:nvPr/>
-        </p:nvPicPr>
-        <p:blipFill>
-          <a:blip r:embed="rId1"/>
-          <a:stretch>
-            <a:fillRect/>
-          </a:stretch>
-        </p:blipFill>
-        <p:spPr>
-          <a:xfrm>
-            <a:off x="566928" y="1316736"/>
-            <a:ext cx="8010144" cy="2798064"/>
-          </a:xfrm>
-          <a:prstGeom prst="rect">
-            <a:avLst/>
-          </a:prstGeom>
-        </p:spPr>
-      </p:pic>
-      <p:sp>
-        <p:nvSpPr>
-          <p:cNvPr id="6" name="Shape 3"/>
+      <p:sp>
+        <p:nvSpPr>
+          <p:cNvPr id="5" name="Text 3"/>
+          <p:cNvSpPr/>
+          <p:nvPr/>
+        </p:nvSpPr>
+        <p:spPr>
+          <a:xfrm>
+            <a:off x="566928" y="1572768"/>
+            <a:ext cx="8010144" cy="3017520"/>
+          </a:xfrm>
+          <a:prstGeom prst="rect">
+            <a:avLst/>
+          </a:prstGeom>
+          <a:noFill/>
+          <a:ln/>
+        </p:spPr>
+        <p:txBody>
+          <a:bodyPr wrap="square" lIns="0" tIns="0" rIns="0" bIns="0" rtlCol="0" anchor="t"/>
+          <a:lstStyle/>
+          <a:p>
+            <a:pPr marL="254000" indent="-254000">
+              <a:lnSpc>
+                <a:spcPct val="100000"/>
+              </a:lnSpc>
+              <a:spcAft>
+                <a:spcPts val="900"/>
+              </a:spcAft>
+              <a:buClr>
+                <a:srgbClr val="9A6310"/>
+              </a:buClr>
+              <a:buSzPct val="100000"/>
+              <a:buChar char="▸"/>
+            </a:pPr>
+            <a:r>
+              <a:rPr lang="en-US" sz="1150" dirty="0">
+                <a:solidFill>
+                  <a:srgbClr val="434A63"/>
+                </a:solidFill>
+                <a:latin typeface="Arial" pitchFamily="34" charset="0"/>
+                <a:ea typeface="Arial" pitchFamily="34" charset="-122"/>
+                <a:cs typeface="Arial" pitchFamily="34" charset="-120"/>
+              </a:rPr>
+              <a:t>Ihr arbeitet heute jede und jeder für sich, jeweils in der eigenen Sandbox.</a:t>
+            </a:r>
+            <a:endParaRPr lang="en-US" sz="1150" dirty="0"/>
+          </a:p>
+          <a:p>
+            <a:pPr marL="254000" indent="-254000">
+              <a:lnSpc>
+                <a:spcPct val="100000"/>
+              </a:lnSpc>
+              <a:spcAft>
+                <a:spcPts val="900"/>
+              </a:spcAft>
+              <a:buClr>
+                <a:srgbClr val="9A6310"/>
+              </a:buClr>
+              <a:buSzPct val="100000"/>
+              <a:buChar char="▸"/>
+            </a:pPr>
+            <a:r>
+              <a:rPr lang="en-US" sz="1150" dirty="0">
+                <a:solidFill>
+                  <a:srgbClr val="434A63"/>
+                </a:solidFill>
+                <a:latin typeface="Arial" pitchFamily="34" charset="0"/>
+                <a:ea typeface="Arial" pitchFamily="34" charset="-122"/>
+                <a:cs typeface="Arial" pitchFamily="34" charset="-120"/>
+              </a:rPr>
+              <a:t>Alle Befehle laufen in CloudShell. Windows oder macOS spielt heute keine Rolle.</a:t>
+            </a:r>
+            <a:endParaRPr lang="en-US" sz="1150" dirty="0"/>
+          </a:p>
+          <a:p>
+            <a:pPr marL="254000" indent="-254000">
+              <a:lnSpc>
+                <a:spcPct val="100000"/>
+              </a:lnSpc>
+              <a:spcAft>
+                <a:spcPts val="900"/>
+              </a:spcAft>
+              <a:buClr>
+                <a:srgbClr val="9A6310"/>
+              </a:buClr>
+              <a:buSzPct val="100000"/>
+              <a:buChar char="▸"/>
+            </a:pPr>
+            <a:r>
+              <a:rPr lang="en-US" sz="1150" dirty="0">
+                <a:solidFill>
+                  <a:srgbClr val="434A63"/>
+                </a:solidFill>
+                <a:latin typeface="Arial" pitchFamily="34" charset="0"/>
+                <a:ea typeface="Arial" pitchFamily="34" charset="-122"/>
+                <a:cs typeface="Arial" pitchFamily="34" charset="-120"/>
+              </a:rPr>
+              <a:t>Datei und Befehle kopiert ihr von der Kursseite. Abtippen kostet nur Zeit und bringt Tippfehler.</a:t>
+            </a:r>
+            <a:endParaRPr lang="en-US" sz="1150" dirty="0"/>
+          </a:p>
+          <a:p>
+            <a:pPr marL="254000" indent="-254000">
+              <a:lnSpc>
+                <a:spcPct val="100000"/>
+              </a:lnSpc>
+              <a:spcAft>
+                <a:spcPts val="900"/>
+              </a:spcAft>
+              <a:buClr>
+                <a:srgbClr val="9A6310"/>
+              </a:buClr>
+              <a:buSzPct val="100000"/>
+              <a:buChar char="▸"/>
+            </a:pPr>
+            <a:r>
+              <a:rPr lang="en-US" sz="1150" dirty="0">
+                <a:solidFill>
+                  <a:srgbClr val="434A63"/>
+                </a:solidFill>
+                <a:latin typeface="Arial" pitchFamily="34" charset="0"/>
+                <a:ea typeface="Arial" pitchFamily="34" charset="-122"/>
+                <a:cs typeface="Arial" pitchFamily="34" charset="-120"/>
+              </a:rPr>
+              <a:t>Ändern mit nano: Speichern mit Strg+O und Enter, schließen mit Strg+X. Nie Strg+W, das schließt den Browser-Reiter.</a:t>
+            </a:r>
+            <a:endParaRPr lang="en-US" sz="1150" dirty="0"/>
+          </a:p>
+          <a:p>
+            <a:pPr marL="254000" indent="-254000">
+              <a:lnSpc>
+                <a:spcPct val="100000"/>
+              </a:lnSpc>
+              <a:spcAft>
+                <a:spcPts val="900"/>
+              </a:spcAft>
+              <a:buClr>
+                <a:srgbClr val="9A6310"/>
+              </a:buClr>
+              <a:buSzPct val="100000"/>
+              <a:buChar char="▸"/>
+            </a:pPr>
+            <a:r>
+              <a:rPr lang="en-US" sz="1150" dirty="0">
+                <a:solidFill>
+                  <a:srgbClr val="434A63"/>
+                </a:solidFill>
+                <a:latin typeface="Arial" pitchFamily="34" charset="0"/>
+                <a:ea typeface="Arial" pitchFamily="34" charset="-122"/>
+                <a:cs typeface="Arial" pitchFamily="34" charset="-120"/>
+              </a:rPr>
+              <a:t>Vor jedem apply: erst die Vorhersage aufschreiben, dann den Plan lesen, dann yes.</a:t>
+            </a:r>
+            <a:endParaRPr lang="en-US" sz="1150" dirty="0"/>
+          </a:p>
+          <a:p>
+            <a:pPr marL="254000" indent="-254000">
+              <a:lnSpc>
+                <a:spcPct val="100000"/>
+              </a:lnSpc>
+              <a:spcAft>
+                <a:spcPts val="900"/>
+              </a:spcAft>
+              <a:buClr>
+                <a:srgbClr val="9A6310"/>
+              </a:buClr>
+              <a:buSzPct val="100000"/>
+              <a:buChar char="▸"/>
+            </a:pPr>
+            <a:r>
+              <a:rPr lang="en-US" sz="1150" dirty="0">
+                <a:solidFill>
+                  <a:srgbClr val="434A63"/>
+                </a:solidFill>
+                <a:latin typeface="Arial" pitchFamily="34" charset="0"/>
+                <a:ea typeface="Arial" pitchFamily="34" charset="-122"/>
+                <a:cs typeface="Arial" pitchFamily="34" charset="-120"/>
+              </a:rPr>
+              <a:t>Bei einer Fehlermeldung: erst die Tabelle „Wenn es klemmt“ auf der Kursseite, dann im Chat fragen.</a:t>
+            </a:r>
+            <a:endParaRPr lang="en-US" sz="1150" dirty="0"/>
+          </a:p>
+          <a:p>
+            <a:pPr marL="254000" indent="-254000">
+              <a:lnSpc>
+                <a:spcPct val="100000"/>
+              </a:lnSpc>
+              <a:spcAft>
+                <a:spcPts val="900"/>
+              </a:spcAft>
+              <a:buClr>
+                <a:srgbClr val="9A6310"/>
+              </a:buClr>
+              <a:buSzPct val="100000"/>
+              <a:buChar char="▸"/>
+            </a:pPr>
+            <a:r>
+              <a:rPr lang="en-US" sz="1150" dirty="0">
+                <a:solidFill>
+                  <a:srgbClr val="434A63"/>
+                </a:solidFill>
+                <a:latin typeface="Arial" pitchFamily="34" charset="0"/>
+                <a:ea typeface="Arial" pitchFamily="34" charset="-122"/>
+                <a:cs typeface="Arial" pitchFamily="34" charset="-120"/>
+              </a:rPr>
+              <a:t>Wer fertig ist, macht die Bonus-Aufgaben vor Station 6. Aufgeräumt wird spätestens um 20:20 Uhr.</a:t>
+            </a:r>
+            <a:endParaRPr lang="en-US" sz="1150" dirty="0"/>
+          </a:p>
+        </p:txBody>
+      </p:sp>
+      <p:sp>
+        <p:nvSpPr>
+          <p:cNvPr id="6" name="Shape 4"/>
           <p:cNvSpPr/>
           <p:nvPr/>
         </p:nvSpPr>
@@ -9947,7 +9729,7 @@
       </p:sp>
       <p:sp>
         <p:nvSpPr>
-          <p:cNvPr id="7" name="Text 4"/>
+          <p:cNvPr id="7" name="Text 5"/>
           <p:cNvSpPr/>
           <p:nvPr/>
         </p:nvSpPr>
@@ -9978,7 +9760,7 @@
                 <a:ea typeface="Arial" pitchFamily="34" charset="-122"/>
                 <a:cs typeface="Arial" pitchFamily="34" charset="-120"/>
               </a:rPr>
-              <a:t>Auswertung</a:t>
+              <a:t>Praxiszeit</a:t>
             </a:r>
             <a:endParaRPr lang="en-US" sz="1050" dirty="0"/>
           </a:p>
@@ -9986,7 +9768,7 @@
       </p:sp>
       <p:sp>
         <p:nvSpPr>
-          <p:cNvPr id="8" name="Text 5"/>
+          <p:cNvPr id="8" name="Text 6"/>
           <p:cNvSpPr/>
           <p:nvPr/>
         </p:nvSpPr>
@@ -10017,7 +9799,7 @@
                 <a:ea typeface="Arial" pitchFamily="34" charset="-122"/>
                 <a:cs typeface="Arial" pitchFamily="34" charset="-120"/>
               </a:rPr>
-              <a:t>21/24</a:t>
+              <a:t>21/27</a:t>
             </a:r>
             <a:endParaRPr lang="en-US" sz="1050" dirty="0"/>
           </a:p>
@@ -10108,7 +9890,7 @@
                 <a:ea typeface="Arial" pitchFamily="34" charset="-122"/>
                 <a:cs typeface="Arial" pitchFamily="34" charset="-120"/>
               </a:rPr>
-              <a:t>JEMAND HAT GEKLICKT</a:t>
+              <a:t>AUSWERTUNG</a:t>
             </a:r>
             <a:endParaRPr lang="en-US" sz="1150" dirty="0"/>
           </a:p>
@@ -10147,39 +9929,524 @@
                 <a:ea typeface="Arial" pitchFamily="34" charset="-122"/>
                 <a:cs typeface="Arial" pitchFamily="34" charset="-120"/>
               </a:rPr>
-              <a:t>Station 4 · Lösung</a:t>
+              <a:t>Was ihr gesehen habt</a:t>
             </a:r>
             <a:endParaRPr lang="en-US" sz="2600" dirty="0"/>
           </a:p>
         </p:txBody>
       </p:sp>
-      <p:pic>
-        <p:nvPicPr>
-          <p:cNvPr id="5" name="Image 0" descr="/Users/jacobmenge/Desktop/kurs-26.2b-orga/folienwerkstatt/assets/diagramme/iac-loesung-drift.png">    </p:cNvPr>
-          <p:cNvPicPr>
-            <a:picLocks noChangeAspect="1"/>
-          </p:cNvPicPr>
-          <p:nvPr/>
-        </p:nvPicPr>
-        <p:blipFill>
-          <a:blip r:embed="rId1"/>
-          <a:stretch>
-            <a:fillRect/>
-          </a:stretch>
-        </p:blipFill>
-        <p:spPr>
-          <a:xfrm>
-            <a:off x="566928" y="1335024"/>
-            <a:ext cx="8010144" cy="2651760"/>
-          </a:xfrm>
-          <a:prstGeom prst="rect">
-            <a:avLst/>
-          </a:prstGeom>
-        </p:spPr>
-      </p:pic>
-      <p:sp>
-        <p:nvSpPr>
-          <p:cNvPr id="6" name="Shape 3"/>
+      <p:sp>
+        <p:nvSpPr>
+          <p:cNvPr id="5" name="Shape 3"/>
+          <p:cNvSpPr/>
+          <p:nvPr/>
+        </p:nvSpPr>
+        <p:spPr>
+          <a:xfrm>
+            <a:off x="438912" y="1737360"/>
+            <a:ext cx="8266176" cy="384048"/>
+          </a:xfrm>
+          <a:prstGeom prst="rect">
+            <a:avLst/>
+          </a:prstGeom>
+          <a:solidFill>
+            <a:srgbClr val="F5F6FC"/>
+          </a:solidFill>
+          <a:ln/>
+        </p:spPr>
+      </p:sp>
+      <p:sp>
+        <p:nvSpPr>
+          <p:cNvPr id="6" name="Text 4"/>
+          <p:cNvSpPr/>
+          <p:nvPr/>
+        </p:nvSpPr>
+        <p:spPr>
+          <a:xfrm>
+            <a:off x="566928" y="1737360"/>
+            <a:ext cx="548640" cy="384048"/>
+          </a:xfrm>
+          <a:prstGeom prst="rect">
+            <a:avLst/>
+          </a:prstGeom>
+          <a:noFill/>
+          <a:ln/>
+        </p:spPr>
+        <p:txBody>
+          <a:bodyPr wrap="square" lIns="0" tIns="0" rIns="0" bIns="0" rtlCol="0" anchor="ctr"/>
+          <a:lstStyle/>
+          <a:p>
+            <a:pPr indent="0" marL="0">
+              <a:buNone/>
+            </a:pPr>
+            <a:r>
+              <a:rPr lang="en-US" sz="1150" b="1" dirty="0">
+                <a:solidFill>
+                  <a:srgbClr val="9A6310"/>
+                </a:solidFill>
+                <a:latin typeface="Courier New" pitchFamily="34" charset="0"/>
+                <a:ea typeface="Courier New" pitchFamily="34" charset="-122"/>
+                <a:cs typeface="Courier New" pitchFamily="34" charset="-120"/>
+              </a:rPr>
+              <a:t>1</a:t>
+            </a:r>
+            <a:endParaRPr lang="en-US" sz="1150" dirty="0"/>
+          </a:p>
+        </p:txBody>
+      </p:sp>
+      <p:sp>
+        <p:nvSpPr>
+          <p:cNvPr id="7" name="Text 5"/>
+          <p:cNvSpPr/>
+          <p:nvPr/>
+        </p:nvSpPr>
+        <p:spPr>
+          <a:xfrm>
+            <a:off x="1115568" y="1737360"/>
+            <a:ext cx="7461504" cy="384048"/>
+          </a:xfrm>
+          <a:prstGeom prst="rect">
+            <a:avLst/>
+          </a:prstGeom>
+          <a:noFill/>
+          <a:ln/>
+        </p:spPr>
+        <p:txBody>
+          <a:bodyPr wrap="square" lIns="0" tIns="0" rIns="0" bIns="0" rtlCol="0" anchor="ctr"/>
+          <a:lstStyle/>
+          <a:p>
+            <a:pPr indent="0" marL="0">
+              <a:buNone/>
+            </a:pPr>
+            <a:r>
+              <a:rPr lang="en-US" sz="1150" dirty="0">
+                <a:solidFill>
+                  <a:srgbClr val="434A63"/>
+                </a:solidFill>
+                <a:latin typeface="Arial" pitchFamily="34" charset="0"/>
+                <a:ea typeface="Arial" pitchFamily="34" charset="-122"/>
+                <a:cs typeface="Arial" pitchFamily="34" charset="-120"/>
+              </a:rPr>
+              <a:t>Was zeigte der erste Plan? Welche Datei lag danach neu im Ordner?</a:t>
+            </a:r>
+            <a:endParaRPr lang="en-US" sz="1150" dirty="0"/>
+          </a:p>
+        </p:txBody>
+      </p:sp>
+      <p:sp>
+        <p:nvSpPr>
+          <p:cNvPr id="8" name="Text 6"/>
+          <p:cNvSpPr/>
+          <p:nvPr/>
+        </p:nvSpPr>
+        <p:spPr>
+          <a:xfrm>
+            <a:off x="566928" y="2121408"/>
+            <a:ext cx="548640" cy="384048"/>
+          </a:xfrm>
+          <a:prstGeom prst="rect">
+            <a:avLst/>
+          </a:prstGeom>
+          <a:noFill/>
+          <a:ln/>
+        </p:spPr>
+        <p:txBody>
+          <a:bodyPr wrap="square" lIns="0" tIns="0" rIns="0" bIns="0" rtlCol="0" anchor="ctr"/>
+          <a:lstStyle/>
+          <a:p>
+            <a:pPr indent="0" marL="0">
+              <a:buNone/>
+            </a:pPr>
+            <a:r>
+              <a:rPr lang="en-US" sz="1150" b="1" dirty="0">
+                <a:solidFill>
+                  <a:srgbClr val="9A6310"/>
+                </a:solidFill>
+                <a:latin typeface="Courier New" pitchFamily="34" charset="0"/>
+                <a:ea typeface="Courier New" pitchFamily="34" charset="-122"/>
+                <a:cs typeface="Courier New" pitchFamily="34" charset="-120"/>
+              </a:rPr>
+              <a:t>2</a:t>
+            </a:r>
+            <a:endParaRPr lang="en-US" sz="1150" dirty="0"/>
+          </a:p>
+        </p:txBody>
+      </p:sp>
+      <p:sp>
+        <p:nvSpPr>
+          <p:cNvPr id="9" name="Text 7"/>
+          <p:cNvSpPr/>
+          <p:nvPr/>
+        </p:nvSpPr>
+        <p:spPr>
+          <a:xfrm>
+            <a:off x="1115568" y="2121408"/>
+            <a:ext cx="7461504" cy="384048"/>
+          </a:xfrm>
+          <a:prstGeom prst="rect">
+            <a:avLst/>
+          </a:prstGeom>
+          <a:noFill/>
+          <a:ln/>
+        </p:spPr>
+        <p:txBody>
+          <a:bodyPr wrap="square" lIns="0" tIns="0" rIns="0" bIns="0" rtlCol="0" anchor="ctr"/>
+          <a:lstStyle/>
+          <a:p>
+            <a:pPr indent="0" marL="0">
+              <a:buNone/>
+            </a:pPr>
+            <a:r>
+              <a:rPr lang="en-US" sz="1150" dirty="0">
+                <a:solidFill>
+                  <a:srgbClr val="434A63"/>
+                </a:solidFill>
+                <a:latin typeface="Arial" pitchFamily="34" charset="0"/>
+                <a:ea typeface="Arial" pitchFamily="34" charset="-122"/>
+                <a:cs typeface="Arial" pitchFamily="34" charset="-120"/>
+              </a:rPr>
+              <a:t>Eure drei Vorhersagen aus Station 3: Wo lagt ihr richtig?</a:t>
+            </a:r>
+            <a:endParaRPr lang="en-US" sz="1150" dirty="0"/>
+          </a:p>
+        </p:txBody>
+      </p:sp>
+      <p:sp>
+        <p:nvSpPr>
+          <p:cNvPr id="10" name="Shape 8"/>
+          <p:cNvSpPr/>
+          <p:nvPr/>
+        </p:nvSpPr>
+        <p:spPr>
+          <a:xfrm>
+            <a:off x="438912" y="2505456"/>
+            <a:ext cx="8266176" cy="384048"/>
+          </a:xfrm>
+          <a:prstGeom prst="rect">
+            <a:avLst/>
+          </a:prstGeom>
+          <a:solidFill>
+            <a:srgbClr val="F5F6FC"/>
+          </a:solidFill>
+          <a:ln/>
+        </p:spPr>
+      </p:sp>
+      <p:sp>
+        <p:nvSpPr>
+          <p:cNvPr id="11" name="Text 9"/>
+          <p:cNvSpPr/>
+          <p:nvPr/>
+        </p:nvSpPr>
+        <p:spPr>
+          <a:xfrm>
+            <a:off x="566928" y="2505456"/>
+            <a:ext cx="548640" cy="384048"/>
+          </a:xfrm>
+          <a:prstGeom prst="rect">
+            <a:avLst/>
+          </a:prstGeom>
+          <a:noFill/>
+          <a:ln/>
+        </p:spPr>
+        <p:txBody>
+          <a:bodyPr wrap="square" lIns="0" tIns="0" rIns="0" bIns="0" rtlCol="0" anchor="ctr"/>
+          <a:lstStyle/>
+          <a:p>
+            <a:pPr indent="0" marL="0">
+              <a:buNone/>
+            </a:pPr>
+            <a:r>
+              <a:rPr lang="en-US" sz="1150" b="1" dirty="0">
+                <a:solidFill>
+                  <a:srgbClr val="9A6310"/>
+                </a:solidFill>
+                <a:latin typeface="Courier New" pitchFamily="34" charset="0"/>
+                <a:ea typeface="Courier New" pitchFamily="34" charset="-122"/>
+                <a:cs typeface="Courier New" pitchFamily="34" charset="-120"/>
+              </a:rPr>
+              <a:t>3</a:t>
+            </a:r>
+            <a:endParaRPr lang="en-US" sz="1150" dirty="0"/>
+          </a:p>
+        </p:txBody>
+      </p:sp>
+      <p:sp>
+        <p:nvSpPr>
+          <p:cNvPr id="12" name="Text 10"/>
+          <p:cNvSpPr/>
+          <p:nvPr/>
+        </p:nvSpPr>
+        <p:spPr>
+          <a:xfrm>
+            <a:off x="1115568" y="2505456"/>
+            <a:ext cx="7461504" cy="384048"/>
+          </a:xfrm>
+          <a:prstGeom prst="rect">
+            <a:avLst/>
+          </a:prstGeom>
+          <a:noFill/>
+          <a:ln/>
+        </p:spPr>
+        <p:txBody>
+          <a:bodyPr wrap="square" lIns="0" tIns="0" rIns="0" bIns="0" rtlCol="0" anchor="ctr"/>
+          <a:lstStyle/>
+          <a:p>
+            <a:pPr indent="0" marL="0">
+              <a:buNone/>
+            </a:pPr>
+            <a:r>
+              <a:rPr lang="en-US" sz="1150" dirty="0">
+                <a:solidFill>
+                  <a:srgbClr val="434A63"/>
+                </a:solidFill>
+                <a:latin typeface="Arial" pitchFamily="34" charset="0"/>
+                <a:ea typeface="Arial" pitchFamily="34" charset="-122"/>
+                <a:cs typeface="Arial" pitchFamily="34" charset="-120"/>
+              </a:rPr>
+              <a:t>Was wollte Terraform nach der Änderung in der Konsole?</a:t>
+            </a:r>
+            <a:endParaRPr lang="en-US" sz="1150" dirty="0"/>
+          </a:p>
+        </p:txBody>
+      </p:sp>
+      <p:sp>
+        <p:nvSpPr>
+          <p:cNvPr id="13" name="Text 11"/>
+          <p:cNvSpPr/>
+          <p:nvPr/>
+        </p:nvSpPr>
+        <p:spPr>
+          <a:xfrm>
+            <a:off x="566928" y="2889504"/>
+            <a:ext cx="548640" cy="384048"/>
+          </a:xfrm>
+          <a:prstGeom prst="rect">
+            <a:avLst/>
+          </a:prstGeom>
+          <a:noFill/>
+          <a:ln/>
+        </p:spPr>
+        <p:txBody>
+          <a:bodyPr wrap="square" lIns="0" tIns="0" rIns="0" bIns="0" rtlCol="0" anchor="ctr"/>
+          <a:lstStyle/>
+          <a:p>
+            <a:pPr indent="0" marL="0">
+              <a:buNone/>
+            </a:pPr>
+            <a:r>
+              <a:rPr lang="en-US" sz="1150" b="1" dirty="0">
+                <a:solidFill>
+                  <a:srgbClr val="9A6310"/>
+                </a:solidFill>
+                <a:latin typeface="Courier New" pitchFamily="34" charset="0"/>
+                <a:ea typeface="Courier New" pitchFamily="34" charset="-122"/>
+                <a:cs typeface="Courier New" pitchFamily="34" charset="-120"/>
+              </a:rPr>
+              <a:t>4</a:t>
+            </a:r>
+            <a:endParaRPr lang="en-US" sz="1150" dirty="0"/>
+          </a:p>
+        </p:txBody>
+      </p:sp>
+      <p:sp>
+        <p:nvSpPr>
+          <p:cNvPr id="14" name="Text 12"/>
+          <p:cNvSpPr/>
+          <p:nvPr/>
+        </p:nvSpPr>
+        <p:spPr>
+          <a:xfrm>
+            <a:off x="1115568" y="2889504"/>
+            <a:ext cx="7461504" cy="384048"/>
+          </a:xfrm>
+          <a:prstGeom prst="rect">
+            <a:avLst/>
+          </a:prstGeom>
+          <a:noFill/>
+          <a:ln/>
+        </p:spPr>
+        <p:txBody>
+          <a:bodyPr wrap="square" lIns="0" tIns="0" rIns="0" bIns="0" rtlCol="0" anchor="ctr"/>
+          <a:lstStyle/>
+          <a:p>
+            <a:pPr indent="0" marL="0">
+              <a:buNone/>
+            </a:pPr>
+            <a:r>
+              <a:rPr lang="en-US" sz="1150" dirty="0">
+                <a:solidFill>
+                  <a:srgbClr val="434A63"/>
+                </a:solidFill>
+                <a:latin typeface="Arial" pitchFamily="34" charset="0"/>
+                <a:ea typeface="Arial" pitchFamily="34" charset="-122"/>
+                <a:cs typeface="Arial" pitchFamily="34" charset="-120"/>
+              </a:rPr>
+              <a:t>Warum baute Terraform in Station 5 nur einen neuen Server?</a:t>
+            </a:r>
+            <a:endParaRPr lang="en-US" sz="1150" dirty="0"/>
+          </a:p>
+        </p:txBody>
+      </p:sp>
+      <p:sp>
+        <p:nvSpPr>
+          <p:cNvPr id="15" name="Shape 13"/>
+          <p:cNvSpPr/>
+          <p:nvPr/>
+        </p:nvSpPr>
+        <p:spPr>
+          <a:xfrm>
+            <a:off x="438912" y="3273552"/>
+            <a:ext cx="8266176" cy="384048"/>
+          </a:xfrm>
+          <a:prstGeom prst="rect">
+            <a:avLst/>
+          </a:prstGeom>
+          <a:solidFill>
+            <a:srgbClr val="F5F6FC"/>
+          </a:solidFill>
+          <a:ln/>
+        </p:spPr>
+      </p:sp>
+      <p:sp>
+        <p:nvSpPr>
+          <p:cNvPr id="16" name="Text 14"/>
+          <p:cNvSpPr/>
+          <p:nvPr/>
+        </p:nvSpPr>
+        <p:spPr>
+          <a:xfrm>
+            <a:off x="566928" y="3273552"/>
+            <a:ext cx="548640" cy="384048"/>
+          </a:xfrm>
+          <a:prstGeom prst="rect">
+            <a:avLst/>
+          </a:prstGeom>
+          <a:noFill/>
+          <a:ln/>
+        </p:spPr>
+        <p:txBody>
+          <a:bodyPr wrap="square" lIns="0" tIns="0" rIns="0" bIns="0" rtlCol="0" anchor="ctr"/>
+          <a:lstStyle/>
+          <a:p>
+            <a:pPr indent="0" marL="0">
+              <a:buNone/>
+            </a:pPr>
+            <a:r>
+              <a:rPr lang="en-US" sz="1150" b="1" dirty="0">
+                <a:solidFill>
+                  <a:srgbClr val="9A6310"/>
+                </a:solidFill>
+                <a:latin typeface="Courier New" pitchFamily="34" charset="0"/>
+                <a:ea typeface="Courier New" pitchFamily="34" charset="-122"/>
+                <a:cs typeface="Courier New" pitchFamily="34" charset="-120"/>
+              </a:rPr>
+              <a:t>5</a:t>
+            </a:r>
+            <a:endParaRPr lang="en-US" sz="1150" dirty="0"/>
+          </a:p>
+        </p:txBody>
+      </p:sp>
+      <p:sp>
+        <p:nvSpPr>
+          <p:cNvPr id="17" name="Text 15"/>
+          <p:cNvSpPr/>
+          <p:nvPr/>
+        </p:nvSpPr>
+        <p:spPr>
+          <a:xfrm>
+            <a:off x="1115568" y="3273552"/>
+            <a:ext cx="7461504" cy="384048"/>
+          </a:xfrm>
+          <a:prstGeom prst="rect">
+            <a:avLst/>
+          </a:prstGeom>
+          <a:noFill/>
+          <a:ln/>
+        </p:spPr>
+        <p:txBody>
+          <a:bodyPr wrap="square" lIns="0" tIns="0" rIns="0" bIns="0" rtlCol="0" anchor="ctr"/>
+          <a:lstStyle/>
+          <a:p>
+            <a:pPr indent="0" marL="0">
+              <a:buNone/>
+            </a:pPr>
+            <a:r>
+              <a:rPr lang="en-US" sz="1150" dirty="0">
+                <a:solidFill>
+                  <a:srgbClr val="434A63"/>
+                </a:solidFill>
+                <a:latin typeface="Arial" pitchFamily="34" charset="0"/>
+                <a:ea typeface="Arial" pitchFamily="34" charset="-122"/>
+                <a:cs typeface="Arial" pitchFamily="34" charset="-120"/>
+              </a:rPr>
+              <a:t>Klicken oder Datei: Was würdet ihr im Betrieb nehmen? Warum?</a:t>
+            </a:r>
+            <a:endParaRPr lang="en-US" sz="1150" dirty="0"/>
+          </a:p>
+        </p:txBody>
+      </p:sp>
+      <p:sp>
+        <p:nvSpPr>
+          <p:cNvPr id="18" name="Shape 16"/>
+          <p:cNvSpPr/>
+          <p:nvPr/>
+        </p:nvSpPr>
+        <p:spPr>
+          <a:xfrm>
+            <a:off x="566928" y="4069080"/>
+            <a:ext cx="32004" cy="256032"/>
+          </a:xfrm>
+          <a:prstGeom prst="rect">
+            <a:avLst/>
+          </a:prstGeom>
+          <a:solidFill>
+            <a:srgbClr val="9A6310"/>
+          </a:solidFill>
+          <a:ln/>
+        </p:spPr>
+      </p:sp>
+      <p:sp>
+        <p:nvSpPr>
+          <p:cNvPr id="19" name="Text 17"/>
+          <p:cNvSpPr/>
+          <p:nvPr/>
+        </p:nvSpPr>
+        <p:spPr>
+          <a:xfrm>
+            <a:off x="749808" y="4023360"/>
+            <a:ext cx="7827264" cy="402336"/>
+          </a:xfrm>
+          <a:prstGeom prst="rect">
+            <a:avLst/>
+          </a:prstGeom>
+          <a:noFill/>
+          <a:ln/>
+        </p:spPr>
+        <p:txBody>
+          <a:bodyPr wrap="square" lIns="0" tIns="0" rIns="0" bIns="0" rtlCol="0" anchor="ctr"/>
+          <a:lstStyle/>
+          <a:p>
+            <a:pPr indent="0" marL="0">
+              <a:buNone/>
+            </a:pPr>
+            <a:r>
+              <a:rPr lang="en-US" sz="1200" b="1" dirty="0">
+                <a:solidFill>
+                  <a:srgbClr val="434A63"/>
+                </a:solidFill>
+                <a:latin typeface="Arial" pitchFamily="34" charset="0"/>
+                <a:ea typeface="Arial" pitchFamily="34" charset="-122"/>
+                <a:cs typeface="Arial" pitchFamily="34" charset="-120"/>
+              </a:rPr>
+              <a:t>Wir sammeln eure Antworten gemeinsam. Wer mag, zeigt dazu seinen Plan.</a:t>
+            </a:r>
+            <a:endParaRPr lang="en-US" sz="1200" dirty="0"/>
+          </a:p>
+        </p:txBody>
+      </p:sp>
+      <p:sp>
+        <p:nvSpPr>
+          <p:cNvPr id="20" name="Shape 18"/>
           <p:cNvSpPr/>
           <p:nvPr/>
         </p:nvSpPr>
@@ -10202,7 +10469,7 @@
       </p:sp>
       <p:sp>
         <p:nvSpPr>
-          <p:cNvPr id="7" name="Text 4"/>
+          <p:cNvPr id="21" name="Text 19"/>
           <p:cNvSpPr/>
           <p:nvPr/>
         </p:nvSpPr>
@@ -10241,7 +10508,7 @@
       </p:sp>
       <p:sp>
         <p:nvSpPr>
-          <p:cNvPr id="8" name="Text 5"/>
+          <p:cNvPr id="22" name="Text 20"/>
           <p:cNvSpPr/>
           <p:nvPr/>
         </p:nvSpPr>
@@ -10272,7 +10539,7 @@
                 <a:ea typeface="Arial" pitchFamily="34" charset="-122"/>
                 <a:cs typeface="Arial" pitchFamily="34" charset="-120"/>
               </a:rPr>
-              <a:t>22/24</a:t>
+              <a:t>22/27</a:t>
             </a:r>
             <a:endParaRPr lang="en-US" sz="1050" dirty="0"/>
           </a:p>
@@ -10363,7 +10630,7 @@
                 <a:ea typeface="Arial" pitchFamily="34" charset="-122"/>
                 <a:cs typeface="Arial" pitchFamily="34" charset="-120"/>
               </a:rPr>
-              <a:t>ZWEI SERVER, DANN ALLES WEG</a:t>
+              <a:t>DER ERSTE SERVER AUS EINER DATEI</a:t>
             </a:r>
             <a:endParaRPr lang="en-US" sz="1150" dirty="0"/>
           </a:p>
@@ -10402,7 +10669,7 @@
                 <a:ea typeface="Arial" pitchFamily="34" charset="-122"/>
                 <a:cs typeface="Arial" pitchFamily="34" charset="-120"/>
               </a:rPr>
-              <a:t>Station 5 und 6 · Lösung</a:t>
+              <a:t>Station 2 · Lösung</a:t>
             </a:r>
             <a:endParaRPr lang="en-US" sz="2600" dirty="0"/>
           </a:p>
@@ -10410,7 +10677,7 @@
       </p:sp>
       <p:pic>
         <p:nvPicPr>
-          <p:cNvPr id="5" name="Image 0" descr="/Users/jacobmenge/Desktop/kurs-26.2b-orga/folienwerkstatt/assets/diagramme/iac-loesung-zwei.png">    </p:cNvPr>
+          <p:cNvPr id="5" name="Image 0" descr="/Users/jacobmenge/Desktop/kurs-26.2b-orga/folienwerkstatt/assets/diagramme/iac-loesung-erster.png">    </p:cNvPr>
           <p:cNvPicPr>
             <a:picLocks noChangeAspect="1"/>
           </p:cNvPicPr>
@@ -10424,8 +10691,8 @@
         </p:blipFill>
         <p:spPr>
           <a:xfrm>
-            <a:off x="566928" y="1316736"/>
-            <a:ext cx="8010144" cy="2798064"/>
+            <a:off x="566928" y="1335024"/>
+            <a:ext cx="8010144" cy="2651760"/>
           </a:xfrm>
           <a:prstGeom prst="rect">
             <a:avLst/>
@@ -10527,7 +10794,7 @@
                 <a:ea typeface="Arial" pitchFamily="34" charset="-122"/>
                 <a:cs typeface="Arial" pitchFamily="34" charset="-120"/>
               </a:rPr>
-              <a:t>23/24</a:t>
+              <a:t>23/27</a:t>
             </a:r>
             <a:endParaRPr lang="en-US" sz="1050" dirty="0"/>
           </a:p>
@@ -10618,7 +10885,7 @@
                 <a:ea typeface="Arial" pitchFamily="34" charset="-122"/>
                 <a:cs typeface="Arial" pitchFamily="34" charset="-120"/>
               </a:rPr>
-              <a:t>AUSBLICK</a:t>
+              <a:t>ÄNDERN ODER ERSETZEN?</a:t>
             </a:r>
             <a:endParaRPr lang="en-US" sz="1150" dirty="0"/>
           </a:p>
@@ -10657,476 +10924,39 @@
                 <a:ea typeface="Arial" pitchFamily="34" charset="-122"/>
                 <a:cs typeface="Arial" pitchFamily="34" charset="-120"/>
               </a:rPr>
-              <a:t>Bis Mittwoch</a:t>
+              <a:t>Station 3 · Lösung</a:t>
             </a:r>
             <a:endParaRPr lang="en-US" sz="2600" dirty="0"/>
           </a:p>
         </p:txBody>
       </p:sp>
-      <p:sp>
-        <p:nvSpPr>
-          <p:cNvPr id="5" name="Text 3"/>
-          <p:cNvSpPr/>
-          <p:nvPr/>
-        </p:nvSpPr>
-        <p:spPr>
-          <a:xfrm>
-            <a:off x="566928" y="1444752"/>
-            <a:ext cx="8010144" cy="438912"/>
-          </a:xfrm>
-          <a:prstGeom prst="rect">
-            <a:avLst/>
-          </a:prstGeom>
-          <a:noFill/>
-          <a:ln/>
-        </p:spPr>
-        <p:txBody>
-          <a:bodyPr wrap="square" lIns="0" tIns="0" rIns="0" bIns="0" rtlCol="0" anchor="t"/>
-          <a:lstStyle/>
-          <a:p>
-            <a:pPr indent="0" marL="0">
-              <a:buNone/>
-            </a:pPr>
-            <a:r>
-              <a:rPr lang="en-US" sz="1300" dirty="0">
-                <a:solidFill>
-                  <a:srgbClr val="5C6377"/>
-                </a:solidFill>
-                <a:latin typeface="Arial" pitchFamily="34" charset="0"/>
-                <a:ea typeface="Arial" pitchFamily="34" charset="-122"/>
-                <a:cs typeface="Arial" pitchFamily="34" charset="-120"/>
-              </a:rPr>
-              <a:t>Am Mittwoch geht es mit Terraform weiter, wieder in der Sandbox.</a:t>
-            </a:r>
-            <a:endParaRPr lang="en-US" sz="1300" dirty="0"/>
-          </a:p>
-        </p:txBody>
-      </p:sp>
-      <p:sp>
-        <p:nvSpPr>
-          <p:cNvPr id="6" name="Shape 4"/>
-          <p:cNvSpPr/>
-          <p:nvPr/>
-        </p:nvSpPr>
-        <p:spPr>
-          <a:xfrm>
-            <a:off x="566928" y="1975104"/>
-            <a:ext cx="2523744" cy="1645920"/>
-          </a:xfrm>
-          <a:prstGeom prst="rect">
-            <a:avLst/>
-          </a:prstGeom>
-          <a:solidFill>
-            <a:srgbClr val="F5F6FC"/>
-          </a:solidFill>
-          <a:ln/>
-        </p:spPr>
-      </p:sp>
-      <p:sp>
-        <p:nvSpPr>
-          <p:cNvPr id="7" name="Shape 5"/>
-          <p:cNvSpPr/>
-          <p:nvPr/>
-        </p:nvSpPr>
-        <p:spPr>
-          <a:xfrm>
-            <a:off x="566928" y="1975104"/>
-            <a:ext cx="41148" cy="1645920"/>
-          </a:xfrm>
-          <a:prstGeom prst="rect">
-            <a:avLst/>
-          </a:prstGeom>
-          <a:solidFill>
-            <a:srgbClr val="9A6310"/>
-          </a:solidFill>
-          <a:ln/>
-        </p:spPr>
-      </p:sp>
-      <p:sp>
-        <p:nvSpPr>
-          <p:cNvPr id="8" name="Text 6"/>
-          <p:cNvSpPr/>
-          <p:nvPr/>
-        </p:nvSpPr>
-        <p:spPr>
-          <a:xfrm>
-            <a:off x="804672" y="2121408"/>
-            <a:ext cx="2121408" cy="457200"/>
-          </a:xfrm>
-          <a:prstGeom prst="rect">
-            <a:avLst/>
-          </a:prstGeom>
-          <a:noFill/>
-          <a:ln/>
-        </p:spPr>
-        <p:txBody>
-          <a:bodyPr wrap="square" lIns="0" tIns="0" rIns="0" bIns="0" rtlCol="0" anchor="t"/>
-          <a:lstStyle/>
-          <a:p>
-            <a:pPr indent="0" marL="0">
-              <a:buNone/>
-            </a:pPr>
-            <a:r>
-              <a:rPr lang="en-US" sz="1300" b="1" dirty="0">
-                <a:solidFill>
-                  <a:srgbClr val="272E52"/>
-                </a:solidFill>
-                <a:latin typeface="Arial" pitchFamily="34" charset="0"/>
-                <a:ea typeface="Arial" pitchFamily="34" charset="-122"/>
-                <a:cs typeface="Arial" pitchFamily="34" charset="-120"/>
-              </a:rPr>
-              <a:t>Zum Nachlesen</a:t>
-            </a:r>
-            <a:endParaRPr lang="en-US" sz="1300" dirty="0"/>
-          </a:p>
-        </p:txBody>
-      </p:sp>
-      <p:sp>
-        <p:nvSpPr>
-          <p:cNvPr id="9" name="Text 7"/>
-          <p:cNvSpPr/>
-          <p:nvPr/>
-        </p:nvSpPr>
-        <p:spPr>
-          <a:xfrm>
-            <a:off x="804672" y="2624328"/>
-            <a:ext cx="2121408" cy="877824"/>
-          </a:xfrm>
-          <a:prstGeom prst="rect">
-            <a:avLst/>
-          </a:prstGeom>
-          <a:noFill/>
-          <a:ln/>
-        </p:spPr>
-        <p:txBody>
-          <a:bodyPr wrap="square" lIns="0" tIns="0" rIns="0" bIns="0" rtlCol="0" anchor="t"/>
-          <a:lstStyle/>
-          <a:p>
-            <a:pPr indent="0" marL="0">
-              <a:lnSpc>
-                <a:spcPct val="92000"/>
-              </a:lnSpc>
-              <a:buNone/>
-            </a:pPr>
-            <a:r>
-              <a:rPr lang="en-US" sz="1100" dirty="0">
-                <a:solidFill>
-                  <a:srgbClr val="434A63"/>
-                </a:solidFill>
-                <a:latin typeface="Arial" pitchFamily="34" charset="0"/>
-                <a:ea typeface="Arial" pitchFamily="34" charset="-122"/>
-                <a:cs typeface="Arial" pitchFamily="34" charset="-120"/>
-              </a:rPr>
-              <a:t>Die Theorie zu Infrastruktur als Code und die Übung mit allen Befehlen bleiben auf der Kursseite.</a:t>
-            </a:r>
-            <a:endParaRPr lang="en-US" sz="1100" dirty="0"/>
-          </a:p>
-        </p:txBody>
-      </p:sp>
-      <p:sp>
-        <p:nvSpPr>
-          <p:cNvPr id="10" name="Shape 8"/>
-          <p:cNvSpPr/>
-          <p:nvPr/>
-        </p:nvSpPr>
-        <p:spPr>
-          <a:xfrm>
-            <a:off x="3310128" y="1975104"/>
-            <a:ext cx="2523744" cy="1645920"/>
-          </a:xfrm>
-          <a:prstGeom prst="rect">
-            <a:avLst/>
-          </a:prstGeom>
-          <a:solidFill>
-            <a:srgbClr val="F5F6FC"/>
-          </a:solidFill>
-          <a:ln/>
-        </p:spPr>
-      </p:sp>
-      <p:sp>
-        <p:nvSpPr>
-          <p:cNvPr id="11" name="Shape 9"/>
-          <p:cNvSpPr/>
-          <p:nvPr/>
-        </p:nvSpPr>
-        <p:spPr>
-          <a:xfrm>
-            <a:off x="3310128" y="1975104"/>
-            <a:ext cx="41148" cy="1645920"/>
-          </a:xfrm>
-          <a:prstGeom prst="rect">
-            <a:avLst/>
-          </a:prstGeom>
-          <a:solidFill>
-            <a:srgbClr val="9A6310"/>
-          </a:solidFill>
-          <a:ln/>
-        </p:spPr>
-      </p:sp>
-      <p:sp>
-        <p:nvSpPr>
-          <p:cNvPr id="12" name="Text 10"/>
-          <p:cNvSpPr/>
-          <p:nvPr/>
-        </p:nvSpPr>
-        <p:spPr>
-          <a:xfrm>
-            <a:off x="3547872" y="2121408"/>
-            <a:ext cx="2121408" cy="457200"/>
-          </a:xfrm>
-          <a:prstGeom prst="rect">
-            <a:avLst/>
-          </a:prstGeom>
-          <a:noFill/>
-          <a:ln/>
-        </p:spPr>
-        <p:txBody>
-          <a:bodyPr wrap="square" lIns="0" tIns="0" rIns="0" bIns="0" rtlCol="0" anchor="t"/>
-          <a:lstStyle/>
-          <a:p>
-            <a:pPr indent="0" marL="0">
-              <a:buNone/>
-            </a:pPr>
-            <a:r>
-              <a:rPr lang="en-US" sz="1300" b="1" dirty="0">
-                <a:solidFill>
-                  <a:srgbClr val="272E52"/>
-                </a:solidFill>
-                <a:latin typeface="Arial" pitchFamily="34" charset="0"/>
-                <a:ea typeface="Arial" pitchFamily="34" charset="-122"/>
-                <a:cs typeface="Arial" pitchFamily="34" charset="-120"/>
-              </a:rPr>
-              <a:t>Das nehmt ihr mit</a:t>
-            </a:r>
-            <a:endParaRPr lang="en-US" sz="1300" dirty="0"/>
-          </a:p>
-        </p:txBody>
-      </p:sp>
-      <p:sp>
-        <p:nvSpPr>
-          <p:cNvPr id="13" name="Text 11"/>
-          <p:cNvSpPr/>
-          <p:nvPr/>
-        </p:nvSpPr>
-        <p:spPr>
-          <a:xfrm>
-            <a:off x="3547872" y="2624328"/>
-            <a:ext cx="2121408" cy="877824"/>
-          </a:xfrm>
-          <a:prstGeom prst="rect">
-            <a:avLst/>
-          </a:prstGeom>
-          <a:noFill/>
-          <a:ln/>
-        </p:spPr>
-        <p:txBody>
-          <a:bodyPr wrap="square" lIns="0" tIns="0" rIns="0" bIns="0" rtlCol="0" anchor="t"/>
-          <a:lstStyle/>
-          <a:p>
-            <a:pPr indent="0" marL="0">
-              <a:lnSpc>
-                <a:spcPct val="92000"/>
-              </a:lnSpc>
-              <a:buNone/>
-            </a:pPr>
-            <a:r>
-              <a:rPr lang="en-US" sz="1100" dirty="0">
-                <a:solidFill>
-                  <a:srgbClr val="434A63"/>
-                </a:solidFill>
-                <a:latin typeface="Arial" pitchFamily="34" charset="0"/>
-                <a:ea typeface="Arial" pitchFamily="34" charset="-122"/>
-                <a:cs typeface="Arial" pitchFamily="34" charset="-120"/>
-              </a:rPr>
-              <a:t>Soll statt Weg, init, plan, apply und destroy, den Plan lesen, die State-Datei und Drift.</a:t>
-            </a:r>
-            <a:endParaRPr lang="en-US" sz="1100" dirty="0"/>
-          </a:p>
-        </p:txBody>
-      </p:sp>
-      <p:sp>
-        <p:nvSpPr>
-          <p:cNvPr id="14" name="Shape 12"/>
-          <p:cNvSpPr/>
-          <p:nvPr/>
-        </p:nvSpPr>
-        <p:spPr>
-          <a:xfrm>
-            <a:off x="6053328" y="1975104"/>
-            <a:ext cx="2523744" cy="1645920"/>
-          </a:xfrm>
-          <a:prstGeom prst="rect">
-            <a:avLst/>
-          </a:prstGeom>
-          <a:solidFill>
-            <a:srgbClr val="F5F6FC"/>
-          </a:solidFill>
-          <a:ln/>
-        </p:spPr>
-      </p:sp>
-      <p:sp>
-        <p:nvSpPr>
-          <p:cNvPr id="15" name="Shape 13"/>
-          <p:cNvSpPr/>
-          <p:nvPr/>
-        </p:nvSpPr>
-        <p:spPr>
-          <a:xfrm>
-            <a:off x="6053328" y="1975104"/>
-            <a:ext cx="41148" cy="1645920"/>
-          </a:xfrm>
-          <a:prstGeom prst="rect">
-            <a:avLst/>
-          </a:prstGeom>
-          <a:solidFill>
-            <a:srgbClr val="9A6310"/>
-          </a:solidFill>
-          <a:ln/>
-        </p:spPr>
-      </p:sp>
-      <p:sp>
-        <p:nvSpPr>
-          <p:cNvPr id="16" name="Text 14"/>
-          <p:cNvSpPr/>
-          <p:nvPr/>
-        </p:nvSpPr>
-        <p:spPr>
-          <a:xfrm>
-            <a:off x="6291072" y="2121408"/>
-            <a:ext cx="2121408" cy="457200"/>
-          </a:xfrm>
-          <a:prstGeom prst="rect">
-            <a:avLst/>
-          </a:prstGeom>
-          <a:noFill/>
-          <a:ln/>
-        </p:spPr>
-        <p:txBody>
-          <a:bodyPr wrap="square" lIns="0" tIns="0" rIns="0" bIns="0" rtlCol="0" anchor="t"/>
-          <a:lstStyle/>
-          <a:p>
-            <a:pPr indent="0" marL="0">
-              <a:buNone/>
-            </a:pPr>
-            <a:r>
-              <a:rPr lang="en-US" sz="1300" b="1" dirty="0">
-                <a:solidFill>
-                  <a:srgbClr val="272E52"/>
-                </a:solidFill>
-                <a:latin typeface="Arial" pitchFamily="34" charset="0"/>
-                <a:ea typeface="Arial" pitchFamily="34" charset="-122"/>
-                <a:cs typeface="Arial" pitchFamily="34" charset="-120"/>
-              </a:rPr>
-              <a:t>Am Mittwoch</a:t>
-            </a:r>
-            <a:endParaRPr lang="en-US" sz="1300" dirty="0"/>
-          </a:p>
-        </p:txBody>
-      </p:sp>
-      <p:sp>
-        <p:nvSpPr>
-          <p:cNvPr id="17" name="Text 15"/>
-          <p:cNvSpPr/>
-          <p:nvPr/>
-        </p:nvSpPr>
-        <p:spPr>
-          <a:xfrm>
-            <a:off x="6291072" y="2624328"/>
-            <a:ext cx="2121408" cy="877824"/>
-          </a:xfrm>
-          <a:prstGeom prst="rect">
-            <a:avLst/>
-          </a:prstGeom>
-          <a:noFill/>
-          <a:ln/>
-        </p:spPr>
-        <p:txBody>
-          <a:bodyPr wrap="square" lIns="0" tIns="0" rIns="0" bIns="0" rtlCol="0" anchor="t"/>
-          <a:lstStyle/>
-          <a:p>
-            <a:pPr indent="0" marL="0">
-              <a:lnSpc>
-                <a:spcPct val="92000"/>
-              </a:lnSpc>
-              <a:buNone/>
-            </a:pPr>
-            <a:r>
-              <a:rPr lang="en-US" sz="1100" dirty="0">
-                <a:solidFill>
-                  <a:srgbClr val="434A63"/>
-                </a:solidFill>
-                <a:latin typeface="Arial" pitchFamily="34" charset="0"/>
-                <a:ea typeface="Arial" pitchFamily="34" charset="-122"/>
-                <a:cs typeface="Arial" pitchFamily="34" charset="-120"/>
-              </a:rPr>
-              <a:t>Ihr baut das Cloud-Rennen als Code nach: zwei Server in zwei Zonen hinter einem Load Balancer, aus einer Datei.</a:t>
-            </a:r>
-            <a:endParaRPr lang="en-US" sz="1100" dirty="0"/>
-          </a:p>
-        </p:txBody>
-      </p:sp>
-      <p:sp>
-        <p:nvSpPr>
-          <p:cNvPr id="18" name="Shape 16"/>
-          <p:cNvSpPr/>
-          <p:nvPr/>
-        </p:nvSpPr>
-        <p:spPr>
-          <a:xfrm>
-            <a:off x="566928" y="3886200"/>
-            <a:ext cx="32004" cy="256032"/>
-          </a:xfrm>
-          <a:prstGeom prst="rect">
-            <a:avLst/>
-          </a:prstGeom>
-          <a:solidFill>
-            <a:srgbClr val="9A6310"/>
-          </a:solidFill>
-          <a:ln/>
-        </p:spPr>
-      </p:sp>
-      <p:sp>
-        <p:nvSpPr>
-          <p:cNvPr id="19" name="Text 17"/>
-          <p:cNvSpPr/>
-          <p:nvPr/>
-        </p:nvSpPr>
-        <p:spPr>
-          <a:xfrm>
-            <a:off x="749808" y="3840480"/>
-            <a:ext cx="7827264" cy="402336"/>
-          </a:xfrm>
-          <a:prstGeom prst="rect">
-            <a:avLst/>
-          </a:prstGeom>
-          <a:noFill/>
-          <a:ln/>
-        </p:spPr>
-        <p:txBody>
-          <a:bodyPr wrap="square" lIns="0" tIns="0" rIns="0" bIns="0" rtlCol="0" anchor="ctr"/>
-          <a:lstStyle/>
-          <a:p>
-            <a:pPr indent="0" marL="0">
-              <a:buNone/>
-            </a:pPr>
-            <a:r>
-              <a:rPr lang="en-US" sz="1200" b="1" dirty="0">
-                <a:solidFill>
-                  <a:srgbClr val="434A63"/>
-                </a:solidFill>
-                <a:latin typeface="Arial" pitchFamily="34" charset="0"/>
-                <a:ea typeface="Arial" pitchFamily="34" charset="-122"/>
-                <a:cs typeface="Arial" pitchFamily="34" charset="-120"/>
-              </a:rPr>
-              <a:t>Nächster Termin: Mittwoch, 28. Oktober um 18:00 Uhr.</a:t>
-            </a:r>
-            <a:endParaRPr lang="en-US" sz="1200" dirty="0"/>
-          </a:p>
-        </p:txBody>
-      </p:sp>
-      <p:sp>
-        <p:nvSpPr>
-          <p:cNvPr id="20" name="Shape 18"/>
+      <p:pic>
+        <p:nvPicPr>
+          <p:cNvPr id="5" name="Image 0" descr="/Users/jacobmenge/Desktop/kurs-26.2b-orga/folienwerkstatt/assets/diagramme/iac-loesung-aendern.png">    </p:cNvPr>
+          <p:cNvPicPr>
+            <a:picLocks noChangeAspect="1"/>
+          </p:cNvPicPr>
+          <p:nvPr/>
+        </p:nvPicPr>
+        <p:blipFill>
+          <a:blip r:embed="rId1"/>
+          <a:stretch>
+            <a:fillRect/>
+          </a:stretch>
+        </p:blipFill>
+        <p:spPr>
+          <a:xfrm>
+            <a:off x="566928" y="1316736"/>
+            <a:ext cx="8010144" cy="2798064"/>
+          </a:xfrm>
+          <a:prstGeom prst="rect">
+            <a:avLst/>
+          </a:prstGeom>
+        </p:spPr>
+      </p:pic>
+      <p:sp>
+        <p:nvSpPr>
+          <p:cNvPr id="6" name="Shape 3"/>
           <p:cNvSpPr/>
           <p:nvPr/>
         </p:nvSpPr>
@@ -11149,7 +10979,7 @@
       </p:sp>
       <p:sp>
         <p:nvSpPr>
-          <p:cNvPr id="21" name="Text 19"/>
+          <p:cNvPr id="7" name="Text 4"/>
           <p:cNvSpPr/>
           <p:nvPr/>
         </p:nvSpPr>
@@ -11180,7 +11010,7 @@
                 <a:ea typeface="Arial" pitchFamily="34" charset="-122"/>
                 <a:cs typeface="Arial" pitchFamily="34" charset="-120"/>
               </a:rPr>
-              <a:t>Abschluss</a:t>
+              <a:t>Auswertung</a:t>
             </a:r>
             <a:endParaRPr lang="en-US" sz="1050" dirty="0"/>
           </a:p>
@@ -11188,7 +11018,7 @@
       </p:sp>
       <p:sp>
         <p:nvSpPr>
-          <p:cNvPr id="22" name="Text 20"/>
+          <p:cNvPr id="8" name="Text 5"/>
           <p:cNvSpPr/>
           <p:nvPr/>
         </p:nvSpPr>
@@ -11219,7 +11049,7 @@
                 <a:ea typeface="Arial" pitchFamily="34" charset="-122"/>
                 <a:cs typeface="Arial" pitchFamily="34" charset="-120"/>
               </a:rPr>
-              <a:t>24/24</a:t>
+              <a:t>24/27</a:t>
             </a:r>
             <a:endParaRPr lang="en-US" sz="1050" dirty="0"/>
           </a:p>
@@ -11239,7 +11069,7 @@
     <p:bg>
       <p:bgPr>
         <a:solidFill>
-          <a:srgbClr val="F5F6FC"/>
+          <a:srgbClr val="FFFFFF"/>
         </a:solidFill>
       </p:bgPr>
     </p:bg>
@@ -11265,8 +11095,8 @@
         </p:nvSpPr>
         <p:spPr>
           <a:xfrm>
-            <a:off x="0" y="5015484"/>
-            <a:ext cx="9144000" cy="128016"/>
+            <a:off x="566928" y="201168"/>
+            <a:ext cx="475488" cy="50292"/>
           </a:xfrm>
           <a:prstGeom prst="rect">
             <a:avLst/>
@@ -11285,8 +11115,8 @@
         </p:nvSpPr>
         <p:spPr>
           <a:xfrm>
-            <a:off x="566928" y="1828800"/>
-            <a:ext cx="8010144" cy="914400"/>
+            <a:off x="566928" y="384048"/>
+            <a:ext cx="8010144" cy="237744"/>
           </a:xfrm>
           <a:prstGeom prst="rect">
             <a:avLst/>
@@ -11298,11 +11128,50 @@
           <a:bodyPr wrap="square" lIns="0" tIns="0" rIns="0" bIns="0" rtlCol="0" anchor="ctr"/>
           <a:lstStyle/>
           <a:p>
-            <a:pPr algn="ctr" indent="0" marL="0">
-              <a:buNone/>
-            </a:pPr>
-            <a:r>
-              <a:rPr lang="en-US" sz="3200" b="1" dirty="0">
+            <a:pPr indent="0" marL="0">
+              <a:buNone/>
+            </a:pPr>
+            <a:r>
+              <a:rPr lang="en-US" sz="1150" b="1" spc="180" kern="0" dirty="0">
+                <a:solidFill>
+                  <a:srgbClr val="9A6310"/>
+                </a:solidFill>
+                <a:latin typeface="Arial" pitchFamily="34" charset="0"/>
+                <a:ea typeface="Arial" pitchFamily="34" charset="-122"/>
+                <a:cs typeface="Arial" pitchFamily="34" charset="-120"/>
+              </a:rPr>
+              <a:t>JEMAND HAT GEKLICKT</a:t>
+            </a:r>
+            <a:endParaRPr lang="en-US" sz="1150" dirty="0"/>
+          </a:p>
+        </p:txBody>
+      </p:sp>
+      <p:sp>
+        <p:nvSpPr>
+          <p:cNvPr id="4" name="Text 2"/>
+          <p:cNvSpPr/>
+          <p:nvPr/>
+        </p:nvSpPr>
+        <p:spPr>
+          <a:xfrm>
+            <a:off x="566928" y="731520"/>
+            <a:ext cx="8010144" cy="603504"/>
+          </a:xfrm>
+          <a:prstGeom prst="rect">
+            <a:avLst/>
+          </a:prstGeom>
+          <a:noFill/>
+          <a:ln/>
+        </p:spPr>
+        <p:txBody>
+          <a:bodyPr wrap="square" lIns="0" tIns="0" rIns="0" bIns="0" rtlCol="0" anchor="t"/>
+          <a:lstStyle/>
+          <a:p>
+            <a:pPr indent="0" marL="0">
+              <a:buNone/>
+            </a:pPr>
+            <a:r>
+              <a:rPr lang="en-US" sz="2600" b="1" dirty="0">
                 <a:solidFill>
                   <a:srgbClr val="272E52"/>
                 </a:solidFill>
@@ -11310,38 +11179,85 @@
                 <a:ea typeface="Arial" pitchFamily="34" charset="-122"/>
                 <a:cs typeface="Arial" pitchFamily="34" charset="-120"/>
               </a:rPr>
-              <a:t>Die Datei ist die Infrastruktur.</a:t>
-            </a:r>
-            <a:endParaRPr lang="en-US" sz="3200" dirty="0"/>
-          </a:p>
-        </p:txBody>
-      </p:sp>
-      <p:sp>
-        <p:nvSpPr>
-          <p:cNvPr id="4" name="Text 2"/>
-          <p:cNvSpPr/>
-          <p:nvPr/>
-        </p:nvSpPr>
-        <p:spPr>
-          <a:xfrm>
-            <a:off x="566928" y="2788920"/>
-            <a:ext cx="8010144" cy="457200"/>
-          </a:xfrm>
-          <a:prstGeom prst="rect">
-            <a:avLst/>
-          </a:prstGeom>
-          <a:noFill/>
-          <a:ln/>
-        </p:spPr>
-        <p:txBody>
-          <a:bodyPr wrap="square" lIns="0" tIns="0" rIns="0" bIns="0" rtlCol="0" anchor="t"/>
-          <a:lstStyle/>
-          <a:p>
-            <a:pPr algn="ctr" indent="0" marL="0">
-              <a:buNone/>
-            </a:pPr>
-            <a:r>
-              <a:rPr lang="en-US" sz="1400" dirty="0">
+              <a:t>Station 4 · Lösung</a:t>
+            </a:r>
+            <a:endParaRPr lang="en-US" sz="2600" dirty="0"/>
+          </a:p>
+        </p:txBody>
+      </p:sp>
+      <p:pic>
+        <p:nvPicPr>
+          <p:cNvPr id="5" name="Image 0" descr="/Users/jacobmenge/Desktop/kurs-26.2b-orga/folienwerkstatt/assets/diagramme/iac-loesung-drift.png">    </p:cNvPr>
+          <p:cNvPicPr>
+            <a:picLocks noChangeAspect="1"/>
+          </p:cNvPicPr>
+          <p:nvPr/>
+        </p:nvPicPr>
+        <p:blipFill>
+          <a:blip r:embed="rId1"/>
+          <a:stretch>
+            <a:fillRect/>
+          </a:stretch>
+        </p:blipFill>
+        <p:spPr>
+          <a:xfrm>
+            <a:off x="566928" y="1335024"/>
+            <a:ext cx="8010144" cy="2651760"/>
+          </a:xfrm>
+          <a:prstGeom prst="rect">
+            <a:avLst/>
+          </a:prstGeom>
+        </p:spPr>
+      </p:pic>
+      <p:sp>
+        <p:nvSpPr>
+          <p:cNvPr id="6" name="Shape 3"/>
+          <p:cNvSpPr/>
+          <p:nvPr/>
+        </p:nvSpPr>
+        <p:spPr>
+          <a:xfrm>
+            <a:off x="566928" y="4631436"/>
+            <a:ext cx="8010144" cy="0"/>
+          </a:xfrm>
+          <a:prstGeom prst="line">
+            <a:avLst/>
+          </a:prstGeom>
+          <a:noFill/>
+          <a:ln w="9525">
+            <a:solidFill>
+              <a:srgbClr val="DFE3F0"/>
+            </a:solidFill>
+            <a:prstDash val="solid"/>
+          </a:ln>
+        </p:spPr>
+      </p:sp>
+      <p:sp>
+        <p:nvSpPr>
+          <p:cNvPr id="7" name="Text 4"/>
+          <p:cNvSpPr/>
+          <p:nvPr/>
+        </p:nvSpPr>
+        <p:spPr>
+          <a:xfrm>
+            <a:off x="566928" y="4722876"/>
+            <a:ext cx="5029200" cy="237744"/>
+          </a:xfrm>
+          <a:prstGeom prst="rect">
+            <a:avLst/>
+          </a:prstGeom>
+          <a:noFill/>
+          <a:ln/>
+        </p:spPr>
+        <p:txBody>
+          <a:bodyPr wrap="square" lIns="0" tIns="0" rIns="0" bIns="0" rtlCol="0" anchor="ctr"/>
+          <a:lstStyle/>
+          <a:p>
+            <a:pPr indent="0" marL="0">
+              <a:buNone/>
+            </a:pPr>
+            <a:r>
+              <a:rPr lang="en-US" sz="1050" spc="30" kern="0" dirty="0">
                 <a:solidFill>
                   <a:srgbClr val="5C6377"/>
                 </a:solidFill>
@@ -11349,48 +11265,48 @@
                 <a:ea typeface="Arial" pitchFamily="34" charset="-122"/>
                 <a:cs typeface="Arial" pitchFamily="34" charset="-120"/>
               </a:rPr>
-              <a:t>Übung und Theorie bleiben zum Nachlesen auf der Kursseite.</a:t>
-            </a:r>
-            <a:endParaRPr lang="en-US" sz="1400" dirty="0"/>
-          </a:p>
-        </p:txBody>
-      </p:sp>
-      <p:sp>
-        <p:nvSpPr>
-          <p:cNvPr id="5" name="Text 3"/>
-          <p:cNvSpPr/>
-          <p:nvPr/>
-        </p:nvSpPr>
-        <p:spPr>
-          <a:xfrm>
-            <a:off x="566928" y="3401568"/>
-            <a:ext cx="8010144" cy="457200"/>
-          </a:xfrm>
-          <a:prstGeom prst="rect">
-            <a:avLst/>
-          </a:prstGeom>
-          <a:noFill/>
-          <a:ln/>
-        </p:spPr>
-        <p:txBody>
-          <a:bodyPr wrap="square" lIns="0" tIns="0" rIns="0" bIns="0" rtlCol="0" anchor="t"/>
-          <a:lstStyle/>
-          <a:p>
-            <a:pPr algn="ctr" indent="0" marL="0">
-              <a:buNone/>
-            </a:pPr>
-            <a:r>
-              <a:rPr lang="en-US" sz="1600" b="1" dirty="0">
-                <a:solidFill>
-                  <a:srgbClr val="9A6310"/>
-                </a:solidFill>
-                <a:latin typeface="Arial" pitchFamily="34" charset="0"/>
-                <a:ea typeface="Arial" pitchFamily="34" charset="-122"/>
-                <a:cs typeface="Arial" pitchFamily="34" charset="-120"/>
-              </a:rPr>
-              <a:t>Mittwoch, 28. Oktober · Terraform, Teil 2</a:t>
-            </a:r>
-            <a:endParaRPr lang="en-US" sz="1600" dirty="0"/>
+              <a:t>Auswertung</a:t>
+            </a:r>
+            <a:endParaRPr lang="en-US" sz="1050" dirty="0"/>
+          </a:p>
+        </p:txBody>
+      </p:sp>
+      <p:sp>
+        <p:nvSpPr>
+          <p:cNvPr id="8" name="Text 5"/>
+          <p:cNvSpPr/>
+          <p:nvPr/>
+        </p:nvSpPr>
+        <p:spPr>
+          <a:xfrm>
+            <a:off x="8028432" y="4722876"/>
+            <a:ext cx="548640" cy="237744"/>
+          </a:xfrm>
+          <a:prstGeom prst="rect">
+            <a:avLst/>
+          </a:prstGeom>
+          <a:noFill/>
+          <a:ln/>
+        </p:spPr>
+        <p:txBody>
+          <a:bodyPr wrap="square" lIns="0" tIns="0" rIns="0" bIns="0" rtlCol="0" anchor="ctr"/>
+          <a:lstStyle/>
+          <a:p>
+            <a:pPr algn="r" indent="0" marL="0">
+              <a:buNone/>
+            </a:pPr>
+            <a:r>
+              <a:rPr lang="en-US" sz="1050" dirty="0">
+                <a:solidFill>
+                  <a:srgbClr val="5C6377"/>
+                </a:solidFill>
+                <a:latin typeface="Arial" pitchFamily="34" charset="0"/>
+                <a:ea typeface="Arial" pitchFamily="34" charset="-122"/>
+                <a:cs typeface="Arial" pitchFamily="34" charset="-120"/>
+              </a:rPr>
+              <a:t>25/27</a:t>
+            </a:r>
+            <a:endParaRPr lang="en-US" sz="1050" dirty="0"/>
           </a:p>
         </p:txBody>
       </p:sp>
@@ -11751,9 +11667,1125 @@
                 <a:ea typeface="Arial" pitchFamily="34" charset="-122"/>
                 <a:cs typeface="Arial" pitchFamily="34" charset="-120"/>
               </a:rPr>
-              <a:t>2/24</a:t>
+              <a:t>2/27</a:t>
             </a:r>
             <a:endParaRPr lang="en-US" sz="1050" dirty="0"/>
+          </a:p>
+        </p:txBody>
+      </p:sp>
+    </p:spTree>
+  </p:cSld>
+  <p:clrMapOvr>
+    <a:masterClrMapping/>
+  </p:clrMapOvr>
+</p:sld>
+</file>
+
+<file path=ppt/slides/slide30.xml><?xml version="1.0" encoding="utf-8"?>
+<p:sld xmlns:a="http://schemas.openxmlformats.org/drawingml/2006/main" xmlns:r="http://schemas.openxmlformats.org/officeDocument/2006/relationships" xmlns:p="http://schemas.openxmlformats.org/presentationml/2006/main">
+  <p:cSld name="Slide 30">
+    <p:bg>
+      <p:bgPr>
+        <a:solidFill>
+          <a:srgbClr val="FFFFFF"/>
+        </a:solidFill>
+      </p:bgPr>
+    </p:bg>
+    <p:spTree>
+      <p:nvGrpSpPr>
+        <p:cNvPr id="1" name=""/>
+        <p:cNvGrpSpPr/>
+        <p:nvPr/>
+      </p:nvGrpSpPr>
+      <p:grpSpPr>
+        <a:xfrm>
+          <a:off x="0" y="0"/>
+          <a:ext cx="0" cy="0"/>
+          <a:chOff x="0" y="0"/>
+          <a:chExt cx="0" cy="0"/>
+        </a:xfrm>
+      </p:grpSpPr>
+      <p:sp>
+        <p:nvSpPr>
+          <p:cNvPr id="2" name="Shape 0"/>
+          <p:cNvSpPr/>
+          <p:nvPr/>
+        </p:nvSpPr>
+        <p:spPr>
+          <a:xfrm>
+            <a:off x="566928" y="201168"/>
+            <a:ext cx="475488" cy="50292"/>
+          </a:xfrm>
+          <a:prstGeom prst="rect">
+            <a:avLst/>
+          </a:prstGeom>
+          <a:solidFill>
+            <a:srgbClr val="9A6310"/>
+          </a:solidFill>
+          <a:ln/>
+        </p:spPr>
+      </p:sp>
+      <p:sp>
+        <p:nvSpPr>
+          <p:cNvPr id="3" name="Text 1"/>
+          <p:cNvSpPr/>
+          <p:nvPr/>
+        </p:nvSpPr>
+        <p:spPr>
+          <a:xfrm>
+            <a:off x="566928" y="384048"/>
+            <a:ext cx="8010144" cy="237744"/>
+          </a:xfrm>
+          <a:prstGeom prst="rect">
+            <a:avLst/>
+          </a:prstGeom>
+          <a:noFill/>
+          <a:ln/>
+        </p:spPr>
+        <p:txBody>
+          <a:bodyPr wrap="square" lIns="0" tIns="0" rIns="0" bIns="0" rtlCol="0" anchor="ctr"/>
+          <a:lstStyle/>
+          <a:p>
+            <a:pPr indent="0" marL="0">
+              <a:buNone/>
+            </a:pPr>
+            <a:r>
+              <a:rPr lang="en-US" sz="1150" b="1" spc="180" kern="0" dirty="0">
+                <a:solidFill>
+                  <a:srgbClr val="9A6310"/>
+                </a:solidFill>
+                <a:latin typeface="Arial" pitchFamily="34" charset="0"/>
+                <a:ea typeface="Arial" pitchFamily="34" charset="-122"/>
+                <a:cs typeface="Arial" pitchFamily="34" charset="-120"/>
+              </a:rPr>
+              <a:t>ZWEI SERVER, DANN ALLES WEG</a:t>
+            </a:r>
+            <a:endParaRPr lang="en-US" sz="1150" dirty="0"/>
+          </a:p>
+        </p:txBody>
+      </p:sp>
+      <p:sp>
+        <p:nvSpPr>
+          <p:cNvPr id="4" name="Text 2"/>
+          <p:cNvSpPr/>
+          <p:nvPr/>
+        </p:nvSpPr>
+        <p:spPr>
+          <a:xfrm>
+            <a:off x="566928" y="731520"/>
+            <a:ext cx="8010144" cy="603504"/>
+          </a:xfrm>
+          <a:prstGeom prst="rect">
+            <a:avLst/>
+          </a:prstGeom>
+          <a:noFill/>
+          <a:ln/>
+        </p:spPr>
+        <p:txBody>
+          <a:bodyPr wrap="square" lIns="0" tIns="0" rIns="0" bIns="0" rtlCol="0" anchor="t"/>
+          <a:lstStyle/>
+          <a:p>
+            <a:pPr indent="0" marL="0">
+              <a:buNone/>
+            </a:pPr>
+            <a:r>
+              <a:rPr lang="en-US" sz="2600" b="1" dirty="0">
+                <a:solidFill>
+                  <a:srgbClr val="272E52"/>
+                </a:solidFill>
+                <a:latin typeface="Arial" pitchFamily="34" charset="0"/>
+                <a:ea typeface="Arial" pitchFamily="34" charset="-122"/>
+                <a:cs typeface="Arial" pitchFamily="34" charset="-120"/>
+              </a:rPr>
+              <a:t>Station 5 und 6 · Lösung</a:t>
+            </a:r>
+            <a:endParaRPr lang="en-US" sz="2600" dirty="0"/>
+          </a:p>
+        </p:txBody>
+      </p:sp>
+      <p:pic>
+        <p:nvPicPr>
+          <p:cNvPr id="5" name="Image 0" descr="/Users/jacobmenge/Desktop/kurs-26.2b-orga/folienwerkstatt/assets/diagramme/iac-loesung-zwei.png">    </p:cNvPr>
+          <p:cNvPicPr>
+            <a:picLocks noChangeAspect="1"/>
+          </p:cNvPicPr>
+          <p:nvPr/>
+        </p:nvPicPr>
+        <p:blipFill>
+          <a:blip r:embed="rId1"/>
+          <a:stretch>
+            <a:fillRect/>
+          </a:stretch>
+        </p:blipFill>
+        <p:spPr>
+          <a:xfrm>
+            <a:off x="566928" y="1316736"/>
+            <a:ext cx="8010144" cy="2798064"/>
+          </a:xfrm>
+          <a:prstGeom prst="rect">
+            <a:avLst/>
+          </a:prstGeom>
+        </p:spPr>
+      </p:pic>
+      <p:sp>
+        <p:nvSpPr>
+          <p:cNvPr id="6" name="Shape 3"/>
+          <p:cNvSpPr/>
+          <p:nvPr/>
+        </p:nvSpPr>
+        <p:spPr>
+          <a:xfrm>
+            <a:off x="566928" y="4631436"/>
+            <a:ext cx="8010144" cy="0"/>
+          </a:xfrm>
+          <a:prstGeom prst="line">
+            <a:avLst/>
+          </a:prstGeom>
+          <a:noFill/>
+          <a:ln w="9525">
+            <a:solidFill>
+              <a:srgbClr val="DFE3F0"/>
+            </a:solidFill>
+            <a:prstDash val="solid"/>
+          </a:ln>
+        </p:spPr>
+      </p:sp>
+      <p:sp>
+        <p:nvSpPr>
+          <p:cNvPr id="7" name="Text 4"/>
+          <p:cNvSpPr/>
+          <p:nvPr/>
+        </p:nvSpPr>
+        <p:spPr>
+          <a:xfrm>
+            <a:off x="566928" y="4722876"/>
+            <a:ext cx="5029200" cy="237744"/>
+          </a:xfrm>
+          <a:prstGeom prst="rect">
+            <a:avLst/>
+          </a:prstGeom>
+          <a:noFill/>
+          <a:ln/>
+        </p:spPr>
+        <p:txBody>
+          <a:bodyPr wrap="square" lIns="0" tIns="0" rIns="0" bIns="0" rtlCol="0" anchor="ctr"/>
+          <a:lstStyle/>
+          <a:p>
+            <a:pPr indent="0" marL="0">
+              <a:buNone/>
+            </a:pPr>
+            <a:r>
+              <a:rPr lang="en-US" sz="1050" spc="30" kern="0" dirty="0">
+                <a:solidFill>
+                  <a:srgbClr val="5C6377"/>
+                </a:solidFill>
+                <a:latin typeface="Arial" pitchFamily="34" charset="0"/>
+                <a:ea typeface="Arial" pitchFamily="34" charset="-122"/>
+                <a:cs typeface="Arial" pitchFamily="34" charset="-120"/>
+              </a:rPr>
+              <a:t>Auswertung</a:t>
+            </a:r>
+            <a:endParaRPr lang="en-US" sz="1050" dirty="0"/>
+          </a:p>
+        </p:txBody>
+      </p:sp>
+      <p:sp>
+        <p:nvSpPr>
+          <p:cNvPr id="8" name="Text 5"/>
+          <p:cNvSpPr/>
+          <p:nvPr/>
+        </p:nvSpPr>
+        <p:spPr>
+          <a:xfrm>
+            <a:off x="8028432" y="4722876"/>
+            <a:ext cx="548640" cy="237744"/>
+          </a:xfrm>
+          <a:prstGeom prst="rect">
+            <a:avLst/>
+          </a:prstGeom>
+          <a:noFill/>
+          <a:ln/>
+        </p:spPr>
+        <p:txBody>
+          <a:bodyPr wrap="square" lIns="0" tIns="0" rIns="0" bIns="0" rtlCol="0" anchor="ctr"/>
+          <a:lstStyle/>
+          <a:p>
+            <a:pPr algn="r" indent="0" marL="0">
+              <a:buNone/>
+            </a:pPr>
+            <a:r>
+              <a:rPr lang="en-US" sz="1050" dirty="0">
+                <a:solidFill>
+                  <a:srgbClr val="5C6377"/>
+                </a:solidFill>
+                <a:latin typeface="Arial" pitchFamily="34" charset="0"/>
+                <a:ea typeface="Arial" pitchFamily="34" charset="-122"/>
+                <a:cs typeface="Arial" pitchFamily="34" charset="-120"/>
+              </a:rPr>
+              <a:t>26/27</a:t>
+            </a:r>
+            <a:endParaRPr lang="en-US" sz="1050" dirty="0"/>
+          </a:p>
+        </p:txBody>
+      </p:sp>
+    </p:spTree>
+  </p:cSld>
+  <p:clrMapOvr>
+    <a:masterClrMapping/>
+  </p:clrMapOvr>
+</p:sld>
+</file>
+
+<file path=ppt/slides/slide31.xml><?xml version="1.0" encoding="utf-8"?>
+<p:sld xmlns:a="http://schemas.openxmlformats.org/drawingml/2006/main" xmlns:r="http://schemas.openxmlformats.org/officeDocument/2006/relationships" xmlns:p="http://schemas.openxmlformats.org/presentationml/2006/main">
+  <p:cSld name="Slide 31">
+    <p:bg>
+      <p:bgPr>
+        <a:solidFill>
+          <a:srgbClr val="FFFFFF"/>
+        </a:solidFill>
+      </p:bgPr>
+    </p:bg>
+    <p:spTree>
+      <p:nvGrpSpPr>
+        <p:cNvPr id="1" name=""/>
+        <p:cNvGrpSpPr/>
+        <p:nvPr/>
+      </p:nvGrpSpPr>
+      <p:grpSpPr>
+        <a:xfrm>
+          <a:off x="0" y="0"/>
+          <a:ext cx="0" cy="0"/>
+          <a:chOff x="0" y="0"/>
+          <a:chExt cx="0" cy="0"/>
+        </a:xfrm>
+      </p:grpSpPr>
+      <p:sp>
+        <p:nvSpPr>
+          <p:cNvPr id="2" name="Shape 0"/>
+          <p:cNvSpPr/>
+          <p:nvPr/>
+        </p:nvSpPr>
+        <p:spPr>
+          <a:xfrm>
+            <a:off x="566928" y="201168"/>
+            <a:ext cx="475488" cy="50292"/>
+          </a:xfrm>
+          <a:prstGeom prst="rect">
+            <a:avLst/>
+          </a:prstGeom>
+          <a:solidFill>
+            <a:srgbClr val="9A6310"/>
+          </a:solidFill>
+          <a:ln/>
+        </p:spPr>
+      </p:sp>
+      <p:sp>
+        <p:nvSpPr>
+          <p:cNvPr id="3" name="Text 1"/>
+          <p:cNvSpPr/>
+          <p:nvPr/>
+        </p:nvSpPr>
+        <p:spPr>
+          <a:xfrm>
+            <a:off x="566928" y="384048"/>
+            <a:ext cx="8010144" cy="237744"/>
+          </a:xfrm>
+          <a:prstGeom prst="rect">
+            <a:avLst/>
+          </a:prstGeom>
+          <a:noFill/>
+          <a:ln/>
+        </p:spPr>
+        <p:txBody>
+          <a:bodyPr wrap="square" lIns="0" tIns="0" rIns="0" bIns="0" rtlCol="0" anchor="ctr"/>
+          <a:lstStyle/>
+          <a:p>
+            <a:pPr indent="0" marL="0">
+              <a:buNone/>
+            </a:pPr>
+            <a:r>
+              <a:rPr lang="en-US" sz="1150" b="1" spc="180" kern="0" dirty="0">
+                <a:solidFill>
+                  <a:srgbClr val="9A6310"/>
+                </a:solidFill>
+                <a:latin typeface="Arial" pitchFamily="34" charset="0"/>
+                <a:ea typeface="Arial" pitchFamily="34" charset="-122"/>
+                <a:cs typeface="Arial" pitchFamily="34" charset="-120"/>
+              </a:rPr>
+              <a:t>AUSBLICK</a:t>
+            </a:r>
+            <a:endParaRPr lang="en-US" sz="1150" dirty="0"/>
+          </a:p>
+        </p:txBody>
+      </p:sp>
+      <p:sp>
+        <p:nvSpPr>
+          <p:cNvPr id="4" name="Text 2"/>
+          <p:cNvSpPr/>
+          <p:nvPr/>
+        </p:nvSpPr>
+        <p:spPr>
+          <a:xfrm>
+            <a:off x="566928" y="731520"/>
+            <a:ext cx="8010144" cy="603504"/>
+          </a:xfrm>
+          <a:prstGeom prst="rect">
+            <a:avLst/>
+          </a:prstGeom>
+          <a:noFill/>
+          <a:ln/>
+        </p:spPr>
+        <p:txBody>
+          <a:bodyPr wrap="square" lIns="0" tIns="0" rIns="0" bIns="0" rtlCol="0" anchor="t"/>
+          <a:lstStyle/>
+          <a:p>
+            <a:pPr indent="0" marL="0">
+              <a:buNone/>
+            </a:pPr>
+            <a:r>
+              <a:rPr lang="en-US" sz="2600" b="1" dirty="0">
+                <a:solidFill>
+                  <a:srgbClr val="272E52"/>
+                </a:solidFill>
+                <a:latin typeface="Arial" pitchFamily="34" charset="0"/>
+                <a:ea typeface="Arial" pitchFamily="34" charset="-122"/>
+                <a:cs typeface="Arial" pitchFamily="34" charset="-120"/>
+              </a:rPr>
+              <a:t>Bis Mittwoch</a:t>
+            </a:r>
+            <a:endParaRPr lang="en-US" sz="2600" dirty="0"/>
+          </a:p>
+        </p:txBody>
+      </p:sp>
+      <p:sp>
+        <p:nvSpPr>
+          <p:cNvPr id="5" name="Text 3"/>
+          <p:cNvSpPr/>
+          <p:nvPr/>
+        </p:nvSpPr>
+        <p:spPr>
+          <a:xfrm>
+            <a:off x="566928" y="1444752"/>
+            <a:ext cx="8010144" cy="438912"/>
+          </a:xfrm>
+          <a:prstGeom prst="rect">
+            <a:avLst/>
+          </a:prstGeom>
+          <a:noFill/>
+          <a:ln/>
+        </p:spPr>
+        <p:txBody>
+          <a:bodyPr wrap="square" lIns="0" tIns="0" rIns="0" bIns="0" rtlCol="0" anchor="t"/>
+          <a:lstStyle/>
+          <a:p>
+            <a:pPr indent="0" marL="0">
+              <a:buNone/>
+            </a:pPr>
+            <a:r>
+              <a:rPr lang="en-US" sz="1300" dirty="0">
+                <a:solidFill>
+                  <a:srgbClr val="5C6377"/>
+                </a:solidFill>
+                <a:latin typeface="Arial" pitchFamily="34" charset="0"/>
+                <a:ea typeface="Arial" pitchFamily="34" charset="-122"/>
+                <a:cs typeface="Arial" pitchFamily="34" charset="-120"/>
+              </a:rPr>
+              <a:t>Am Mittwoch geht es mit Terraform weiter, wieder in der Sandbox.</a:t>
+            </a:r>
+            <a:endParaRPr lang="en-US" sz="1300" dirty="0"/>
+          </a:p>
+        </p:txBody>
+      </p:sp>
+      <p:sp>
+        <p:nvSpPr>
+          <p:cNvPr id="6" name="Shape 4"/>
+          <p:cNvSpPr/>
+          <p:nvPr/>
+        </p:nvSpPr>
+        <p:spPr>
+          <a:xfrm>
+            <a:off x="566928" y="1975104"/>
+            <a:ext cx="2523744" cy="1645920"/>
+          </a:xfrm>
+          <a:prstGeom prst="rect">
+            <a:avLst/>
+          </a:prstGeom>
+          <a:solidFill>
+            <a:srgbClr val="F5F6FC"/>
+          </a:solidFill>
+          <a:ln/>
+        </p:spPr>
+      </p:sp>
+      <p:sp>
+        <p:nvSpPr>
+          <p:cNvPr id="7" name="Shape 5"/>
+          <p:cNvSpPr/>
+          <p:nvPr/>
+        </p:nvSpPr>
+        <p:spPr>
+          <a:xfrm>
+            <a:off x="566928" y="1975104"/>
+            <a:ext cx="41148" cy="1645920"/>
+          </a:xfrm>
+          <a:prstGeom prst="rect">
+            <a:avLst/>
+          </a:prstGeom>
+          <a:solidFill>
+            <a:srgbClr val="9A6310"/>
+          </a:solidFill>
+          <a:ln/>
+        </p:spPr>
+      </p:sp>
+      <p:sp>
+        <p:nvSpPr>
+          <p:cNvPr id="8" name="Text 6"/>
+          <p:cNvSpPr/>
+          <p:nvPr/>
+        </p:nvSpPr>
+        <p:spPr>
+          <a:xfrm>
+            <a:off x="804672" y="2121408"/>
+            <a:ext cx="2121408" cy="457200"/>
+          </a:xfrm>
+          <a:prstGeom prst="rect">
+            <a:avLst/>
+          </a:prstGeom>
+          <a:noFill/>
+          <a:ln/>
+        </p:spPr>
+        <p:txBody>
+          <a:bodyPr wrap="square" lIns="0" tIns="0" rIns="0" bIns="0" rtlCol="0" anchor="t"/>
+          <a:lstStyle/>
+          <a:p>
+            <a:pPr indent="0" marL="0">
+              <a:buNone/>
+            </a:pPr>
+            <a:r>
+              <a:rPr lang="en-US" sz="1300" b="1" dirty="0">
+                <a:solidFill>
+                  <a:srgbClr val="272E52"/>
+                </a:solidFill>
+                <a:latin typeface="Arial" pitchFamily="34" charset="0"/>
+                <a:ea typeface="Arial" pitchFamily="34" charset="-122"/>
+                <a:cs typeface="Arial" pitchFamily="34" charset="-120"/>
+              </a:rPr>
+              <a:t>Zum Nachlesen</a:t>
+            </a:r>
+            <a:endParaRPr lang="en-US" sz="1300" dirty="0"/>
+          </a:p>
+        </p:txBody>
+      </p:sp>
+      <p:sp>
+        <p:nvSpPr>
+          <p:cNvPr id="9" name="Text 7"/>
+          <p:cNvSpPr/>
+          <p:nvPr/>
+        </p:nvSpPr>
+        <p:spPr>
+          <a:xfrm>
+            <a:off x="804672" y="2624328"/>
+            <a:ext cx="2121408" cy="877824"/>
+          </a:xfrm>
+          <a:prstGeom prst="rect">
+            <a:avLst/>
+          </a:prstGeom>
+          <a:noFill/>
+          <a:ln/>
+        </p:spPr>
+        <p:txBody>
+          <a:bodyPr wrap="square" lIns="0" tIns="0" rIns="0" bIns="0" rtlCol="0" anchor="t"/>
+          <a:lstStyle/>
+          <a:p>
+            <a:pPr indent="0" marL="0">
+              <a:lnSpc>
+                <a:spcPct val="92000"/>
+              </a:lnSpc>
+              <a:buNone/>
+            </a:pPr>
+            <a:r>
+              <a:rPr lang="en-US" sz="1100" dirty="0">
+                <a:solidFill>
+                  <a:srgbClr val="434A63"/>
+                </a:solidFill>
+                <a:latin typeface="Arial" pitchFamily="34" charset="0"/>
+                <a:ea typeface="Arial" pitchFamily="34" charset="-122"/>
+                <a:cs typeface="Arial" pitchFamily="34" charset="-120"/>
+              </a:rPr>
+              <a:t>Die Theorie zu Infrastruktur als Code und die Übung mit allen Befehlen bleiben auf der Kursseite.</a:t>
+            </a:r>
+            <a:endParaRPr lang="en-US" sz="1100" dirty="0"/>
+          </a:p>
+        </p:txBody>
+      </p:sp>
+      <p:sp>
+        <p:nvSpPr>
+          <p:cNvPr id="10" name="Shape 8"/>
+          <p:cNvSpPr/>
+          <p:nvPr/>
+        </p:nvSpPr>
+        <p:spPr>
+          <a:xfrm>
+            <a:off x="3310128" y="1975104"/>
+            <a:ext cx="2523744" cy="1645920"/>
+          </a:xfrm>
+          <a:prstGeom prst="rect">
+            <a:avLst/>
+          </a:prstGeom>
+          <a:solidFill>
+            <a:srgbClr val="F5F6FC"/>
+          </a:solidFill>
+          <a:ln/>
+        </p:spPr>
+      </p:sp>
+      <p:sp>
+        <p:nvSpPr>
+          <p:cNvPr id="11" name="Shape 9"/>
+          <p:cNvSpPr/>
+          <p:nvPr/>
+        </p:nvSpPr>
+        <p:spPr>
+          <a:xfrm>
+            <a:off x="3310128" y="1975104"/>
+            <a:ext cx="41148" cy="1645920"/>
+          </a:xfrm>
+          <a:prstGeom prst="rect">
+            <a:avLst/>
+          </a:prstGeom>
+          <a:solidFill>
+            <a:srgbClr val="9A6310"/>
+          </a:solidFill>
+          <a:ln/>
+        </p:spPr>
+      </p:sp>
+      <p:sp>
+        <p:nvSpPr>
+          <p:cNvPr id="12" name="Text 10"/>
+          <p:cNvSpPr/>
+          <p:nvPr/>
+        </p:nvSpPr>
+        <p:spPr>
+          <a:xfrm>
+            <a:off x="3547872" y="2121408"/>
+            <a:ext cx="2121408" cy="457200"/>
+          </a:xfrm>
+          <a:prstGeom prst="rect">
+            <a:avLst/>
+          </a:prstGeom>
+          <a:noFill/>
+          <a:ln/>
+        </p:spPr>
+        <p:txBody>
+          <a:bodyPr wrap="square" lIns="0" tIns="0" rIns="0" bIns="0" rtlCol="0" anchor="t"/>
+          <a:lstStyle/>
+          <a:p>
+            <a:pPr indent="0" marL="0">
+              <a:buNone/>
+            </a:pPr>
+            <a:r>
+              <a:rPr lang="en-US" sz="1300" b="1" dirty="0">
+                <a:solidFill>
+                  <a:srgbClr val="272E52"/>
+                </a:solidFill>
+                <a:latin typeface="Arial" pitchFamily="34" charset="0"/>
+                <a:ea typeface="Arial" pitchFamily="34" charset="-122"/>
+                <a:cs typeface="Arial" pitchFamily="34" charset="-120"/>
+              </a:rPr>
+              <a:t>Das nehmt ihr mit</a:t>
+            </a:r>
+            <a:endParaRPr lang="en-US" sz="1300" dirty="0"/>
+          </a:p>
+        </p:txBody>
+      </p:sp>
+      <p:sp>
+        <p:nvSpPr>
+          <p:cNvPr id="13" name="Text 11"/>
+          <p:cNvSpPr/>
+          <p:nvPr/>
+        </p:nvSpPr>
+        <p:spPr>
+          <a:xfrm>
+            <a:off x="3547872" y="2624328"/>
+            <a:ext cx="2121408" cy="877824"/>
+          </a:xfrm>
+          <a:prstGeom prst="rect">
+            <a:avLst/>
+          </a:prstGeom>
+          <a:noFill/>
+          <a:ln/>
+        </p:spPr>
+        <p:txBody>
+          <a:bodyPr wrap="square" lIns="0" tIns="0" rIns="0" bIns="0" rtlCol="0" anchor="t"/>
+          <a:lstStyle/>
+          <a:p>
+            <a:pPr indent="0" marL="0">
+              <a:lnSpc>
+                <a:spcPct val="92000"/>
+              </a:lnSpc>
+              <a:buNone/>
+            </a:pPr>
+            <a:r>
+              <a:rPr lang="en-US" sz="1100" dirty="0">
+                <a:solidFill>
+                  <a:srgbClr val="434A63"/>
+                </a:solidFill>
+                <a:latin typeface="Arial" pitchFamily="34" charset="0"/>
+                <a:ea typeface="Arial" pitchFamily="34" charset="-122"/>
+                <a:cs typeface="Arial" pitchFamily="34" charset="-120"/>
+              </a:rPr>
+              <a:t>Soll statt Weg, init, plan, apply und destroy, den Plan lesen, die State-Datei und Drift.</a:t>
+            </a:r>
+            <a:endParaRPr lang="en-US" sz="1100" dirty="0"/>
+          </a:p>
+        </p:txBody>
+      </p:sp>
+      <p:sp>
+        <p:nvSpPr>
+          <p:cNvPr id="14" name="Shape 12"/>
+          <p:cNvSpPr/>
+          <p:nvPr/>
+        </p:nvSpPr>
+        <p:spPr>
+          <a:xfrm>
+            <a:off x="6053328" y="1975104"/>
+            <a:ext cx="2523744" cy="1645920"/>
+          </a:xfrm>
+          <a:prstGeom prst="rect">
+            <a:avLst/>
+          </a:prstGeom>
+          <a:solidFill>
+            <a:srgbClr val="F5F6FC"/>
+          </a:solidFill>
+          <a:ln/>
+        </p:spPr>
+      </p:sp>
+      <p:sp>
+        <p:nvSpPr>
+          <p:cNvPr id="15" name="Shape 13"/>
+          <p:cNvSpPr/>
+          <p:nvPr/>
+        </p:nvSpPr>
+        <p:spPr>
+          <a:xfrm>
+            <a:off x="6053328" y="1975104"/>
+            <a:ext cx="41148" cy="1645920"/>
+          </a:xfrm>
+          <a:prstGeom prst="rect">
+            <a:avLst/>
+          </a:prstGeom>
+          <a:solidFill>
+            <a:srgbClr val="9A6310"/>
+          </a:solidFill>
+          <a:ln/>
+        </p:spPr>
+      </p:sp>
+      <p:sp>
+        <p:nvSpPr>
+          <p:cNvPr id="16" name="Text 14"/>
+          <p:cNvSpPr/>
+          <p:nvPr/>
+        </p:nvSpPr>
+        <p:spPr>
+          <a:xfrm>
+            <a:off x="6291072" y="2121408"/>
+            <a:ext cx="2121408" cy="457200"/>
+          </a:xfrm>
+          <a:prstGeom prst="rect">
+            <a:avLst/>
+          </a:prstGeom>
+          <a:noFill/>
+          <a:ln/>
+        </p:spPr>
+        <p:txBody>
+          <a:bodyPr wrap="square" lIns="0" tIns="0" rIns="0" bIns="0" rtlCol="0" anchor="t"/>
+          <a:lstStyle/>
+          <a:p>
+            <a:pPr indent="0" marL="0">
+              <a:buNone/>
+            </a:pPr>
+            <a:r>
+              <a:rPr lang="en-US" sz="1300" b="1" dirty="0">
+                <a:solidFill>
+                  <a:srgbClr val="272E52"/>
+                </a:solidFill>
+                <a:latin typeface="Arial" pitchFamily="34" charset="0"/>
+                <a:ea typeface="Arial" pitchFamily="34" charset="-122"/>
+                <a:cs typeface="Arial" pitchFamily="34" charset="-120"/>
+              </a:rPr>
+              <a:t>Am Mittwoch</a:t>
+            </a:r>
+            <a:endParaRPr lang="en-US" sz="1300" dirty="0"/>
+          </a:p>
+        </p:txBody>
+      </p:sp>
+      <p:sp>
+        <p:nvSpPr>
+          <p:cNvPr id="17" name="Text 15"/>
+          <p:cNvSpPr/>
+          <p:nvPr/>
+        </p:nvSpPr>
+        <p:spPr>
+          <a:xfrm>
+            <a:off x="6291072" y="2624328"/>
+            <a:ext cx="2121408" cy="877824"/>
+          </a:xfrm>
+          <a:prstGeom prst="rect">
+            <a:avLst/>
+          </a:prstGeom>
+          <a:noFill/>
+          <a:ln/>
+        </p:spPr>
+        <p:txBody>
+          <a:bodyPr wrap="square" lIns="0" tIns="0" rIns="0" bIns="0" rtlCol="0" anchor="t"/>
+          <a:lstStyle/>
+          <a:p>
+            <a:pPr indent="0" marL="0">
+              <a:lnSpc>
+                <a:spcPct val="92000"/>
+              </a:lnSpc>
+              <a:buNone/>
+            </a:pPr>
+            <a:r>
+              <a:rPr lang="en-US" sz="1100" dirty="0">
+                <a:solidFill>
+                  <a:srgbClr val="434A63"/>
+                </a:solidFill>
+                <a:latin typeface="Arial" pitchFamily="34" charset="0"/>
+                <a:ea typeface="Arial" pitchFamily="34" charset="-122"/>
+                <a:cs typeface="Arial" pitchFamily="34" charset="-120"/>
+              </a:rPr>
+              <a:t>Ihr baut das Cloud-Rennen als Code nach: zwei Server in zwei Zonen hinter einem Load Balancer, aus einer Datei.</a:t>
+            </a:r>
+            <a:endParaRPr lang="en-US" sz="1100" dirty="0"/>
+          </a:p>
+        </p:txBody>
+      </p:sp>
+      <p:sp>
+        <p:nvSpPr>
+          <p:cNvPr id="18" name="Shape 16"/>
+          <p:cNvSpPr/>
+          <p:nvPr/>
+        </p:nvSpPr>
+        <p:spPr>
+          <a:xfrm>
+            <a:off x="566928" y="3886200"/>
+            <a:ext cx="32004" cy="256032"/>
+          </a:xfrm>
+          <a:prstGeom prst="rect">
+            <a:avLst/>
+          </a:prstGeom>
+          <a:solidFill>
+            <a:srgbClr val="9A6310"/>
+          </a:solidFill>
+          <a:ln/>
+        </p:spPr>
+      </p:sp>
+      <p:sp>
+        <p:nvSpPr>
+          <p:cNvPr id="19" name="Text 17"/>
+          <p:cNvSpPr/>
+          <p:nvPr/>
+        </p:nvSpPr>
+        <p:spPr>
+          <a:xfrm>
+            <a:off x="749808" y="3840480"/>
+            <a:ext cx="7827264" cy="402336"/>
+          </a:xfrm>
+          <a:prstGeom prst="rect">
+            <a:avLst/>
+          </a:prstGeom>
+          <a:noFill/>
+          <a:ln/>
+        </p:spPr>
+        <p:txBody>
+          <a:bodyPr wrap="square" lIns="0" tIns="0" rIns="0" bIns="0" rtlCol="0" anchor="ctr"/>
+          <a:lstStyle/>
+          <a:p>
+            <a:pPr indent="0" marL="0">
+              <a:buNone/>
+            </a:pPr>
+            <a:r>
+              <a:rPr lang="en-US" sz="1200" b="1" dirty="0">
+                <a:solidFill>
+                  <a:srgbClr val="434A63"/>
+                </a:solidFill>
+                <a:latin typeface="Arial" pitchFamily="34" charset="0"/>
+                <a:ea typeface="Arial" pitchFamily="34" charset="-122"/>
+                <a:cs typeface="Arial" pitchFamily="34" charset="-120"/>
+              </a:rPr>
+              <a:t>Nächster Termin: Mittwoch, 28. Oktober um 18:00 Uhr.</a:t>
+            </a:r>
+            <a:endParaRPr lang="en-US" sz="1200" dirty="0"/>
+          </a:p>
+        </p:txBody>
+      </p:sp>
+      <p:sp>
+        <p:nvSpPr>
+          <p:cNvPr id="20" name="Shape 18"/>
+          <p:cNvSpPr/>
+          <p:nvPr/>
+        </p:nvSpPr>
+        <p:spPr>
+          <a:xfrm>
+            <a:off x="566928" y="4631436"/>
+            <a:ext cx="8010144" cy="0"/>
+          </a:xfrm>
+          <a:prstGeom prst="line">
+            <a:avLst/>
+          </a:prstGeom>
+          <a:noFill/>
+          <a:ln w="9525">
+            <a:solidFill>
+              <a:srgbClr val="DFE3F0"/>
+            </a:solidFill>
+            <a:prstDash val="solid"/>
+          </a:ln>
+        </p:spPr>
+      </p:sp>
+      <p:sp>
+        <p:nvSpPr>
+          <p:cNvPr id="21" name="Text 19"/>
+          <p:cNvSpPr/>
+          <p:nvPr/>
+        </p:nvSpPr>
+        <p:spPr>
+          <a:xfrm>
+            <a:off x="566928" y="4722876"/>
+            <a:ext cx="5029200" cy="237744"/>
+          </a:xfrm>
+          <a:prstGeom prst="rect">
+            <a:avLst/>
+          </a:prstGeom>
+          <a:noFill/>
+          <a:ln/>
+        </p:spPr>
+        <p:txBody>
+          <a:bodyPr wrap="square" lIns="0" tIns="0" rIns="0" bIns="0" rtlCol="0" anchor="ctr"/>
+          <a:lstStyle/>
+          <a:p>
+            <a:pPr indent="0" marL="0">
+              <a:buNone/>
+            </a:pPr>
+            <a:r>
+              <a:rPr lang="en-US" sz="1050" spc="30" kern="0" dirty="0">
+                <a:solidFill>
+                  <a:srgbClr val="5C6377"/>
+                </a:solidFill>
+                <a:latin typeface="Arial" pitchFamily="34" charset="0"/>
+                <a:ea typeface="Arial" pitchFamily="34" charset="-122"/>
+                <a:cs typeface="Arial" pitchFamily="34" charset="-120"/>
+              </a:rPr>
+              <a:t>Abschluss</a:t>
+            </a:r>
+            <a:endParaRPr lang="en-US" sz="1050" dirty="0"/>
+          </a:p>
+        </p:txBody>
+      </p:sp>
+      <p:sp>
+        <p:nvSpPr>
+          <p:cNvPr id="22" name="Text 20"/>
+          <p:cNvSpPr/>
+          <p:nvPr/>
+        </p:nvSpPr>
+        <p:spPr>
+          <a:xfrm>
+            <a:off x="8028432" y="4722876"/>
+            <a:ext cx="548640" cy="237744"/>
+          </a:xfrm>
+          <a:prstGeom prst="rect">
+            <a:avLst/>
+          </a:prstGeom>
+          <a:noFill/>
+          <a:ln/>
+        </p:spPr>
+        <p:txBody>
+          <a:bodyPr wrap="square" lIns="0" tIns="0" rIns="0" bIns="0" rtlCol="0" anchor="ctr"/>
+          <a:lstStyle/>
+          <a:p>
+            <a:pPr algn="r" indent="0" marL="0">
+              <a:buNone/>
+            </a:pPr>
+            <a:r>
+              <a:rPr lang="en-US" sz="1050" dirty="0">
+                <a:solidFill>
+                  <a:srgbClr val="5C6377"/>
+                </a:solidFill>
+                <a:latin typeface="Arial" pitchFamily="34" charset="0"/>
+                <a:ea typeface="Arial" pitchFamily="34" charset="-122"/>
+                <a:cs typeface="Arial" pitchFamily="34" charset="-120"/>
+              </a:rPr>
+              <a:t>27/27</a:t>
+            </a:r>
+            <a:endParaRPr lang="en-US" sz="1050" dirty="0"/>
+          </a:p>
+        </p:txBody>
+      </p:sp>
+    </p:spTree>
+  </p:cSld>
+  <p:clrMapOvr>
+    <a:masterClrMapping/>
+  </p:clrMapOvr>
+</p:sld>
+</file>
+
+<file path=ppt/slides/slide32.xml><?xml version="1.0" encoding="utf-8"?>
+<p:sld xmlns:a="http://schemas.openxmlformats.org/drawingml/2006/main" xmlns:r="http://schemas.openxmlformats.org/officeDocument/2006/relationships" xmlns:p="http://schemas.openxmlformats.org/presentationml/2006/main">
+  <p:cSld name="Slide 32">
+    <p:bg>
+      <p:bgPr>
+        <a:solidFill>
+          <a:srgbClr val="F5F6FC"/>
+        </a:solidFill>
+      </p:bgPr>
+    </p:bg>
+    <p:spTree>
+      <p:nvGrpSpPr>
+        <p:cNvPr id="1" name=""/>
+        <p:cNvGrpSpPr/>
+        <p:nvPr/>
+      </p:nvGrpSpPr>
+      <p:grpSpPr>
+        <a:xfrm>
+          <a:off x="0" y="0"/>
+          <a:ext cx="0" cy="0"/>
+          <a:chOff x="0" y="0"/>
+          <a:chExt cx="0" cy="0"/>
+        </a:xfrm>
+      </p:grpSpPr>
+      <p:sp>
+        <p:nvSpPr>
+          <p:cNvPr id="2" name="Shape 0"/>
+          <p:cNvSpPr/>
+          <p:nvPr/>
+        </p:nvSpPr>
+        <p:spPr>
+          <a:xfrm>
+            <a:off x="0" y="5015484"/>
+            <a:ext cx="9144000" cy="128016"/>
+          </a:xfrm>
+          <a:prstGeom prst="rect">
+            <a:avLst/>
+          </a:prstGeom>
+          <a:solidFill>
+            <a:srgbClr val="9A6310"/>
+          </a:solidFill>
+          <a:ln/>
+        </p:spPr>
+      </p:sp>
+      <p:sp>
+        <p:nvSpPr>
+          <p:cNvPr id="3" name="Text 1"/>
+          <p:cNvSpPr/>
+          <p:nvPr/>
+        </p:nvSpPr>
+        <p:spPr>
+          <a:xfrm>
+            <a:off x="566928" y="1828800"/>
+            <a:ext cx="8010144" cy="914400"/>
+          </a:xfrm>
+          <a:prstGeom prst="rect">
+            <a:avLst/>
+          </a:prstGeom>
+          <a:noFill/>
+          <a:ln/>
+        </p:spPr>
+        <p:txBody>
+          <a:bodyPr wrap="square" lIns="0" tIns="0" rIns="0" bIns="0" rtlCol="0" anchor="ctr"/>
+          <a:lstStyle/>
+          <a:p>
+            <a:pPr algn="ctr" indent="0" marL="0">
+              <a:buNone/>
+            </a:pPr>
+            <a:r>
+              <a:rPr lang="en-US" sz="3200" b="1" dirty="0">
+                <a:solidFill>
+                  <a:srgbClr val="272E52"/>
+                </a:solidFill>
+                <a:latin typeface="Arial" pitchFamily="34" charset="0"/>
+                <a:ea typeface="Arial" pitchFamily="34" charset="-122"/>
+                <a:cs typeface="Arial" pitchFamily="34" charset="-120"/>
+              </a:rPr>
+              <a:t>Die Datei ist die Infrastruktur.</a:t>
+            </a:r>
+            <a:endParaRPr lang="en-US" sz="3200" dirty="0"/>
+          </a:p>
+        </p:txBody>
+      </p:sp>
+      <p:sp>
+        <p:nvSpPr>
+          <p:cNvPr id="4" name="Text 2"/>
+          <p:cNvSpPr/>
+          <p:nvPr/>
+        </p:nvSpPr>
+        <p:spPr>
+          <a:xfrm>
+            <a:off x="566928" y="2788920"/>
+            <a:ext cx="8010144" cy="457200"/>
+          </a:xfrm>
+          <a:prstGeom prst="rect">
+            <a:avLst/>
+          </a:prstGeom>
+          <a:noFill/>
+          <a:ln/>
+        </p:spPr>
+        <p:txBody>
+          <a:bodyPr wrap="square" lIns="0" tIns="0" rIns="0" bIns="0" rtlCol="0" anchor="t"/>
+          <a:lstStyle/>
+          <a:p>
+            <a:pPr algn="ctr" indent="0" marL="0">
+              <a:buNone/>
+            </a:pPr>
+            <a:r>
+              <a:rPr lang="en-US" sz="1400" dirty="0">
+                <a:solidFill>
+                  <a:srgbClr val="5C6377"/>
+                </a:solidFill>
+                <a:latin typeface="Arial" pitchFamily="34" charset="0"/>
+                <a:ea typeface="Arial" pitchFamily="34" charset="-122"/>
+                <a:cs typeface="Arial" pitchFamily="34" charset="-120"/>
+              </a:rPr>
+              <a:t>Übung und Theorie bleiben zum Nachlesen auf der Kursseite.</a:t>
+            </a:r>
+            <a:endParaRPr lang="en-US" sz="1400" dirty="0"/>
+          </a:p>
+        </p:txBody>
+      </p:sp>
+      <p:sp>
+        <p:nvSpPr>
+          <p:cNvPr id="5" name="Text 3"/>
+          <p:cNvSpPr/>
+          <p:nvPr/>
+        </p:nvSpPr>
+        <p:spPr>
+          <a:xfrm>
+            <a:off x="566928" y="3401568"/>
+            <a:ext cx="8010144" cy="457200"/>
+          </a:xfrm>
+          <a:prstGeom prst="rect">
+            <a:avLst/>
+          </a:prstGeom>
+          <a:noFill/>
+          <a:ln/>
+        </p:spPr>
+        <p:txBody>
+          <a:bodyPr wrap="square" lIns="0" tIns="0" rIns="0" bIns="0" rtlCol="0" anchor="t"/>
+          <a:lstStyle/>
+          <a:p>
+            <a:pPr algn="ctr" indent="0" marL="0">
+              <a:buNone/>
+            </a:pPr>
+            <a:r>
+              <a:rPr lang="en-US" sz="1600" b="1" dirty="0">
+                <a:solidFill>
+                  <a:srgbClr val="9A6310"/>
+                </a:solidFill>
+                <a:latin typeface="Arial" pitchFamily="34" charset="0"/>
+                <a:ea typeface="Arial" pitchFamily="34" charset="-122"/>
+                <a:cs typeface="Arial" pitchFamily="34" charset="-120"/>
+              </a:rPr>
+              <a:t>Mittwoch, 28. Oktober · Terraform, Teil 2</a:t>
+            </a:r>
+            <a:endParaRPr lang="en-US" sz="1600" dirty="0"/>
           </a:p>
         </p:txBody>
       </p:sp>
@@ -12006,7 +13038,7 @@
                 <a:ea typeface="Arial" pitchFamily="34" charset="-122"/>
                 <a:cs typeface="Arial" pitchFamily="34" charset="-120"/>
               </a:rPr>
-              <a:t>3/24</a:t>
+              <a:t>3/27</a:t>
             </a:r>
             <a:endParaRPr lang="en-US" sz="1050" dirty="0"/>
           </a:p>
@@ -12470,7 +13502,7 @@
                 <a:ea typeface="Arial" pitchFamily="34" charset="-122"/>
                 <a:cs typeface="Arial" pitchFamily="34" charset="-120"/>
               </a:rPr>
-              <a:t>4/24</a:t>
+              <a:t>4/27</a:t>
             </a:r>
             <a:endParaRPr lang="en-US" sz="1050" dirty="0"/>
           </a:p>
@@ -12725,7 +13757,7 @@
                 <a:ea typeface="Arial" pitchFamily="34" charset="-122"/>
                 <a:cs typeface="Arial" pitchFamily="34" charset="-120"/>
               </a:rPr>
-              <a:t>5/24</a:t>
+              <a:t>5/27</a:t>
             </a:r>
             <a:endParaRPr lang="en-US" sz="1050" dirty="0"/>
           </a:p>
@@ -12980,7 +14012,7 @@
                 <a:ea typeface="Arial" pitchFamily="34" charset="-122"/>
                 <a:cs typeface="Arial" pitchFamily="34" charset="-120"/>
               </a:rPr>
-              <a:t>6/24</a:t>
+              <a:t>6/27</a:t>
             </a:r>
             <a:endParaRPr lang="en-US" sz="1050" dirty="0"/>
           </a:p>
